--- a/PowerPointAppDev.pptx
+++ b/PowerPointAppDev.pptx
@@ -286,7 +286,41 @@
       </a:defRPr>
     </a:lvl9pPr>
   </p:defaultTextStyle>
+  <p:extLst>
+    <p:ext uri="{EFAFB233-063F-42B5-8137-9DF3F51BA10A}">
+      <p15:sldGuideLst xmlns:p15="http://schemas.microsoft.com/office/powerpoint/2012/main"/>
+    </p:ext>
+  </p:extLst>
 </p:presentation>
+</file>
+
+<file path=ppt/changesInfos/changesInfo1.xml><?xml version="1.0" encoding="utf-8"?>
+<pc:chgInfo xmlns:a="http://schemas.openxmlformats.org/drawingml/2006/main" xmlns:r="http://schemas.openxmlformats.org/officeDocument/2006/relationships" xmlns:ac="http://schemas.microsoft.com/office/drawing/2013/main/command" xmlns:pc="http://schemas.microsoft.com/office/powerpoint/2013/main/command">
+  <pc:docChgLst>
+    <pc:chgData name="Audreane Deschenes" userId="23aa82a02f6ee89b" providerId="LiveId" clId="{6C83BED0-3AB7-417E-AB86-80F74B7F3F60}"/>
+    <pc:docChg chg="custSel addSld delSld modSld">
+      <pc:chgData name="Audreane Deschenes" userId="23aa82a02f6ee89b" providerId="LiveId" clId="{6C83BED0-3AB7-417E-AB86-80F74B7F3F60}" dt="2025-12-11T08:25:12.756" v="3" actId="2696"/>
+      <pc:docMkLst>
+        <pc:docMk/>
+      </pc:docMkLst>
+      <pc:sldChg chg="delSp modSp add del mod">
+        <pc:chgData name="Audreane Deschenes" userId="23aa82a02f6ee89b" providerId="LiveId" clId="{6C83BED0-3AB7-417E-AB86-80F74B7F3F60}" dt="2025-12-11T08:25:12.756" v="3" actId="2696"/>
+        <pc:sldMkLst>
+          <pc:docMk/>
+          <pc:sldMk cId="3613149469" sldId="304"/>
+        </pc:sldMkLst>
+        <pc:picChg chg="del mod">
+          <ac:chgData name="Audreane Deschenes" userId="23aa82a02f6ee89b" providerId="LiveId" clId="{6C83BED0-3AB7-417E-AB86-80F74B7F3F60}" dt="2025-12-11T08:24:54.531" v="2" actId="478"/>
+          <ac:picMkLst>
+            <pc:docMk/>
+            <pc:sldMk cId="3613149469" sldId="304"/>
+            <ac:picMk id="3" creationId="{3ADE4781-62F6-D8BE-A8B0-CB0A7A8B5084}"/>
+          </ac:picMkLst>
+        </pc:picChg>
+      </pc:sldChg>
+    </pc:docChg>
+  </pc:docChgLst>
+</pc:chgInfo>
 </file>
 
 <file path=ppt/notesMasters/notesMaster1.xml><?xml version="1.0" encoding="utf-8"?>

--- a/PowerPointAppDev.pptx
+++ b/PowerPointAppDev.pptx
@@ -30,31 +30,31 @@
   <p:notesSz cx="6858000" cy="9144000"/>
   <p:embeddedFontLst>
     <p:embeddedFont>
-      <p:font typeface="Yusei Magic" panose="020B0604020202020204" charset="-128"/>
+      <p:font typeface="Yusei Magic" charset="-128"/>
       <p:regular r:id="rId20"/>
     </p:embeddedFont>
     <p:embeddedFont>
-      <p:font typeface="Bebas Neue" panose="020B0606020202050201" pitchFamily="34" charset="0"/>
+      <p:font typeface="DM Sans Medium" charset="0"/>
       <p:regular r:id="rId21"/>
+      <p:bold r:id="rId22"/>
+      <p:italic r:id="rId23"/>
+      <p:boldItalic r:id="rId24"/>
     </p:embeddedFont>
     <p:embeddedFont>
-      <p:font typeface="DM Sans Medium" pitchFamily="2" charset="0"/>
-      <p:regular r:id="rId22"/>
-      <p:bold r:id="rId23"/>
-      <p:italic r:id="rId24"/>
-      <p:boldItalic r:id="rId25"/>
+      <p:font typeface="Raleway" charset="0"/>
+      <p:regular r:id="rId25"/>
+      <p:bold r:id="rId26"/>
+      <p:italic r:id="rId27"/>
+      <p:boldItalic r:id="rId28"/>
     </p:embeddedFont>
     <p:embeddedFont>
-      <p:font typeface="Nunito Light" pitchFamily="2" charset="0"/>
-      <p:regular r:id="rId26"/>
-      <p:italic r:id="rId27"/>
+      <p:font typeface="Nunito Light" charset="0"/>
+      <p:regular r:id="rId29"/>
+      <p:italic r:id="rId30"/>
     </p:embeddedFont>
     <p:embeddedFont>
-      <p:font typeface="Raleway" pitchFamily="2" charset="0"/>
-      <p:regular r:id="rId28"/>
-      <p:bold r:id="rId29"/>
-      <p:italic r:id="rId30"/>
-      <p:boldItalic r:id="rId31"/>
+      <p:font typeface="Bebas Neue" charset="0"/>
+      <p:regular r:id="rId31"/>
     </p:embeddedFont>
   </p:embeddedFontLst>
   <p:defaultTextStyle>
@@ -288,7 +288,7 @@
   </p:defaultTextStyle>
   <p:extLst>
     <p:ext uri="{EFAFB233-063F-42B5-8137-9DF3F51BA10A}">
-      <p15:sldGuideLst xmlns:p15="http://schemas.microsoft.com/office/powerpoint/2012/main"/>
+      <p15:sldGuideLst xmlns:p15="http://schemas.microsoft.com/office/powerpoint/2012/main" xmlns=""/>
     </p:ext>
   </p:extLst>
 </p:presentation>
@@ -876,7 +876,7 @@
         <p:cNvPr id="1" name="Shape 514">
           <a:extLst>
             <a:ext uri="{FF2B5EF4-FFF2-40B4-BE49-F238E27FC236}">
-              <a16:creationId xmlns:a16="http://schemas.microsoft.com/office/drawing/2014/main" id="{1B7FF502-B8A4-E63A-D57C-24C888FE305A}"/>
+              <a16:creationId xmlns:a16="http://schemas.microsoft.com/office/drawing/2014/main" xmlns="" id="{1B7FF502-B8A4-E63A-D57C-24C888FE305A}"/>
             </a:ext>
           </a:extLst>
         </p:cNvPr>
@@ -896,7 +896,7 @@
           <p:cNvPr id="515" name="Google Shape;515;g1125d80b419_0_776:notes">
             <a:extLst>
               <a:ext uri="{FF2B5EF4-FFF2-40B4-BE49-F238E27FC236}">
-                <a16:creationId xmlns:a16="http://schemas.microsoft.com/office/drawing/2014/main" id="{47005946-C2E3-0686-B145-596813D90AE0}"/>
+                <a16:creationId xmlns:a16="http://schemas.microsoft.com/office/drawing/2014/main" xmlns="" id="{47005946-C2E3-0686-B145-596813D90AE0}"/>
               </a:ext>
             </a:extLst>
           </p:cNvPr>
@@ -943,7 +943,7 @@
           <p:cNvPr id="516" name="Google Shape;516;g1125d80b419_0_776:notes">
             <a:extLst>
               <a:ext uri="{FF2B5EF4-FFF2-40B4-BE49-F238E27FC236}">
-                <a16:creationId xmlns:a16="http://schemas.microsoft.com/office/drawing/2014/main" id="{A63786EF-4265-B25F-54B7-37E19DF8D7DE}"/>
+                <a16:creationId xmlns:a16="http://schemas.microsoft.com/office/drawing/2014/main" xmlns="" id="{A63786EF-4265-B25F-54B7-37E19DF8D7DE}"/>
               </a:ext>
             </a:extLst>
           </p:cNvPr>
@@ -985,7 +985,7 @@
     </p:spTree>
     <p:extLst>
       <p:ext uri="{BB962C8B-B14F-4D97-AF65-F5344CB8AC3E}">
-        <p14:creationId xmlns:p14="http://schemas.microsoft.com/office/powerpoint/2010/main" val="3299046637"/>
+        <p14:creationId xmlns:p14="http://schemas.microsoft.com/office/powerpoint/2010/main" xmlns="" val="3299046637"/>
       </p:ext>
     </p:extLst>
   </p:cSld>
@@ -1003,7 +1003,7 @@
         <p:cNvPr id="1" name="Shape 514">
           <a:extLst>
             <a:ext uri="{FF2B5EF4-FFF2-40B4-BE49-F238E27FC236}">
-              <a16:creationId xmlns:a16="http://schemas.microsoft.com/office/drawing/2014/main" id="{71749BEE-83B9-95FB-979D-1F34E364292D}"/>
+              <a16:creationId xmlns:a16="http://schemas.microsoft.com/office/drawing/2014/main" xmlns="" id="{71749BEE-83B9-95FB-979D-1F34E364292D}"/>
             </a:ext>
           </a:extLst>
         </p:cNvPr>
@@ -1023,7 +1023,7 @@
           <p:cNvPr id="515" name="Google Shape;515;g1125d80b419_0_776:notes">
             <a:extLst>
               <a:ext uri="{FF2B5EF4-FFF2-40B4-BE49-F238E27FC236}">
-                <a16:creationId xmlns:a16="http://schemas.microsoft.com/office/drawing/2014/main" id="{271E5404-CC2B-9206-E649-655B8C98341F}"/>
+                <a16:creationId xmlns:a16="http://schemas.microsoft.com/office/drawing/2014/main" xmlns="" id="{271E5404-CC2B-9206-E649-655B8C98341F}"/>
               </a:ext>
             </a:extLst>
           </p:cNvPr>
@@ -1070,7 +1070,7 @@
           <p:cNvPr id="516" name="Google Shape;516;g1125d80b419_0_776:notes">
             <a:extLst>
               <a:ext uri="{FF2B5EF4-FFF2-40B4-BE49-F238E27FC236}">
-                <a16:creationId xmlns:a16="http://schemas.microsoft.com/office/drawing/2014/main" id="{21B8C2F6-DD52-B3AA-9E3B-8C2E0FA4525B}"/>
+                <a16:creationId xmlns:a16="http://schemas.microsoft.com/office/drawing/2014/main" xmlns="" id="{21B8C2F6-DD52-B3AA-9E3B-8C2E0FA4525B}"/>
               </a:ext>
             </a:extLst>
           </p:cNvPr>
@@ -1112,7 +1112,7 @@
     </p:spTree>
     <p:extLst>
       <p:ext uri="{BB962C8B-B14F-4D97-AF65-F5344CB8AC3E}">
-        <p14:creationId xmlns:p14="http://schemas.microsoft.com/office/powerpoint/2010/main" val="1454762325"/>
+        <p14:creationId xmlns:p14="http://schemas.microsoft.com/office/powerpoint/2010/main" xmlns="" val="1454762325"/>
       </p:ext>
     </p:extLst>
   </p:cSld>
@@ -1130,7 +1130,7 @@
         <p:cNvPr id="1" name="Shape 514">
           <a:extLst>
             <a:ext uri="{FF2B5EF4-FFF2-40B4-BE49-F238E27FC236}">
-              <a16:creationId xmlns:a16="http://schemas.microsoft.com/office/drawing/2014/main" id="{8A22B913-F0EB-5790-3C57-47D0BB90E15A}"/>
+              <a16:creationId xmlns:a16="http://schemas.microsoft.com/office/drawing/2014/main" xmlns="" id="{8A22B913-F0EB-5790-3C57-47D0BB90E15A}"/>
             </a:ext>
           </a:extLst>
         </p:cNvPr>
@@ -1150,7 +1150,7 @@
           <p:cNvPr id="515" name="Google Shape;515;g1125d80b419_0_776:notes">
             <a:extLst>
               <a:ext uri="{FF2B5EF4-FFF2-40B4-BE49-F238E27FC236}">
-                <a16:creationId xmlns:a16="http://schemas.microsoft.com/office/drawing/2014/main" id="{0E25CB9B-6FA4-5E81-A950-24F813B21B49}"/>
+                <a16:creationId xmlns:a16="http://schemas.microsoft.com/office/drawing/2014/main" xmlns="" id="{0E25CB9B-6FA4-5E81-A950-24F813B21B49}"/>
               </a:ext>
             </a:extLst>
           </p:cNvPr>
@@ -1197,7 +1197,7 @@
           <p:cNvPr id="516" name="Google Shape;516;g1125d80b419_0_776:notes">
             <a:extLst>
               <a:ext uri="{FF2B5EF4-FFF2-40B4-BE49-F238E27FC236}">
-                <a16:creationId xmlns:a16="http://schemas.microsoft.com/office/drawing/2014/main" id="{74B6EBD0-7869-E364-E4DA-FC01D0109A5D}"/>
+                <a16:creationId xmlns:a16="http://schemas.microsoft.com/office/drawing/2014/main" xmlns="" id="{74B6EBD0-7869-E364-E4DA-FC01D0109A5D}"/>
               </a:ext>
             </a:extLst>
           </p:cNvPr>
@@ -1239,7 +1239,7 @@
     </p:spTree>
     <p:extLst>
       <p:ext uri="{BB962C8B-B14F-4D97-AF65-F5344CB8AC3E}">
-        <p14:creationId xmlns:p14="http://schemas.microsoft.com/office/powerpoint/2010/main" val="1724519660"/>
+        <p14:creationId xmlns:p14="http://schemas.microsoft.com/office/powerpoint/2010/main" xmlns="" val="1724519660"/>
       </p:ext>
     </p:extLst>
   </p:cSld>
@@ -1257,7 +1257,7 @@
         <p:cNvPr id="1" name="Shape 514">
           <a:extLst>
             <a:ext uri="{FF2B5EF4-FFF2-40B4-BE49-F238E27FC236}">
-              <a16:creationId xmlns:a16="http://schemas.microsoft.com/office/drawing/2014/main" id="{4C1DCF68-6333-2B3A-0806-63D4112877BE}"/>
+              <a16:creationId xmlns:a16="http://schemas.microsoft.com/office/drawing/2014/main" xmlns="" id="{4C1DCF68-6333-2B3A-0806-63D4112877BE}"/>
             </a:ext>
           </a:extLst>
         </p:cNvPr>
@@ -1277,7 +1277,7 @@
           <p:cNvPr id="515" name="Google Shape;515;g1125d80b419_0_776:notes">
             <a:extLst>
               <a:ext uri="{FF2B5EF4-FFF2-40B4-BE49-F238E27FC236}">
-                <a16:creationId xmlns:a16="http://schemas.microsoft.com/office/drawing/2014/main" id="{8E71F15D-262D-FA7F-47F2-E0967AA40462}"/>
+                <a16:creationId xmlns:a16="http://schemas.microsoft.com/office/drawing/2014/main" xmlns="" id="{8E71F15D-262D-FA7F-47F2-E0967AA40462}"/>
               </a:ext>
             </a:extLst>
           </p:cNvPr>
@@ -1324,7 +1324,7 @@
           <p:cNvPr id="516" name="Google Shape;516;g1125d80b419_0_776:notes">
             <a:extLst>
               <a:ext uri="{FF2B5EF4-FFF2-40B4-BE49-F238E27FC236}">
-                <a16:creationId xmlns:a16="http://schemas.microsoft.com/office/drawing/2014/main" id="{77688229-7A11-7DBD-2071-DB33B4EC0FAF}"/>
+                <a16:creationId xmlns:a16="http://schemas.microsoft.com/office/drawing/2014/main" xmlns="" id="{77688229-7A11-7DBD-2071-DB33B4EC0FAF}"/>
               </a:ext>
             </a:extLst>
           </p:cNvPr>
@@ -1366,7 +1366,7 @@
     </p:spTree>
     <p:extLst>
       <p:ext uri="{BB962C8B-B14F-4D97-AF65-F5344CB8AC3E}">
-        <p14:creationId xmlns:p14="http://schemas.microsoft.com/office/powerpoint/2010/main" val="2428231393"/>
+        <p14:creationId xmlns:p14="http://schemas.microsoft.com/office/powerpoint/2010/main" xmlns="" val="2428231393"/>
       </p:ext>
     </p:extLst>
   </p:cSld>
@@ -1384,7 +1384,7 @@
         <p:cNvPr id="1" name="Shape 514">
           <a:extLst>
             <a:ext uri="{FF2B5EF4-FFF2-40B4-BE49-F238E27FC236}">
-              <a16:creationId xmlns:a16="http://schemas.microsoft.com/office/drawing/2014/main" id="{874378C8-8ED1-224A-A70A-AA739874EBE2}"/>
+              <a16:creationId xmlns:a16="http://schemas.microsoft.com/office/drawing/2014/main" xmlns="" id="{874378C8-8ED1-224A-A70A-AA739874EBE2}"/>
             </a:ext>
           </a:extLst>
         </p:cNvPr>
@@ -1404,7 +1404,7 @@
           <p:cNvPr id="515" name="Google Shape;515;g1125d80b419_0_776:notes">
             <a:extLst>
               <a:ext uri="{FF2B5EF4-FFF2-40B4-BE49-F238E27FC236}">
-                <a16:creationId xmlns:a16="http://schemas.microsoft.com/office/drawing/2014/main" id="{B2C73D81-F1BE-63F0-9532-46AEB231BDCB}"/>
+                <a16:creationId xmlns:a16="http://schemas.microsoft.com/office/drawing/2014/main" xmlns="" id="{B2C73D81-F1BE-63F0-9532-46AEB231BDCB}"/>
               </a:ext>
             </a:extLst>
           </p:cNvPr>
@@ -1451,7 +1451,7 @@
           <p:cNvPr id="516" name="Google Shape;516;g1125d80b419_0_776:notes">
             <a:extLst>
               <a:ext uri="{FF2B5EF4-FFF2-40B4-BE49-F238E27FC236}">
-                <a16:creationId xmlns:a16="http://schemas.microsoft.com/office/drawing/2014/main" id="{0CA2047D-97D4-5760-BC53-49116E80C2BF}"/>
+                <a16:creationId xmlns:a16="http://schemas.microsoft.com/office/drawing/2014/main" xmlns="" id="{0CA2047D-97D4-5760-BC53-49116E80C2BF}"/>
               </a:ext>
             </a:extLst>
           </p:cNvPr>
@@ -1493,7 +1493,7 @@
     </p:spTree>
     <p:extLst>
       <p:ext uri="{BB962C8B-B14F-4D97-AF65-F5344CB8AC3E}">
-        <p14:creationId xmlns:p14="http://schemas.microsoft.com/office/powerpoint/2010/main" val="3152281662"/>
+        <p14:creationId xmlns:p14="http://schemas.microsoft.com/office/powerpoint/2010/main" xmlns="" val="3152281662"/>
       </p:ext>
     </p:extLst>
   </p:cSld>
@@ -1511,7 +1511,7 @@
         <p:cNvPr id="1" name="Shape 514">
           <a:extLst>
             <a:ext uri="{FF2B5EF4-FFF2-40B4-BE49-F238E27FC236}">
-              <a16:creationId xmlns:a16="http://schemas.microsoft.com/office/drawing/2014/main" id="{C0D4B9FF-72F4-9F9F-C2FA-7C64C82F08B8}"/>
+              <a16:creationId xmlns:a16="http://schemas.microsoft.com/office/drawing/2014/main" xmlns="" id="{C0D4B9FF-72F4-9F9F-C2FA-7C64C82F08B8}"/>
             </a:ext>
           </a:extLst>
         </p:cNvPr>
@@ -1531,7 +1531,7 @@
           <p:cNvPr id="515" name="Google Shape;515;g1125d80b419_0_776:notes">
             <a:extLst>
               <a:ext uri="{FF2B5EF4-FFF2-40B4-BE49-F238E27FC236}">
-                <a16:creationId xmlns:a16="http://schemas.microsoft.com/office/drawing/2014/main" id="{8BDFF6EA-200C-3795-C724-A6341509A416}"/>
+                <a16:creationId xmlns:a16="http://schemas.microsoft.com/office/drawing/2014/main" xmlns="" id="{8BDFF6EA-200C-3795-C724-A6341509A416}"/>
               </a:ext>
             </a:extLst>
           </p:cNvPr>
@@ -1578,7 +1578,7 @@
           <p:cNvPr id="516" name="Google Shape;516;g1125d80b419_0_776:notes">
             <a:extLst>
               <a:ext uri="{FF2B5EF4-FFF2-40B4-BE49-F238E27FC236}">
-                <a16:creationId xmlns:a16="http://schemas.microsoft.com/office/drawing/2014/main" id="{C5751B9B-836C-3776-5719-45ECAB08ABD9}"/>
+                <a16:creationId xmlns:a16="http://schemas.microsoft.com/office/drawing/2014/main" xmlns="" id="{C5751B9B-836C-3776-5719-45ECAB08ABD9}"/>
               </a:ext>
             </a:extLst>
           </p:cNvPr>
@@ -1620,7 +1620,7 @@
     </p:spTree>
     <p:extLst>
       <p:ext uri="{BB962C8B-B14F-4D97-AF65-F5344CB8AC3E}">
-        <p14:creationId xmlns:p14="http://schemas.microsoft.com/office/powerpoint/2010/main" val="1134866504"/>
+        <p14:creationId xmlns:p14="http://schemas.microsoft.com/office/powerpoint/2010/main" xmlns="" val="1134866504"/>
       </p:ext>
     </p:extLst>
   </p:cSld>
@@ -1638,7 +1638,7 @@
         <p:cNvPr id="1" name="Shape 341">
           <a:extLst>
             <a:ext uri="{FF2B5EF4-FFF2-40B4-BE49-F238E27FC236}">
-              <a16:creationId xmlns:a16="http://schemas.microsoft.com/office/drawing/2014/main" id="{F89DE483-D03E-0A2F-2D21-A144161697E8}"/>
+              <a16:creationId xmlns:a16="http://schemas.microsoft.com/office/drawing/2014/main" xmlns="" id="{F89DE483-D03E-0A2F-2D21-A144161697E8}"/>
             </a:ext>
           </a:extLst>
         </p:cNvPr>
@@ -1658,7 +1658,7 @@
           <p:cNvPr id="342" name="Google Shape;342;g1ff18b49f31_1_71:notes">
             <a:extLst>
               <a:ext uri="{FF2B5EF4-FFF2-40B4-BE49-F238E27FC236}">
-                <a16:creationId xmlns:a16="http://schemas.microsoft.com/office/drawing/2014/main" id="{7C040D7C-D1D4-7061-9B92-97FFD97E4E2C}"/>
+                <a16:creationId xmlns:a16="http://schemas.microsoft.com/office/drawing/2014/main" xmlns="" id="{7C040D7C-D1D4-7061-9B92-97FFD97E4E2C}"/>
               </a:ext>
             </a:extLst>
           </p:cNvPr>
@@ -1705,7 +1705,7 @@
           <p:cNvPr id="343" name="Google Shape;343;g1ff18b49f31_1_71:notes">
             <a:extLst>
               <a:ext uri="{FF2B5EF4-FFF2-40B4-BE49-F238E27FC236}">
-                <a16:creationId xmlns:a16="http://schemas.microsoft.com/office/drawing/2014/main" id="{D6A8EBEC-5C21-5332-436A-5DE85E3058BB}"/>
+                <a16:creationId xmlns:a16="http://schemas.microsoft.com/office/drawing/2014/main" xmlns="" id="{D6A8EBEC-5C21-5332-436A-5DE85E3058BB}"/>
               </a:ext>
             </a:extLst>
           </p:cNvPr>
@@ -1747,7 +1747,7 @@
     </p:spTree>
     <p:extLst>
       <p:ext uri="{BB962C8B-B14F-4D97-AF65-F5344CB8AC3E}">
-        <p14:creationId xmlns:p14="http://schemas.microsoft.com/office/powerpoint/2010/main" val="2139460300"/>
+        <p14:creationId xmlns:p14="http://schemas.microsoft.com/office/powerpoint/2010/main" xmlns="" val="2139460300"/>
       </p:ext>
     </p:extLst>
   </p:cSld>
@@ -1765,7 +1765,7 @@
         <p:cNvPr id="1" name="Shape 236">
           <a:extLst>
             <a:ext uri="{FF2B5EF4-FFF2-40B4-BE49-F238E27FC236}">
-              <a16:creationId xmlns:a16="http://schemas.microsoft.com/office/drawing/2014/main" id="{9B947317-0C65-F1CE-C4B7-A039BDC63CD3}"/>
+              <a16:creationId xmlns:a16="http://schemas.microsoft.com/office/drawing/2014/main" xmlns="" id="{9B947317-0C65-F1CE-C4B7-A039BDC63CD3}"/>
             </a:ext>
           </a:extLst>
         </p:cNvPr>
@@ -1785,7 +1785,7 @@
           <p:cNvPr id="237" name="Google Shape;237;g13376c31365_0_0:notes">
             <a:extLst>
               <a:ext uri="{FF2B5EF4-FFF2-40B4-BE49-F238E27FC236}">
-                <a16:creationId xmlns:a16="http://schemas.microsoft.com/office/drawing/2014/main" id="{CC2D845C-D897-92B6-B335-711AA8FA3970}"/>
+                <a16:creationId xmlns:a16="http://schemas.microsoft.com/office/drawing/2014/main" xmlns="" id="{CC2D845C-D897-92B6-B335-711AA8FA3970}"/>
               </a:ext>
             </a:extLst>
           </p:cNvPr>
@@ -1832,7 +1832,7 @@
           <p:cNvPr id="238" name="Google Shape;238;g13376c31365_0_0:notes">
             <a:extLst>
               <a:ext uri="{FF2B5EF4-FFF2-40B4-BE49-F238E27FC236}">
-                <a16:creationId xmlns:a16="http://schemas.microsoft.com/office/drawing/2014/main" id="{3BDBE669-0836-4F29-9AF0-12C803E1BA1F}"/>
+                <a16:creationId xmlns:a16="http://schemas.microsoft.com/office/drawing/2014/main" xmlns="" id="{3BDBE669-0836-4F29-9AF0-12C803E1BA1F}"/>
               </a:ext>
             </a:extLst>
           </p:cNvPr>
@@ -1874,7 +1874,7 @@
     </p:spTree>
     <p:extLst>
       <p:ext uri="{BB962C8B-B14F-4D97-AF65-F5344CB8AC3E}">
-        <p14:creationId xmlns:p14="http://schemas.microsoft.com/office/powerpoint/2010/main" val="3740097853"/>
+        <p14:creationId xmlns:p14="http://schemas.microsoft.com/office/powerpoint/2010/main" xmlns="" val="3740097853"/>
       </p:ext>
     </p:extLst>
   </p:cSld>
@@ -23563,7 +23563,7 @@
         <p:cNvPr id="1" name="Shape 517">
           <a:extLst>
             <a:ext uri="{FF2B5EF4-FFF2-40B4-BE49-F238E27FC236}">
-              <a16:creationId xmlns:a16="http://schemas.microsoft.com/office/drawing/2014/main" id="{778372F4-0B97-B0C3-9CC7-BA08FECF818B}"/>
+              <a16:creationId xmlns:a16="http://schemas.microsoft.com/office/drawing/2014/main" xmlns="" id="{778372F4-0B97-B0C3-9CC7-BA08FECF818B}"/>
             </a:ext>
           </a:extLst>
         </p:cNvPr>
@@ -23583,7 +23583,7 @@
           <p:cNvPr id="526" name="Google Shape;526;p43">
             <a:extLst>
               <a:ext uri="{FF2B5EF4-FFF2-40B4-BE49-F238E27FC236}">
-                <a16:creationId xmlns:a16="http://schemas.microsoft.com/office/drawing/2014/main" id="{647CA77E-0097-CBCB-3AD2-0A83ADF23FEE}"/>
+                <a16:creationId xmlns:a16="http://schemas.microsoft.com/office/drawing/2014/main" xmlns="" id="{647CA77E-0097-CBCB-3AD2-0A83ADF23FEE}"/>
               </a:ext>
             </a:extLst>
           </p:cNvPr>
@@ -23631,7 +23631,7 @@
           <p:cNvPr id="528" name="Google Shape;528;p43">
             <a:extLst>
               <a:ext uri="{FF2B5EF4-FFF2-40B4-BE49-F238E27FC236}">
-                <a16:creationId xmlns:a16="http://schemas.microsoft.com/office/drawing/2014/main" id="{FC861F7C-EC24-6FC2-5A59-2684A9E8712D}"/>
+                <a16:creationId xmlns:a16="http://schemas.microsoft.com/office/drawing/2014/main" xmlns="" id="{FC861F7C-EC24-6FC2-5A59-2684A9E8712D}"/>
               </a:ext>
             </a:extLst>
           </p:cNvPr>
@@ -24015,7 +24015,7 @@
           <p:cNvPr id="16" name="TextBox 15">
             <a:extLst>
               <a:ext uri="{FF2B5EF4-FFF2-40B4-BE49-F238E27FC236}">
-                <a16:creationId xmlns:a16="http://schemas.microsoft.com/office/drawing/2014/main" id="{51863F01-16CB-02CE-8BEB-3442667A3145}"/>
+                <a16:creationId xmlns:a16="http://schemas.microsoft.com/office/drawing/2014/main" xmlns="" id="{51863F01-16CB-02CE-8BEB-3442667A3145}"/>
               </a:ext>
             </a:extLst>
           </p:cNvPr>
@@ -24075,7 +24075,7 @@
           <p:cNvPr id="4" name="Picture 3">
             <a:extLst>
               <a:ext uri="{FF2B5EF4-FFF2-40B4-BE49-F238E27FC236}">
-                <a16:creationId xmlns:a16="http://schemas.microsoft.com/office/drawing/2014/main" id="{02072A8A-A9F8-B282-99FC-4EBA9F1D82BC}"/>
+                <a16:creationId xmlns:a16="http://schemas.microsoft.com/office/drawing/2014/main" xmlns="" id="{02072A8A-A9F8-B282-99FC-4EBA9F1D82BC}"/>
               </a:ext>
             </a:extLst>
           </p:cNvPr>
@@ -24103,7 +24103,7 @@
     </p:spTree>
     <p:extLst>
       <p:ext uri="{BB962C8B-B14F-4D97-AF65-F5344CB8AC3E}">
-        <p14:creationId xmlns:p14="http://schemas.microsoft.com/office/powerpoint/2010/main" val="18947604"/>
+        <p14:creationId xmlns:p14="http://schemas.microsoft.com/office/powerpoint/2010/main" xmlns="" val="18947604"/>
       </p:ext>
     </p:extLst>
   </p:cSld>
@@ -24121,7 +24121,7 @@
         <p:cNvPr id="1" name="Shape 517">
           <a:extLst>
             <a:ext uri="{FF2B5EF4-FFF2-40B4-BE49-F238E27FC236}">
-              <a16:creationId xmlns:a16="http://schemas.microsoft.com/office/drawing/2014/main" id="{E079A550-886B-FF90-CDFD-6B9DEA7FE04E}"/>
+              <a16:creationId xmlns:a16="http://schemas.microsoft.com/office/drawing/2014/main" xmlns="" id="{E079A550-886B-FF90-CDFD-6B9DEA7FE04E}"/>
             </a:ext>
           </a:extLst>
         </p:cNvPr>
@@ -24141,7 +24141,7 @@
           <p:cNvPr id="526" name="Google Shape;526;p43">
             <a:extLst>
               <a:ext uri="{FF2B5EF4-FFF2-40B4-BE49-F238E27FC236}">
-                <a16:creationId xmlns:a16="http://schemas.microsoft.com/office/drawing/2014/main" id="{551FF704-C68A-E2A8-DD4F-2B02AF026395}"/>
+                <a16:creationId xmlns:a16="http://schemas.microsoft.com/office/drawing/2014/main" xmlns="" id="{551FF704-C68A-E2A8-DD4F-2B02AF026395}"/>
               </a:ext>
             </a:extLst>
           </p:cNvPr>
@@ -24189,7 +24189,7 @@
           <p:cNvPr id="528" name="Google Shape;528;p43">
             <a:extLst>
               <a:ext uri="{FF2B5EF4-FFF2-40B4-BE49-F238E27FC236}">
-                <a16:creationId xmlns:a16="http://schemas.microsoft.com/office/drawing/2014/main" id="{72303ABF-1A08-756E-EA2F-D45134FE4312}"/>
+                <a16:creationId xmlns:a16="http://schemas.microsoft.com/office/drawing/2014/main" xmlns="" id="{72303ABF-1A08-756E-EA2F-D45134FE4312}"/>
               </a:ext>
             </a:extLst>
           </p:cNvPr>
@@ -24573,7 +24573,7 @@
           <p:cNvPr id="16" name="TextBox 15">
             <a:extLst>
               <a:ext uri="{FF2B5EF4-FFF2-40B4-BE49-F238E27FC236}">
-                <a16:creationId xmlns:a16="http://schemas.microsoft.com/office/drawing/2014/main" id="{C72B92BC-6D18-9381-20DE-1B21E678781B}"/>
+                <a16:creationId xmlns:a16="http://schemas.microsoft.com/office/drawing/2014/main" xmlns="" id="{C72B92BC-6D18-9381-20DE-1B21E678781B}"/>
               </a:ext>
             </a:extLst>
           </p:cNvPr>
@@ -24700,7 +24700,7 @@
           <p:cNvPr id="2" name="Picture 1">
             <a:extLst>
               <a:ext uri="{FF2B5EF4-FFF2-40B4-BE49-F238E27FC236}">
-                <a16:creationId xmlns:a16="http://schemas.microsoft.com/office/drawing/2014/main" id="{F6B6C705-6E92-0BA2-EB25-33A194892989}"/>
+                <a16:creationId xmlns:a16="http://schemas.microsoft.com/office/drawing/2014/main" xmlns="" id="{F6B6C705-6E92-0BA2-EB25-33A194892989}"/>
               </a:ext>
             </a:extLst>
           </p:cNvPr>
@@ -24728,7 +24728,7 @@
     </p:spTree>
     <p:extLst>
       <p:ext uri="{BB962C8B-B14F-4D97-AF65-F5344CB8AC3E}">
-        <p14:creationId xmlns:p14="http://schemas.microsoft.com/office/powerpoint/2010/main" val="3948539492"/>
+        <p14:creationId xmlns:p14="http://schemas.microsoft.com/office/powerpoint/2010/main" xmlns="" val="3948539492"/>
       </p:ext>
     </p:extLst>
   </p:cSld>
@@ -24746,7 +24746,7 @@
         <p:cNvPr id="1" name="Shape 517">
           <a:extLst>
             <a:ext uri="{FF2B5EF4-FFF2-40B4-BE49-F238E27FC236}">
-              <a16:creationId xmlns:a16="http://schemas.microsoft.com/office/drawing/2014/main" id="{0BD08CFE-9B0B-44A4-9959-96F54FC15BFD}"/>
+              <a16:creationId xmlns:a16="http://schemas.microsoft.com/office/drawing/2014/main" xmlns="" id="{0BD08CFE-9B0B-44A4-9959-96F54FC15BFD}"/>
             </a:ext>
           </a:extLst>
         </p:cNvPr>
@@ -24766,7 +24766,7 @@
           <p:cNvPr id="526" name="Google Shape;526;p43">
             <a:extLst>
               <a:ext uri="{FF2B5EF4-FFF2-40B4-BE49-F238E27FC236}">
-                <a16:creationId xmlns:a16="http://schemas.microsoft.com/office/drawing/2014/main" id="{17089448-43EE-342A-DA36-6DCC1F95C327}"/>
+                <a16:creationId xmlns:a16="http://schemas.microsoft.com/office/drawing/2014/main" xmlns="" id="{17089448-43EE-342A-DA36-6DCC1F95C327}"/>
               </a:ext>
             </a:extLst>
           </p:cNvPr>
@@ -24814,7 +24814,7 @@
           <p:cNvPr id="528" name="Google Shape;528;p43">
             <a:extLst>
               <a:ext uri="{FF2B5EF4-FFF2-40B4-BE49-F238E27FC236}">
-                <a16:creationId xmlns:a16="http://schemas.microsoft.com/office/drawing/2014/main" id="{58295107-A601-C396-6BE6-88589BF17656}"/>
+                <a16:creationId xmlns:a16="http://schemas.microsoft.com/office/drawing/2014/main" xmlns="" id="{58295107-A601-C396-6BE6-88589BF17656}"/>
               </a:ext>
             </a:extLst>
           </p:cNvPr>
@@ -25221,7 +25221,7 @@
           <p:cNvPr id="16" name="TextBox 15">
             <a:extLst>
               <a:ext uri="{FF2B5EF4-FFF2-40B4-BE49-F238E27FC236}">
-                <a16:creationId xmlns:a16="http://schemas.microsoft.com/office/drawing/2014/main" id="{DB477804-3CFF-EBD3-9E6B-54AD2B9A5E17}"/>
+                <a16:creationId xmlns:a16="http://schemas.microsoft.com/office/drawing/2014/main" xmlns="" id="{DB477804-3CFF-EBD3-9E6B-54AD2B9A5E17}"/>
               </a:ext>
             </a:extLst>
           </p:cNvPr>
@@ -25289,7 +25289,7 @@
           <p:cNvPr id="4" name="Picture 3">
             <a:extLst>
               <a:ext uri="{FF2B5EF4-FFF2-40B4-BE49-F238E27FC236}">
-                <a16:creationId xmlns:a16="http://schemas.microsoft.com/office/drawing/2014/main" id="{766AAF87-89BD-D79C-BF5F-C57A0F3AF228}"/>
+                <a16:creationId xmlns:a16="http://schemas.microsoft.com/office/drawing/2014/main" xmlns="" id="{766AAF87-89BD-D79C-BF5F-C57A0F3AF228}"/>
               </a:ext>
             </a:extLst>
           </p:cNvPr>
@@ -25317,7 +25317,7 @@
     </p:spTree>
     <p:extLst>
       <p:ext uri="{BB962C8B-B14F-4D97-AF65-F5344CB8AC3E}">
-        <p14:creationId xmlns:p14="http://schemas.microsoft.com/office/powerpoint/2010/main" val="1060836345"/>
+        <p14:creationId xmlns:p14="http://schemas.microsoft.com/office/powerpoint/2010/main" xmlns="" val="1060836345"/>
       </p:ext>
     </p:extLst>
   </p:cSld>
@@ -25335,7 +25335,7 @@
         <p:cNvPr id="1" name="Shape 517">
           <a:extLst>
             <a:ext uri="{FF2B5EF4-FFF2-40B4-BE49-F238E27FC236}">
-              <a16:creationId xmlns:a16="http://schemas.microsoft.com/office/drawing/2014/main" id="{7EF2034D-2A05-F323-ED16-FE913AADCA4E}"/>
+              <a16:creationId xmlns:a16="http://schemas.microsoft.com/office/drawing/2014/main" xmlns="" id="{7EF2034D-2A05-F323-ED16-FE913AADCA4E}"/>
             </a:ext>
           </a:extLst>
         </p:cNvPr>
@@ -25355,7 +25355,7 @@
           <p:cNvPr id="526" name="Google Shape;526;p43">
             <a:extLst>
               <a:ext uri="{FF2B5EF4-FFF2-40B4-BE49-F238E27FC236}">
-                <a16:creationId xmlns:a16="http://schemas.microsoft.com/office/drawing/2014/main" id="{5C12EE7F-1B20-052E-C381-28C3354C64D2}"/>
+                <a16:creationId xmlns:a16="http://schemas.microsoft.com/office/drawing/2014/main" xmlns="" id="{5C12EE7F-1B20-052E-C381-28C3354C64D2}"/>
               </a:ext>
             </a:extLst>
           </p:cNvPr>
@@ -25403,7 +25403,7 @@
           <p:cNvPr id="528" name="Google Shape;528;p43">
             <a:extLst>
               <a:ext uri="{FF2B5EF4-FFF2-40B4-BE49-F238E27FC236}">
-                <a16:creationId xmlns:a16="http://schemas.microsoft.com/office/drawing/2014/main" id="{08C105C3-E3B6-BA33-72E1-CF1AF06FEDDF}"/>
+                <a16:creationId xmlns:a16="http://schemas.microsoft.com/office/drawing/2014/main" xmlns="" id="{08C105C3-E3B6-BA33-72E1-CF1AF06FEDDF}"/>
               </a:ext>
             </a:extLst>
           </p:cNvPr>
@@ -25810,7 +25810,7 @@
           <p:cNvPr id="16" name="TextBox 15">
             <a:extLst>
               <a:ext uri="{FF2B5EF4-FFF2-40B4-BE49-F238E27FC236}">
-                <a16:creationId xmlns:a16="http://schemas.microsoft.com/office/drawing/2014/main" id="{F6DEBC00-A1A2-F9FC-575F-3552873E2987}"/>
+                <a16:creationId xmlns:a16="http://schemas.microsoft.com/office/drawing/2014/main" xmlns="" id="{F6DEBC00-A1A2-F9FC-575F-3552873E2987}"/>
               </a:ext>
             </a:extLst>
           </p:cNvPr>
@@ -25929,7 +25929,7 @@
           <p:cNvPr id="2" name="Picture 1">
             <a:extLst>
               <a:ext uri="{FF2B5EF4-FFF2-40B4-BE49-F238E27FC236}">
-                <a16:creationId xmlns:a16="http://schemas.microsoft.com/office/drawing/2014/main" id="{36AF0D59-0BA5-23ED-F473-3627493F5C87}"/>
+                <a16:creationId xmlns:a16="http://schemas.microsoft.com/office/drawing/2014/main" xmlns="" id="{36AF0D59-0BA5-23ED-F473-3627493F5C87}"/>
               </a:ext>
             </a:extLst>
           </p:cNvPr>
@@ -25957,7 +25957,7 @@
     </p:spTree>
     <p:extLst>
       <p:ext uri="{BB962C8B-B14F-4D97-AF65-F5344CB8AC3E}">
-        <p14:creationId xmlns:p14="http://schemas.microsoft.com/office/powerpoint/2010/main" val="3691897577"/>
+        <p14:creationId xmlns:p14="http://schemas.microsoft.com/office/powerpoint/2010/main" xmlns="" val="3691897577"/>
       </p:ext>
     </p:extLst>
   </p:cSld>
@@ -25975,7 +25975,7 @@
         <p:cNvPr id="1" name="Shape 517">
           <a:extLst>
             <a:ext uri="{FF2B5EF4-FFF2-40B4-BE49-F238E27FC236}">
-              <a16:creationId xmlns:a16="http://schemas.microsoft.com/office/drawing/2014/main" id="{2AA71854-4773-2E65-A776-4404ADE641DD}"/>
+              <a16:creationId xmlns:a16="http://schemas.microsoft.com/office/drawing/2014/main" xmlns="" id="{2AA71854-4773-2E65-A776-4404ADE641DD}"/>
             </a:ext>
           </a:extLst>
         </p:cNvPr>
@@ -25995,7 +25995,7 @@
           <p:cNvPr id="526" name="Google Shape;526;p43">
             <a:extLst>
               <a:ext uri="{FF2B5EF4-FFF2-40B4-BE49-F238E27FC236}">
-                <a16:creationId xmlns:a16="http://schemas.microsoft.com/office/drawing/2014/main" id="{2C35BC9E-1C55-A673-BF3C-F7CB1A01CD18}"/>
+                <a16:creationId xmlns:a16="http://schemas.microsoft.com/office/drawing/2014/main" xmlns="" id="{2C35BC9E-1C55-A673-BF3C-F7CB1A01CD18}"/>
               </a:ext>
             </a:extLst>
           </p:cNvPr>
@@ -26043,7 +26043,7 @@
           <p:cNvPr id="528" name="Google Shape;528;p43">
             <a:extLst>
               <a:ext uri="{FF2B5EF4-FFF2-40B4-BE49-F238E27FC236}">
-                <a16:creationId xmlns:a16="http://schemas.microsoft.com/office/drawing/2014/main" id="{3FF86ECE-DD00-7FE6-5A6A-2B7E1A654293}"/>
+                <a16:creationId xmlns:a16="http://schemas.microsoft.com/office/drawing/2014/main" xmlns="" id="{3FF86ECE-DD00-7FE6-5A6A-2B7E1A654293}"/>
               </a:ext>
             </a:extLst>
           </p:cNvPr>
@@ -26450,7 +26450,7 @@
           <p:cNvPr id="16" name="TextBox 15">
             <a:extLst>
               <a:ext uri="{FF2B5EF4-FFF2-40B4-BE49-F238E27FC236}">
-                <a16:creationId xmlns:a16="http://schemas.microsoft.com/office/drawing/2014/main" id="{56AFB24F-2DC4-8CEE-9C6C-62375E429607}"/>
+                <a16:creationId xmlns:a16="http://schemas.microsoft.com/office/drawing/2014/main" xmlns="" id="{56AFB24F-2DC4-8CEE-9C6C-62375E429607}"/>
               </a:ext>
             </a:extLst>
           </p:cNvPr>
@@ -26543,7 +26543,7 @@
           <p:cNvPr id="3" name="Picture 2">
             <a:extLst>
               <a:ext uri="{FF2B5EF4-FFF2-40B4-BE49-F238E27FC236}">
-                <a16:creationId xmlns:a16="http://schemas.microsoft.com/office/drawing/2014/main" id="{1EE81E81-44AC-0BDE-7205-044AA3B5D724}"/>
+                <a16:creationId xmlns:a16="http://schemas.microsoft.com/office/drawing/2014/main" xmlns="" id="{1EE81E81-44AC-0BDE-7205-044AA3B5D724}"/>
               </a:ext>
             </a:extLst>
           </p:cNvPr>
@@ -26571,7 +26571,7 @@
     </p:spTree>
     <p:extLst>
       <p:ext uri="{BB962C8B-B14F-4D97-AF65-F5344CB8AC3E}">
-        <p14:creationId xmlns:p14="http://schemas.microsoft.com/office/powerpoint/2010/main" val="3601285605"/>
+        <p14:creationId xmlns:p14="http://schemas.microsoft.com/office/powerpoint/2010/main" xmlns="" val="3601285605"/>
       </p:ext>
     </p:extLst>
   </p:cSld>
@@ -26589,7 +26589,7 @@
         <p:cNvPr id="1" name="Shape 517">
           <a:extLst>
             <a:ext uri="{FF2B5EF4-FFF2-40B4-BE49-F238E27FC236}">
-              <a16:creationId xmlns:a16="http://schemas.microsoft.com/office/drawing/2014/main" id="{7EADA809-8186-E062-BBDA-3B223583EAD9}"/>
+              <a16:creationId xmlns:a16="http://schemas.microsoft.com/office/drawing/2014/main" xmlns="" id="{7EADA809-8186-E062-BBDA-3B223583EAD9}"/>
             </a:ext>
           </a:extLst>
         </p:cNvPr>
@@ -26609,7 +26609,7 @@
           <p:cNvPr id="526" name="Google Shape;526;p43">
             <a:extLst>
               <a:ext uri="{FF2B5EF4-FFF2-40B4-BE49-F238E27FC236}">
-                <a16:creationId xmlns:a16="http://schemas.microsoft.com/office/drawing/2014/main" id="{5C48613D-3B0F-3D97-C005-F237806320B6}"/>
+                <a16:creationId xmlns:a16="http://schemas.microsoft.com/office/drawing/2014/main" xmlns="" id="{5C48613D-3B0F-3D97-C005-F237806320B6}"/>
               </a:ext>
             </a:extLst>
           </p:cNvPr>
@@ -26657,7 +26657,7 @@
           <p:cNvPr id="528" name="Google Shape;528;p43">
             <a:extLst>
               <a:ext uri="{FF2B5EF4-FFF2-40B4-BE49-F238E27FC236}">
-                <a16:creationId xmlns:a16="http://schemas.microsoft.com/office/drawing/2014/main" id="{16A39515-7E8B-F830-C0C4-538BC5CEC977}"/>
+                <a16:creationId xmlns:a16="http://schemas.microsoft.com/office/drawing/2014/main" xmlns="" id="{16A39515-7E8B-F830-C0C4-538BC5CEC977}"/>
               </a:ext>
             </a:extLst>
           </p:cNvPr>
@@ -27064,7 +27064,7 @@
           <p:cNvPr id="16" name="TextBox 15">
             <a:extLst>
               <a:ext uri="{FF2B5EF4-FFF2-40B4-BE49-F238E27FC236}">
-                <a16:creationId xmlns:a16="http://schemas.microsoft.com/office/drawing/2014/main" id="{F58DE669-8976-F547-4900-A9EAAA61C37F}"/>
+                <a16:creationId xmlns:a16="http://schemas.microsoft.com/office/drawing/2014/main" xmlns="" id="{F58DE669-8976-F547-4900-A9EAAA61C37F}"/>
               </a:ext>
             </a:extLst>
           </p:cNvPr>
@@ -27127,10 +27127,109 @@
           </a:p>
         </p:txBody>
       </p:sp>
+      <p:pic>
+        <p:nvPicPr>
+          <p:cNvPr id="1026" name="Picture 2"/>
+          <p:cNvPicPr>
+            <a:picLocks noChangeAspect="1" noChangeArrowheads="1"/>
+          </p:cNvPicPr>
+          <p:nvPr/>
+        </p:nvPicPr>
+        <p:blipFill>
+          <a:blip r:embed="rId3"/>
+          <a:srcRect/>
+          <a:stretch>
+            <a:fillRect/>
+          </a:stretch>
+        </p:blipFill>
+        <p:spPr bwMode="auto">
+          <a:xfrm>
+            <a:off x="382136" y="1728293"/>
+            <a:ext cx="4058860" cy="3157747"/>
+          </a:xfrm>
+          <a:prstGeom prst="rect">
+            <a:avLst/>
+          </a:prstGeom>
+          <a:noFill/>
+          <a:ln w="9525">
+            <a:noFill/>
+            <a:miter lim="800000"/>
+            <a:headEnd/>
+            <a:tailEnd/>
+          </a:ln>
+          <a:effectLst/>
+        </p:spPr>
+      </p:pic>
+      <p:pic>
+        <p:nvPicPr>
+          <p:cNvPr id="1027" name="Picture 3"/>
+          <p:cNvPicPr>
+            <a:picLocks noChangeAspect="1" noChangeArrowheads="1"/>
+          </p:cNvPicPr>
+          <p:nvPr/>
+        </p:nvPicPr>
+        <p:blipFill>
+          <a:blip r:embed="rId4"/>
+          <a:srcRect/>
+          <a:stretch>
+            <a:fillRect/>
+          </a:stretch>
+        </p:blipFill>
+        <p:spPr bwMode="auto">
+          <a:xfrm>
+            <a:off x="5145206" y="160206"/>
+            <a:ext cx="2971799" cy="2296390"/>
+          </a:xfrm>
+          <a:prstGeom prst="rect">
+            <a:avLst/>
+          </a:prstGeom>
+          <a:noFill/>
+          <a:ln w="9525">
+            <a:noFill/>
+            <a:miter lim="800000"/>
+            <a:headEnd/>
+            <a:tailEnd/>
+          </a:ln>
+          <a:effectLst/>
+        </p:spPr>
+      </p:pic>
+      <p:pic>
+        <p:nvPicPr>
+          <p:cNvPr id="1028" name="Picture 4"/>
+          <p:cNvPicPr>
+            <a:picLocks noChangeAspect="1" noChangeArrowheads="1"/>
+          </p:cNvPicPr>
+          <p:nvPr/>
+        </p:nvPicPr>
+        <p:blipFill>
+          <a:blip r:embed="rId5"/>
+          <a:srcRect/>
+          <a:stretch>
+            <a:fillRect/>
+          </a:stretch>
+        </p:blipFill>
+        <p:spPr bwMode="auto">
+          <a:xfrm>
+            <a:off x="5124734" y="2609053"/>
+            <a:ext cx="2977986" cy="2319993"/>
+          </a:xfrm>
+          <a:prstGeom prst="rect">
+            <a:avLst/>
+          </a:prstGeom>
+          <a:noFill/>
+          <a:ln w="9525">
+            <a:noFill/>
+            <a:miter lim="800000"/>
+            <a:headEnd/>
+            <a:tailEnd/>
+          </a:ln>
+          <a:effectLst/>
+        </p:spPr>
+      </p:pic>
     </p:spTree>
     <p:extLst>
       <p:ext uri="{BB962C8B-B14F-4D97-AF65-F5344CB8AC3E}">
-        <p14:creationId xmlns:p14="http://schemas.microsoft.com/office/powerpoint/2010/main" val="1303504811"/>
+        <p14:creationId xmlns:p14="http://schemas.microsoft.com/office/powerpoint/2010/main" xmlns="" val="1303504811"/>
       </p:ext>
     </p:extLst>
   </p:cSld>
@@ -27148,7 +27247,7 @@
         <p:cNvPr id="1" name="Shape 344">
           <a:extLst>
             <a:ext uri="{FF2B5EF4-FFF2-40B4-BE49-F238E27FC236}">
-              <a16:creationId xmlns:a16="http://schemas.microsoft.com/office/drawing/2014/main" id="{8CEDEE0A-D760-12C4-61CC-C0D667161E03}"/>
+              <a16:creationId xmlns:a16="http://schemas.microsoft.com/office/drawing/2014/main" xmlns="" id="{8CEDEE0A-D760-12C4-61CC-C0D667161E03}"/>
             </a:ext>
           </a:extLst>
         </p:cNvPr>
@@ -27168,7 +27267,7 @@
           <p:cNvPr id="345" name="Google Shape;345;p36">
             <a:extLst>
               <a:ext uri="{FF2B5EF4-FFF2-40B4-BE49-F238E27FC236}">
-                <a16:creationId xmlns:a16="http://schemas.microsoft.com/office/drawing/2014/main" id="{BD13D5CC-77BF-6E65-A2D2-76969B90A0F6}"/>
+                <a16:creationId xmlns:a16="http://schemas.microsoft.com/office/drawing/2014/main" xmlns="" id="{BD13D5CC-77BF-6E65-A2D2-76969B90A0F6}"/>
               </a:ext>
             </a:extLst>
           </p:cNvPr>
@@ -27216,7 +27315,7 @@
           <p:cNvPr id="347" name="Google Shape;347;p36">
             <a:extLst>
               <a:ext uri="{FF2B5EF4-FFF2-40B4-BE49-F238E27FC236}">
-                <a16:creationId xmlns:a16="http://schemas.microsoft.com/office/drawing/2014/main" id="{75CCAC5B-979E-34F9-5037-F7EA000FE375}"/>
+                <a16:creationId xmlns:a16="http://schemas.microsoft.com/office/drawing/2014/main" xmlns="" id="{75CCAC5B-979E-34F9-5037-F7EA000FE375}"/>
               </a:ext>
             </a:extLst>
           </p:cNvPr>
@@ -27600,7 +27699,7 @@
           <p:cNvPr id="348" name="Google Shape;348;p36">
             <a:extLst>
               <a:ext uri="{FF2B5EF4-FFF2-40B4-BE49-F238E27FC236}">
-                <a16:creationId xmlns:a16="http://schemas.microsoft.com/office/drawing/2014/main" id="{4E05CB1A-5860-FCCB-798C-42A3C38AF92D}"/>
+                <a16:creationId xmlns:a16="http://schemas.microsoft.com/office/drawing/2014/main" xmlns="" id="{4E05CB1A-5860-FCCB-798C-42A3C38AF92D}"/>
               </a:ext>
             </a:extLst>
           </p:cNvPr>
@@ -27790,7 +27889,7 @@
           <p:cNvPr id="349" name="Google Shape;349;p36">
             <a:extLst>
               <a:ext uri="{FF2B5EF4-FFF2-40B4-BE49-F238E27FC236}">
-                <a16:creationId xmlns:a16="http://schemas.microsoft.com/office/drawing/2014/main" id="{6EA424CB-9632-D2B5-C7BC-48BBBE27F593}"/>
+                <a16:creationId xmlns:a16="http://schemas.microsoft.com/office/drawing/2014/main" xmlns="" id="{6EA424CB-9632-D2B5-C7BC-48BBBE27F593}"/>
               </a:ext>
             </a:extLst>
           </p:cNvPr>
@@ -27810,7 +27909,7 @@
             <p:cNvPr id="350" name="Google Shape;350;p36">
               <a:extLst>
                 <a:ext uri="{FF2B5EF4-FFF2-40B4-BE49-F238E27FC236}">
-                  <a16:creationId xmlns:a16="http://schemas.microsoft.com/office/drawing/2014/main" id="{8BCE8F58-782F-3D4C-E18F-D2CEE3DA9E11}"/>
+                  <a16:creationId xmlns:a16="http://schemas.microsoft.com/office/drawing/2014/main" xmlns="" id="{8BCE8F58-782F-3D4C-E18F-D2CEE3DA9E11}"/>
                 </a:ext>
               </a:extLst>
             </p:cNvPr>
@@ -27958,7 +28057,7 @@
             <p:cNvPr id="351" name="Google Shape;351;p36">
               <a:extLst>
                 <a:ext uri="{FF2B5EF4-FFF2-40B4-BE49-F238E27FC236}">
-                  <a16:creationId xmlns:a16="http://schemas.microsoft.com/office/drawing/2014/main" id="{ACE09898-8959-6531-8ADA-6CD090BC55B3}"/>
+                  <a16:creationId xmlns:a16="http://schemas.microsoft.com/office/drawing/2014/main" xmlns="" id="{ACE09898-8959-6531-8ADA-6CD090BC55B3}"/>
                 </a:ext>
               </a:extLst>
             </p:cNvPr>
@@ -28120,7 +28219,7 @@
           <p:cNvPr id="352" name="Google Shape;352;p36">
             <a:extLst>
               <a:ext uri="{FF2B5EF4-FFF2-40B4-BE49-F238E27FC236}">
-                <a16:creationId xmlns:a16="http://schemas.microsoft.com/office/drawing/2014/main" id="{C15BE8D2-8674-4D0D-5813-0E70674DA539}"/>
+                <a16:creationId xmlns:a16="http://schemas.microsoft.com/office/drawing/2014/main" xmlns="" id="{C15BE8D2-8674-4D0D-5813-0E70674DA539}"/>
               </a:ext>
             </a:extLst>
           </p:cNvPr>
@@ -28140,7 +28239,7 @@
             <p:cNvPr id="353" name="Google Shape;353;p36">
               <a:extLst>
                 <a:ext uri="{FF2B5EF4-FFF2-40B4-BE49-F238E27FC236}">
-                  <a16:creationId xmlns:a16="http://schemas.microsoft.com/office/drawing/2014/main" id="{1ED29610-87D2-0F33-EED3-8C328B8DC197}"/>
+                  <a16:creationId xmlns:a16="http://schemas.microsoft.com/office/drawing/2014/main" xmlns="" id="{1ED29610-87D2-0F33-EED3-8C328B8DC197}"/>
                 </a:ext>
               </a:extLst>
             </p:cNvPr>
@@ -28348,7 +28447,7 @@
             <p:cNvPr id="354" name="Google Shape;354;p36">
               <a:extLst>
                 <a:ext uri="{FF2B5EF4-FFF2-40B4-BE49-F238E27FC236}">
-                  <a16:creationId xmlns:a16="http://schemas.microsoft.com/office/drawing/2014/main" id="{1E0F7D2C-4E5D-64C0-656D-52B5BC8BCD92}"/>
+                  <a16:creationId xmlns:a16="http://schemas.microsoft.com/office/drawing/2014/main" xmlns="" id="{1E0F7D2C-4E5D-64C0-656D-52B5BC8BCD92}"/>
                 </a:ext>
               </a:extLst>
             </p:cNvPr>
@@ -28548,7 +28647,7 @@
           <p:cNvPr id="355" name="Google Shape;355;p36">
             <a:extLst>
               <a:ext uri="{FF2B5EF4-FFF2-40B4-BE49-F238E27FC236}">
-                <a16:creationId xmlns:a16="http://schemas.microsoft.com/office/drawing/2014/main" id="{7BD62752-F70E-2690-E471-60632730E862}"/>
+                <a16:creationId xmlns:a16="http://schemas.microsoft.com/office/drawing/2014/main" xmlns="" id="{7BD62752-F70E-2690-E471-60632730E862}"/>
               </a:ext>
             </a:extLst>
           </p:cNvPr>
@@ -28697,7 +28796,7 @@
           <p:cNvPr id="356" name="Google Shape;356;p36">
             <a:extLst>
               <a:ext uri="{FF2B5EF4-FFF2-40B4-BE49-F238E27FC236}">
-                <a16:creationId xmlns:a16="http://schemas.microsoft.com/office/drawing/2014/main" id="{3E388EAC-9E67-19C6-108F-5CEAF0A80437}"/>
+                <a16:creationId xmlns:a16="http://schemas.microsoft.com/office/drawing/2014/main" xmlns="" id="{3E388EAC-9E67-19C6-108F-5CEAF0A80437}"/>
               </a:ext>
             </a:extLst>
           </p:cNvPr>
@@ -29095,7 +29194,7 @@
           <p:cNvPr id="357" name="Google Shape;357;p36">
             <a:extLst>
               <a:ext uri="{FF2B5EF4-FFF2-40B4-BE49-F238E27FC236}">
-                <a16:creationId xmlns:a16="http://schemas.microsoft.com/office/drawing/2014/main" id="{D8F6A307-1044-7DA4-ADBF-E7E89D8B9A86}"/>
+                <a16:creationId xmlns:a16="http://schemas.microsoft.com/office/drawing/2014/main" xmlns="" id="{D8F6A307-1044-7DA4-ADBF-E7E89D8B9A86}"/>
               </a:ext>
             </a:extLst>
           </p:cNvPr>
@@ -29115,7 +29214,7 @@
             <p:cNvPr id="358" name="Google Shape;358;p36">
               <a:extLst>
                 <a:ext uri="{FF2B5EF4-FFF2-40B4-BE49-F238E27FC236}">
-                  <a16:creationId xmlns:a16="http://schemas.microsoft.com/office/drawing/2014/main" id="{109F9A28-87E9-A9EE-3D71-86B3C0133943}"/>
+                  <a16:creationId xmlns:a16="http://schemas.microsoft.com/office/drawing/2014/main" xmlns="" id="{109F9A28-87E9-A9EE-3D71-86B3C0133943}"/>
                 </a:ext>
               </a:extLst>
             </p:cNvPr>
@@ -29323,7 +29422,7 @@
             <p:cNvPr id="359" name="Google Shape;359;p36">
               <a:extLst>
                 <a:ext uri="{FF2B5EF4-FFF2-40B4-BE49-F238E27FC236}">
-                  <a16:creationId xmlns:a16="http://schemas.microsoft.com/office/drawing/2014/main" id="{53E142AC-80B7-A59D-65CE-5A923A607F56}"/>
+                  <a16:creationId xmlns:a16="http://schemas.microsoft.com/office/drawing/2014/main" xmlns="" id="{53E142AC-80B7-A59D-65CE-5A923A607F56}"/>
                 </a:ext>
               </a:extLst>
             </p:cNvPr>
@@ -29523,7 +29622,7 @@
           <p:cNvPr id="360" name="Google Shape;360;p36">
             <a:extLst>
               <a:ext uri="{FF2B5EF4-FFF2-40B4-BE49-F238E27FC236}">
-                <a16:creationId xmlns:a16="http://schemas.microsoft.com/office/drawing/2014/main" id="{FE20AAD1-9936-BADB-1A5E-2CD7D25B2499}"/>
+                <a16:creationId xmlns:a16="http://schemas.microsoft.com/office/drawing/2014/main" xmlns="" id="{FE20AAD1-9936-BADB-1A5E-2CD7D25B2499}"/>
               </a:ext>
             </a:extLst>
           </p:cNvPr>
@@ -29907,7 +30006,7 @@
           <p:cNvPr id="8" name="TextBox 7">
             <a:extLst>
               <a:ext uri="{FF2B5EF4-FFF2-40B4-BE49-F238E27FC236}">
-                <a16:creationId xmlns:a16="http://schemas.microsoft.com/office/drawing/2014/main" id="{DF7D2CD3-4348-F620-3CB8-B705A722EC64}"/>
+                <a16:creationId xmlns:a16="http://schemas.microsoft.com/office/drawing/2014/main" xmlns="" id="{DF7D2CD3-4348-F620-3CB8-B705A722EC64}"/>
               </a:ext>
             </a:extLst>
           </p:cNvPr>
@@ -29953,7 +30052,7 @@
     </p:spTree>
     <p:extLst>
       <p:ext uri="{BB962C8B-B14F-4D97-AF65-F5344CB8AC3E}">
-        <p14:creationId xmlns:p14="http://schemas.microsoft.com/office/powerpoint/2010/main" val="3546235126"/>
+        <p14:creationId xmlns:p14="http://schemas.microsoft.com/office/powerpoint/2010/main" xmlns="" val="3546235126"/>
       </p:ext>
     </p:extLst>
   </p:cSld>
@@ -29971,7 +30070,7 @@
         <p:cNvPr id="1" name="Shape 239">
           <a:extLst>
             <a:ext uri="{FF2B5EF4-FFF2-40B4-BE49-F238E27FC236}">
-              <a16:creationId xmlns:a16="http://schemas.microsoft.com/office/drawing/2014/main" id="{0FDDC864-942A-0FB0-2912-ED11E13DCE51}"/>
+              <a16:creationId xmlns:a16="http://schemas.microsoft.com/office/drawing/2014/main" xmlns="" id="{0FDDC864-942A-0FB0-2912-ED11E13DCE51}"/>
             </a:ext>
           </a:extLst>
         </p:cNvPr>
@@ -29991,7 +30090,7 @@
           <p:cNvPr id="240" name="Google Shape;240;p30">
             <a:extLst>
               <a:ext uri="{FF2B5EF4-FFF2-40B4-BE49-F238E27FC236}">
-                <a16:creationId xmlns:a16="http://schemas.microsoft.com/office/drawing/2014/main" id="{43B2734E-91A5-059B-A1AD-C2371FC97756}"/>
+                <a16:creationId xmlns:a16="http://schemas.microsoft.com/office/drawing/2014/main" xmlns="" id="{43B2734E-91A5-059B-A1AD-C2371FC97756}"/>
               </a:ext>
             </a:extLst>
           </p:cNvPr>
@@ -30043,7 +30142,7 @@
           <p:cNvPr id="242" name="Google Shape;242;p30">
             <a:extLst>
               <a:ext uri="{FF2B5EF4-FFF2-40B4-BE49-F238E27FC236}">
-                <a16:creationId xmlns:a16="http://schemas.microsoft.com/office/drawing/2014/main" id="{2D5F6068-66E1-F55A-C0B8-380D8CE0040C}"/>
+                <a16:creationId xmlns:a16="http://schemas.microsoft.com/office/drawing/2014/main" xmlns="" id="{2D5F6068-66E1-F55A-C0B8-380D8CE0040C}"/>
               </a:ext>
             </a:extLst>
           </p:cNvPr>
@@ -30427,7 +30526,7 @@
           <p:cNvPr id="243" name="Google Shape;243;p30">
             <a:extLst>
               <a:ext uri="{FF2B5EF4-FFF2-40B4-BE49-F238E27FC236}">
-                <a16:creationId xmlns:a16="http://schemas.microsoft.com/office/drawing/2014/main" id="{D0D82E7A-13F0-05A5-BD9B-A311A44BEA76}"/>
+                <a16:creationId xmlns:a16="http://schemas.microsoft.com/office/drawing/2014/main" xmlns="" id="{D0D82E7A-13F0-05A5-BD9B-A311A44BEA76}"/>
               </a:ext>
             </a:extLst>
           </p:cNvPr>
@@ -30617,7 +30716,7 @@
           <p:cNvPr id="244" name="Google Shape;244;p30">
             <a:extLst>
               <a:ext uri="{FF2B5EF4-FFF2-40B4-BE49-F238E27FC236}">
-                <a16:creationId xmlns:a16="http://schemas.microsoft.com/office/drawing/2014/main" id="{6D2B884A-569E-790F-21FC-D3A546F8B70D}"/>
+                <a16:creationId xmlns:a16="http://schemas.microsoft.com/office/drawing/2014/main" xmlns="" id="{6D2B884A-569E-790F-21FC-D3A546F8B70D}"/>
               </a:ext>
             </a:extLst>
           </p:cNvPr>
@@ -30637,7 +30736,7 @@
             <p:cNvPr id="245" name="Google Shape;245;p30">
               <a:extLst>
                 <a:ext uri="{FF2B5EF4-FFF2-40B4-BE49-F238E27FC236}">
-                  <a16:creationId xmlns:a16="http://schemas.microsoft.com/office/drawing/2014/main" id="{1DC610B5-234E-FFB3-ECB7-10F12F102407}"/>
+                  <a16:creationId xmlns:a16="http://schemas.microsoft.com/office/drawing/2014/main" xmlns="" id="{1DC610B5-234E-FFB3-ECB7-10F12F102407}"/>
                 </a:ext>
               </a:extLst>
             </p:cNvPr>
@@ -30785,7 +30884,7 @@
             <p:cNvPr id="246" name="Google Shape;246;p30">
               <a:extLst>
                 <a:ext uri="{FF2B5EF4-FFF2-40B4-BE49-F238E27FC236}">
-                  <a16:creationId xmlns:a16="http://schemas.microsoft.com/office/drawing/2014/main" id="{C95814CF-5DCB-1833-4403-A51BF1694660}"/>
+                  <a16:creationId xmlns:a16="http://schemas.microsoft.com/office/drawing/2014/main" xmlns="" id="{C95814CF-5DCB-1833-4403-A51BF1694660}"/>
                 </a:ext>
               </a:extLst>
             </p:cNvPr>
@@ -30947,7 +31046,7 @@
           <p:cNvPr id="247" name="Google Shape;247;p30">
             <a:extLst>
               <a:ext uri="{FF2B5EF4-FFF2-40B4-BE49-F238E27FC236}">
-                <a16:creationId xmlns:a16="http://schemas.microsoft.com/office/drawing/2014/main" id="{EE3FABC0-43C4-1C96-A8C9-053D609DCFB2}"/>
+                <a16:creationId xmlns:a16="http://schemas.microsoft.com/office/drawing/2014/main" xmlns="" id="{EE3FABC0-43C4-1C96-A8C9-053D609DCFB2}"/>
               </a:ext>
             </a:extLst>
           </p:cNvPr>
@@ -30967,7 +31066,7 @@
             <p:cNvPr id="248" name="Google Shape;248;p30">
               <a:extLst>
                 <a:ext uri="{FF2B5EF4-FFF2-40B4-BE49-F238E27FC236}">
-                  <a16:creationId xmlns:a16="http://schemas.microsoft.com/office/drawing/2014/main" id="{836F3A37-AC63-A3A4-13CE-8C03281CB50C}"/>
+                  <a16:creationId xmlns:a16="http://schemas.microsoft.com/office/drawing/2014/main" xmlns="" id="{836F3A37-AC63-A3A4-13CE-8C03281CB50C}"/>
                 </a:ext>
               </a:extLst>
             </p:cNvPr>
@@ -31175,7 +31274,7 @@
             <p:cNvPr id="249" name="Google Shape;249;p30">
               <a:extLst>
                 <a:ext uri="{FF2B5EF4-FFF2-40B4-BE49-F238E27FC236}">
-                  <a16:creationId xmlns:a16="http://schemas.microsoft.com/office/drawing/2014/main" id="{8BB63651-2785-BD13-9C50-14C5740F532E}"/>
+                  <a16:creationId xmlns:a16="http://schemas.microsoft.com/office/drawing/2014/main" xmlns="" id="{8BB63651-2785-BD13-9C50-14C5740F532E}"/>
                 </a:ext>
               </a:extLst>
             </p:cNvPr>
@@ -31375,7 +31474,7 @@
           <p:cNvPr id="250" name="Google Shape;250;p30">
             <a:extLst>
               <a:ext uri="{FF2B5EF4-FFF2-40B4-BE49-F238E27FC236}">
-                <a16:creationId xmlns:a16="http://schemas.microsoft.com/office/drawing/2014/main" id="{A3CAAB73-561D-BE53-9716-CADC160D1F8E}"/>
+                <a16:creationId xmlns:a16="http://schemas.microsoft.com/office/drawing/2014/main" xmlns="" id="{A3CAAB73-561D-BE53-9716-CADC160D1F8E}"/>
               </a:ext>
             </a:extLst>
           </p:cNvPr>
@@ -31524,7 +31623,7 @@
           <p:cNvPr id="251" name="Google Shape;251;p30">
             <a:extLst>
               <a:ext uri="{FF2B5EF4-FFF2-40B4-BE49-F238E27FC236}">
-                <a16:creationId xmlns:a16="http://schemas.microsoft.com/office/drawing/2014/main" id="{53BAB5C5-3D67-F3D2-551C-15269A6D8469}"/>
+                <a16:creationId xmlns:a16="http://schemas.microsoft.com/office/drawing/2014/main" xmlns="" id="{53BAB5C5-3D67-F3D2-551C-15269A6D8469}"/>
               </a:ext>
             </a:extLst>
           </p:cNvPr>
@@ -31922,7 +32021,7 @@
           <p:cNvPr id="252" name="Google Shape;252;p30">
             <a:extLst>
               <a:ext uri="{FF2B5EF4-FFF2-40B4-BE49-F238E27FC236}">
-                <a16:creationId xmlns:a16="http://schemas.microsoft.com/office/drawing/2014/main" id="{27E7F11A-2A03-F7DD-1E42-32BBF8CB1519}"/>
+                <a16:creationId xmlns:a16="http://schemas.microsoft.com/office/drawing/2014/main" xmlns="" id="{27E7F11A-2A03-F7DD-1E42-32BBF8CB1519}"/>
               </a:ext>
             </a:extLst>
           </p:cNvPr>
@@ -31942,7 +32041,7 @@
             <p:cNvPr id="253" name="Google Shape;253;p30">
               <a:extLst>
                 <a:ext uri="{FF2B5EF4-FFF2-40B4-BE49-F238E27FC236}">
-                  <a16:creationId xmlns:a16="http://schemas.microsoft.com/office/drawing/2014/main" id="{73E20D35-0CC2-619A-B598-3AA581861E70}"/>
+                  <a16:creationId xmlns:a16="http://schemas.microsoft.com/office/drawing/2014/main" xmlns="" id="{73E20D35-0CC2-619A-B598-3AA581861E70}"/>
                 </a:ext>
               </a:extLst>
             </p:cNvPr>
@@ -32150,7 +32249,7 @@
             <p:cNvPr id="254" name="Google Shape;254;p30">
               <a:extLst>
                 <a:ext uri="{FF2B5EF4-FFF2-40B4-BE49-F238E27FC236}">
-                  <a16:creationId xmlns:a16="http://schemas.microsoft.com/office/drawing/2014/main" id="{B1ABA285-0994-AA01-DCA1-E03C2DD2EFB2}"/>
+                  <a16:creationId xmlns:a16="http://schemas.microsoft.com/office/drawing/2014/main" xmlns="" id="{B1ABA285-0994-AA01-DCA1-E03C2DD2EFB2}"/>
                 </a:ext>
               </a:extLst>
             </p:cNvPr>
@@ -32350,7 +32449,7 @@
           <p:cNvPr id="255" name="Google Shape;255;p30">
             <a:extLst>
               <a:ext uri="{FF2B5EF4-FFF2-40B4-BE49-F238E27FC236}">
-                <a16:creationId xmlns:a16="http://schemas.microsoft.com/office/drawing/2014/main" id="{5891AE76-D81F-0B6F-F585-8D3698842FC6}"/>
+                <a16:creationId xmlns:a16="http://schemas.microsoft.com/office/drawing/2014/main" xmlns="" id="{5891AE76-D81F-0B6F-F585-8D3698842FC6}"/>
               </a:ext>
             </a:extLst>
           </p:cNvPr>
@@ -32833,7 +32932,7 @@
           <p:cNvPr id="256" name="Google Shape;256;p30">
             <a:extLst>
               <a:ext uri="{FF2B5EF4-FFF2-40B4-BE49-F238E27FC236}">
-                <a16:creationId xmlns:a16="http://schemas.microsoft.com/office/drawing/2014/main" id="{FF32A08F-EDD9-9F60-5A35-CBE5C14E5B8D}"/>
+                <a16:creationId xmlns:a16="http://schemas.microsoft.com/office/drawing/2014/main" xmlns="" id="{FF32A08F-EDD9-9F60-5A35-CBE5C14E5B8D}"/>
               </a:ext>
             </a:extLst>
           </p:cNvPr>
@@ -33215,7 +33314,7 @@
     </p:spTree>
     <p:extLst>
       <p:ext uri="{BB962C8B-B14F-4D97-AF65-F5344CB8AC3E}">
-        <p14:creationId xmlns:p14="http://schemas.microsoft.com/office/powerpoint/2010/main" val="2695156669"/>
+        <p14:creationId xmlns:p14="http://schemas.microsoft.com/office/powerpoint/2010/main" xmlns="" val="2695156669"/>
       </p:ext>
     </p:extLst>
   </p:cSld>
@@ -39718,7 +39817,7 @@
           <p:cNvPr id="5" name="Picture Placeholder 4">
             <a:extLst>
               <a:ext uri="{FF2B5EF4-FFF2-40B4-BE49-F238E27FC236}">
-                <a16:creationId xmlns:a16="http://schemas.microsoft.com/office/drawing/2014/main" id="{B394A123-382B-1F09-63C7-10D213176693}"/>
+                <a16:creationId xmlns:a16="http://schemas.microsoft.com/office/drawing/2014/main" xmlns="" id="{B394A123-382B-1F09-63C7-10D213176693}"/>
               </a:ext>
             </a:extLst>
           </p:cNvPr>
@@ -40352,7 +40451,7 @@
           <p:cNvPr id="2" name="TextBox 1">
             <a:extLst>
               <a:ext uri="{FF2B5EF4-FFF2-40B4-BE49-F238E27FC236}">
-                <a16:creationId xmlns:a16="http://schemas.microsoft.com/office/drawing/2014/main" id="{F9320FEA-5605-4017-D30B-25DD20E36FBF}"/>
+                <a16:creationId xmlns:a16="http://schemas.microsoft.com/office/drawing/2014/main" xmlns="" id="{F9320FEA-5605-4017-D30B-25DD20E36FBF}"/>
               </a:ext>
             </a:extLst>
           </p:cNvPr>
@@ -40445,6 +40544,10 @@
               <a:rPr lang="en" u="sng" dirty="0"/>
               <a:t>Description</a:t>
             </a:r>
+            <a:r>
+              <a:rPr lang="en" dirty="0"/>
+              <a:t/>
+            </a:r>
             <a:br>
               <a:rPr lang="en" dirty="0"/>
             </a:br>
@@ -41532,7 +41635,7 @@
           <p:cNvPr id="2" name="TextBox 1">
             <a:extLst>
               <a:ext uri="{FF2B5EF4-FFF2-40B4-BE49-F238E27FC236}">
-                <a16:creationId xmlns:a16="http://schemas.microsoft.com/office/drawing/2014/main" id="{668BF7B2-7690-8E66-6E71-F9F22B12F079}"/>
+                <a16:creationId xmlns:a16="http://schemas.microsoft.com/office/drawing/2014/main" xmlns="" id="{668BF7B2-7690-8E66-6E71-F9F22B12F079}"/>
               </a:ext>
             </a:extLst>
           </p:cNvPr>
@@ -41567,7 +41670,7 @@
           <p:cNvPr id="5" name="Google Shape;314;p34">
             <a:extLst>
               <a:ext uri="{FF2B5EF4-FFF2-40B4-BE49-F238E27FC236}">
-                <a16:creationId xmlns:a16="http://schemas.microsoft.com/office/drawing/2014/main" id="{8067693C-4DEC-2A48-DFCA-800B510083E5}"/>
+                <a16:creationId xmlns:a16="http://schemas.microsoft.com/office/drawing/2014/main" xmlns="" id="{8067693C-4DEC-2A48-DFCA-800B510083E5}"/>
               </a:ext>
             </a:extLst>
           </p:cNvPr>
@@ -41863,7 +41966,7 @@
           <p:cNvPr id="6" name="Google Shape;314;p34">
             <a:extLst>
               <a:ext uri="{FF2B5EF4-FFF2-40B4-BE49-F238E27FC236}">
-                <a16:creationId xmlns:a16="http://schemas.microsoft.com/office/drawing/2014/main" id="{840DEFD2-1135-4A61-3726-8EDFFAE65E05}"/>
+                <a16:creationId xmlns:a16="http://schemas.microsoft.com/office/drawing/2014/main" xmlns="" id="{840DEFD2-1135-4A61-3726-8EDFFAE65E05}"/>
               </a:ext>
             </a:extLst>
           </p:cNvPr>
@@ -42156,7 +42259,7 @@
           <p:cNvPr id="7" name="Google Shape;314;p34">
             <a:extLst>
               <a:ext uri="{FF2B5EF4-FFF2-40B4-BE49-F238E27FC236}">
-                <a16:creationId xmlns:a16="http://schemas.microsoft.com/office/drawing/2014/main" id="{6F7E97FE-41A6-9293-46FF-ECB6A351024B}"/>
+                <a16:creationId xmlns:a16="http://schemas.microsoft.com/office/drawing/2014/main" xmlns="" id="{6F7E97FE-41A6-9293-46FF-ECB6A351024B}"/>
               </a:ext>
             </a:extLst>
           </p:cNvPr>
@@ -43052,7 +43155,7 @@
           <p:cNvPr id="4" name="TextBox 3">
             <a:extLst>
               <a:ext uri="{FF2B5EF4-FFF2-40B4-BE49-F238E27FC236}">
-                <a16:creationId xmlns:a16="http://schemas.microsoft.com/office/drawing/2014/main" id="{0FAA349C-52A2-7811-B2D8-4B949E3A5B02}"/>
+                <a16:creationId xmlns:a16="http://schemas.microsoft.com/office/drawing/2014/main" xmlns="" id="{0FAA349C-52A2-7811-B2D8-4B949E3A5B02}"/>
               </a:ext>
             </a:extLst>
           </p:cNvPr>
@@ -45761,7 +45864,7 @@
           <p:cNvPr id="8" name="TextBox 7">
             <a:extLst>
               <a:ext uri="{FF2B5EF4-FFF2-40B4-BE49-F238E27FC236}">
-                <a16:creationId xmlns:a16="http://schemas.microsoft.com/office/drawing/2014/main" id="{06BE5B69-0077-D281-87D3-3D8A46F73B94}"/>
+                <a16:creationId xmlns:a16="http://schemas.microsoft.com/office/drawing/2014/main" xmlns="" id="{06BE5B69-0077-D281-87D3-3D8A46F73B94}"/>
               </a:ext>
             </a:extLst>
           </p:cNvPr>
@@ -46254,7 +46357,7 @@
           <p:cNvPr id="3" name="Picture 2">
             <a:extLst>
               <a:ext uri="{FF2B5EF4-FFF2-40B4-BE49-F238E27FC236}">
-                <a16:creationId xmlns:a16="http://schemas.microsoft.com/office/drawing/2014/main" id="{B2727EFE-D35F-7D04-AA2B-494E2F5E27C6}"/>
+                <a16:creationId xmlns:a16="http://schemas.microsoft.com/office/drawing/2014/main" xmlns="" id="{B2727EFE-D35F-7D04-AA2B-494E2F5E27C6}"/>
               </a:ext>
             </a:extLst>
           </p:cNvPr>
@@ -46284,7 +46387,7 @@
           <p:cNvPr id="16" name="TextBox 15">
             <a:extLst>
               <a:ext uri="{FF2B5EF4-FFF2-40B4-BE49-F238E27FC236}">
-                <a16:creationId xmlns:a16="http://schemas.microsoft.com/office/drawing/2014/main" id="{BF904828-B486-ED70-4A6D-5EFEEC7F1171}"/>
+                <a16:creationId xmlns:a16="http://schemas.microsoft.com/office/drawing/2014/main" xmlns="" id="{BF904828-B486-ED70-4A6D-5EFEEC7F1171}"/>
               </a:ext>
             </a:extLst>
           </p:cNvPr>

--- a/PowerPointAppDev.pptx
+++ b/PowerPointAppDev.pptx
@@ -30,31 +30,31 @@
   <p:notesSz cx="6858000" cy="9144000"/>
   <p:embeddedFontLst>
     <p:embeddedFont>
-      <p:font typeface="Yusei Magic" charset="-128"/>
+      <p:font typeface="Yusei Magic" panose="020B0604020202020204" charset="-128"/>
       <p:regular r:id="rId20"/>
     </p:embeddedFont>
     <p:embeddedFont>
-      <p:font typeface="DM Sans Medium" charset="0"/>
+      <p:font typeface="Bebas Neue" panose="020B0606020202050201" pitchFamily="34" charset="0"/>
       <p:regular r:id="rId21"/>
-      <p:bold r:id="rId22"/>
-      <p:italic r:id="rId23"/>
-      <p:boldItalic r:id="rId24"/>
     </p:embeddedFont>
     <p:embeddedFont>
-      <p:font typeface="Raleway" charset="0"/>
-      <p:regular r:id="rId25"/>
-      <p:bold r:id="rId26"/>
-      <p:italic r:id="rId27"/>
-      <p:boldItalic r:id="rId28"/>
+      <p:font typeface="DM Sans Medium" pitchFamily="2" charset="0"/>
+      <p:regular r:id="rId22"/>
+      <p:bold r:id="rId23"/>
+      <p:italic r:id="rId24"/>
+      <p:boldItalic r:id="rId25"/>
     </p:embeddedFont>
     <p:embeddedFont>
-      <p:font typeface="Nunito Light" charset="0"/>
-      <p:regular r:id="rId29"/>
-      <p:italic r:id="rId30"/>
+      <p:font typeface="Nunito Light" pitchFamily="2" charset="0"/>
+      <p:regular r:id="rId26"/>
+      <p:italic r:id="rId27"/>
     </p:embeddedFont>
     <p:embeddedFont>
-      <p:font typeface="Bebas Neue" charset="0"/>
-      <p:regular r:id="rId31"/>
+      <p:font typeface="Raleway" pitchFamily="2" charset="0"/>
+      <p:regular r:id="rId28"/>
+      <p:bold r:id="rId29"/>
+      <p:italic r:id="rId30"/>
+      <p:boldItalic r:id="rId31"/>
     </p:embeddedFont>
   </p:embeddedFontLst>
   <p:defaultTextStyle>
@@ -288,7 +288,18 @@
   </p:defaultTextStyle>
   <p:extLst>
     <p:ext uri="{EFAFB233-063F-42B5-8137-9DF3F51BA10A}">
-      <p15:sldGuideLst xmlns:p15="http://schemas.microsoft.com/office/powerpoint/2012/main" xmlns=""/>
+      <p15:sldGuideLst xmlns:p15="http://schemas.microsoft.com/office/powerpoint/2012/main">
+        <p15:guide id="1" orient="horz" pos="1620">
+          <p15:clr>
+            <a:srgbClr val="A4A3A4"/>
+          </p15:clr>
+        </p15:guide>
+        <p15:guide id="2" pos="2880">
+          <p15:clr>
+            <a:srgbClr val="A4A3A4"/>
+          </p15:clr>
+        </p15:guide>
+      </p15:sldGuideLst>
     </p:ext>
   </p:extLst>
 </p:presentation>
@@ -876,7 +887,7 @@
         <p:cNvPr id="1" name="Shape 514">
           <a:extLst>
             <a:ext uri="{FF2B5EF4-FFF2-40B4-BE49-F238E27FC236}">
-              <a16:creationId xmlns:a16="http://schemas.microsoft.com/office/drawing/2014/main" xmlns="" id="{1B7FF502-B8A4-E63A-D57C-24C888FE305A}"/>
+              <a16:creationId xmlns:a16="http://schemas.microsoft.com/office/drawing/2014/main" id="{1B7FF502-B8A4-E63A-D57C-24C888FE305A}"/>
             </a:ext>
           </a:extLst>
         </p:cNvPr>
@@ -896,7 +907,7 @@
           <p:cNvPr id="515" name="Google Shape;515;g1125d80b419_0_776:notes">
             <a:extLst>
               <a:ext uri="{FF2B5EF4-FFF2-40B4-BE49-F238E27FC236}">
-                <a16:creationId xmlns:a16="http://schemas.microsoft.com/office/drawing/2014/main" xmlns="" id="{47005946-C2E3-0686-B145-596813D90AE0}"/>
+                <a16:creationId xmlns:a16="http://schemas.microsoft.com/office/drawing/2014/main" id="{47005946-C2E3-0686-B145-596813D90AE0}"/>
               </a:ext>
             </a:extLst>
           </p:cNvPr>
@@ -943,7 +954,7 @@
           <p:cNvPr id="516" name="Google Shape;516;g1125d80b419_0_776:notes">
             <a:extLst>
               <a:ext uri="{FF2B5EF4-FFF2-40B4-BE49-F238E27FC236}">
-                <a16:creationId xmlns:a16="http://schemas.microsoft.com/office/drawing/2014/main" xmlns="" id="{A63786EF-4265-B25F-54B7-37E19DF8D7DE}"/>
+                <a16:creationId xmlns:a16="http://schemas.microsoft.com/office/drawing/2014/main" id="{A63786EF-4265-B25F-54B7-37E19DF8D7DE}"/>
               </a:ext>
             </a:extLst>
           </p:cNvPr>
@@ -985,7 +996,7 @@
     </p:spTree>
     <p:extLst>
       <p:ext uri="{BB962C8B-B14F-4D97-AF65-F5344CB8AC3E}">
-        <p14:creationId xmlns:p14="http://schemas.microsoft.com/office/powerpoint/2010/main" xmlns="" val="3299046637"/>
+        <p14:creationId xmlns:p14="http://schemas.microsoft.com/office/powerpoint/2010/main" val="3299046637"/>
       </p:ext>
     </p:extLst>
   </p:cSld>
@@ -1003,7 +1014,7 @@
         <p:cNvPr id="1" name="Shape 514">
           <a:extLst>
             <a:ext uri="{FF2B5EF4-FFF2-40B4-BE49-F238E27FC236}">
-              <a16:creationId xmlns:a16="http://schemas.microsoft.com/office/drawing/2014/main" xmlns="" id="{71749BEE-83B9-95FB-979D-1F34E364292D}"/>
+              <a16:creationId xmlns:a16="http://schemas.microsoft.com/office/drawing/2014/main" id="{71749BEE-83B9-95FB-979D-1F34E364292D}"/>
             </a:ext>
           </a:extLst>
         </p:cNvPr>
@@ -1023,7 +1034,7 @@
           <p:cNvPr id="515" name="Google Shape;515;g1125d80b419_0_776:notes">
             <a:extLst>
               <a:ext uri="{FF2B5EF4-FFF2-40B4-BE49-F238E27FC236}">
-                <a16:creationId xmlns:a16="http://schemas.microsoft.com/office/drawing/2014/main" xmlns="" id="{271E5404-CC2B-9206-E649-655B8C98341F}"/>
+                <a16:creationId xmlns:a16="http://schemas.microsoft.com/office/drawing/2014/main" id="{271E5404-CC2B-9206-E649-655B8C98341F}"/>
               </a:ext>
             </a:extLst>
           </p:cNvPr>
@@ -1070,7 +1081,7 @@
           <p:cNvPr id="516" name="Google Shape;516;g1125d80b419_0_776:notes">
             <a:extLst>
               <a:ext uri="{FF2B5EF4-FFF2-40B4-BE49-F238E27FC236}">
-                <a16:creationId xmlns:a16="http://schemas.microsoft.com/office/drawing/2014/main" xmlns="" id="{21B8C2F6-DD52-B3AA-9E3B-8C2E0FA4525B}"/>
+                <a16:creationId xmlns:a16="http://schemas.microsoft.com/office/drawing/2014/main" id="{21B8C2F6-DD52-B3AA-9E3B-8C2E0FA4525B}"/>
               </a:ext>
             </a:extLst>
           </p:cNvPr>
@@ -1112,7 +1123,7 @@
     </p:spTree>
     <p:extLst>
       <p:ext uri="{BB962C8B-B14F-4D97-AF65-F5344CB8AC3E}">
-        <p14:creationId xmlns:p14="http://schemas.microsoft.com/office/powerpoint/2010/main" xmlns="" val="1454762325"/>
+        <p14:creationId xmlns:p14="http://schemas.microsoft.com/office/powerpoint/2010/main" val="1454762325"/>
       </p:ext>
     </p:extLst>
   </p:cSld>
@@ -1130,7 +1141,7 @@
         <p:cNvPr id="1" name="Shape 514">
           <a:extLst>
             <a:ext uri="{FF2B5EF4-FFF2-40B4-BE49-F238E27FC236}">
-              <a16:creationId xmlns:a16="http://schemas.microsoft.com/office/drawing/2014/main" xmlns="" id="{8A22B913-F0EB-5790-3C57-47D0BB90E15A}"/>
+              <a16:creationId xmlns:a16="http://schemas.microsoft.com/office/drawing/2014/main" id="{8A22B913-F0EB-5790-3C57-47D0BB90E15A}"/>
             </a:ext>
           </a:extLst>
         </p:cNvPr>
@@ -1150,7 +1161,7 @@
           <p:cNvPr id="515" name="Google Shape;515;g1125d80b419_0_776:notes">
             <a:extLst>
               <a:ext uri="{FF2B5EF4-FFF2-40B4-BE49-F238E27FC236}">
-                <a16:creationId xmlns:a16="http://schemas.microsoft.com/office/drawing/2014/main" xmlns="" id="{0E25CB9B-6FA4-5E81-A950-24F813B21B49}"/>
+                <a16:creationId xmlns:a16="http://schemas.microsoft.com/office/drawing/2014/main" id="{0E25CB9B-6FA4-5E81-A950-24F813B21B49}"/>
               </a:ext>
             </a:extLst>
           </p:cNvPr>
@@ -1197,7 +1208,7 @@
           <p:cNvPr id="516" name="Google Shape;516;g1125d80b419_0_776:notes">
             <a:extLst>
               <a:ext uri="{FF2B5EF4-FFF2-40B4-BE49-F238E27FC236}">
-                <a16:creationId xmlns:a16="http://schemas.microsoft.com/office/drawing/2014/main" xmlns="" id="{74B6EBD0-7869-E364-E4DA-FC01D0109A5D}"/>
+                <a16:creationId xmlns:a16="http://schemas.microsoft.com/office/drawing/2014/main" id="{74B6EBD0-7869-E364-E4DA-FC01D0109A5D}"/>
               </a:ext>
             </a:extLst>
           </p:cNvPr>
@@ -1239,7 +1250,7 @@
     </p:spTree>
     <p:extLst>
       <p:ext uri="{BB962C8B-B14F-4D97-AF65-F5344CB8AC3E}">
-        <p14:creationId xmlns:p14="http://schemas.microsoft.com/office/powerpoint/2010/main" xmlns="" val="1724519660"/>
+        <p14:creationId xmlns:p14="http://schemas.microsoft.com/office/powerpoint/2010/main" val="1724519660"/>
       </p:ext>
     </p:extLst>
   </p:cSld>
@@ -1257,7 +1268,7 @@
         <p:cNvPr id="1" name="Shape 514">
           <a:extLst>
             <a:ext uri="{FF2B5EF4-FFF2-40B4-BE49-F238E27FC236}">
-              <a16:creationId xmlns:a16="http://schemas.microsoft.com/office/drawing/2014/main" xmlns="" id="{4C1DCF68-6333-2B3A-0806-63D4112877BE}"/>
+              <a16:creationId xmlns:a16="http://schemas.microsoft.com/office/drawing/2014/main" id="{4C1DCF68-6333-2B3A-0806-63D4112877BE}"/>
             </a:ext>
           </a:extLst>
         </p:cNvPr>
@@ -1277,7 +1288,7 @@
           <p:cNvPr id="515" name="Google Shape;515;g1125d80b419_0_776:notes">
             <a:extLst>
               <a:ext uri="{FF2B5EF4-FFF2-40B4-BE49-F238E27FC236}">
-                <a16:creationId xmlns:a16="http://schemas.microsoft.com/office/drawing/2014/main" xmlns="" id="{8E71F15D-262D-FA7F-47F2-E0967AA40462}"/>
+                <a16:creationId xmlns:a16="http://schemas.microsoft.com/office/drawing/2014/main" id="{8E71F15D-262D-FA7F-47F2-E0967AA40462}"/>
               </a:ext>
             </a:extLst>
           </p:cNvPr>
@@ -1324,7 +1335,7 @@
           <p:cNvPr id="516" name="Google Shape;516;g1125d80b419_0_776:notes">
             <a:extLst>
               <a:ext uri="{FF2B5EF4-FFF2-40B4-BE49-F238E27FC236}">
-                <a16:creationId xmlns:a16="http://schemas.microsoft.com/office/drawing/2014/main" xmlns="" id="{77688229-7A11-7DBD-2071-DB33B4EC0FAF}"/>
+                <a16:creationId xmlns:a16="http://schemas.microsoft.com/office/drawing/2014/main" id="{77688229-7A11-7DBD-2071-DB33B4EC0FAF}"/>
               </a:ext>
             </a:extLst>
           </p:cNvPr>
@@ -1366,7 +1377,7 @@
     </p:spTree>
     <p:extLst>
       <p:ext uri="{BB962C8B-B14F-4D97-AF65-F5344CB8AC3E}">
-        <p14:creationId xmlns:p14="http://schemas.microsoft.com/office/powerpoint/2010/main" xmlns="" val="2428231393"/>
+        <p14:creationId xmlns:p14="http://schemas.microsoft.com/office/powerpoint/2010/main" val="2428231393"/>
       </p:ext>
     </p:extLst>
   </p:cSld>
@@ -1384,7 +1395,7 @@
         <p:cNvPr id="1" name="Shape 514">
           <a:extLst>
             <a:ext uri="{FF2B5EF4-FFF2-40B4-BE49-F238E27FC236}">
-              <a16:creationId xmlns:a16="http://schemas.microsoft.com/office/drawing/2014/main" xmlns="" id="{874378C8-8ED1-224A-A70A-AA739874EBE2}"/>
+              <a16:creationId xmlns:a16="http://schemas.microsoft.com/office/drawing/2014/main" id="{874378C8-8ED1-224A-A70A-AA739874EBE2}"/>
             </a:ext>
           </a:extLst>
         </p:cNvPr>
@@ -1404,7 +1415,7 @@
           <p:cNvPr id="515" name="Google Shape;515;g1125d80b419_0_776:notes">
             <a:extLst>
               <a:ext uri="{FF2B5EF4-FFF2-40B4-BE49-F238E27FC236}">
-                <a16:creationId xmlns:a16="http://schemas.microsoft.com/office/drawing/2014/main" xmlns="" id="{B2C73D81-F1BE-63F0-9532-46AEB231BDCB}"/>
+                <a16:creationId xmlns:a16="http://schemas.microsoft.com/office/drawing/2014/main" id="{B2C73D81-F1BE-63F0-9532-46AEB231BDCB}"/>
               </a:ext>
             </a:extLst>
           </p:cNvPr>
@@ -1451,7 +1462,7 @@
           <p:cNvPr id="516" name="Google Shape;516;g1125d80b419_0_776:notes">
             <a:extLst>
               <a:ext uri="{FF2B5EF4-FFF2-40B4-BE49-F238E27FC236}">
-                <a16:creationId xmlns:a16="http://schemas.microsoft.com/office/drawing/2014/main" xmlns="" id="{0CA2047D-97D4-5760-BC53-49116E80C2BF}"/>
+                <a16:creationId xmlns:a16="http://schemas.microsoft.com/office/drawing/2014/main" id="{0CA2047D-97D4-5760-BC53-49116E80C2BF}"/>
               </a:ext>
             </a:extLst>
           </p:cNvPr>
@@ -1493,7 +1504,7 @@
     </p:spTree>
     <p:extLst>
       <p:ext uri="{BB962C8B-B14F-4D97-AF65-F5344CB8AC3E}">
-        <p14:creationId xmlns:p14="http://schemas.microsoft.com/office/powerpoint/2010/main" xmlns="" val="3152281662"/>
+        <p14:creationId xmlns:p14="http://schemas.microsoft.com/office/powerpoint/2010/main" val="3152281662"/>
       </p:ext>
     </p:extLst>
   </p:cSld>
@@ -1511,7 +1522,7 @@
         <p:cNvPr id="1" name="Shape 514">
           <a:extLst>
             <a:ext uri="{FF2B5EF4-FFF2-40B4-BE49-F238E27FC236}">
-              <a16:creationId xmlns:a16="http://schemas.microsoft.com/office/drawing/2014/main" xmlns="" id="{C0D4B9FF-72F4-9F9F-C2FA-7C64C82F08B8}"/>
+              <a16:creationId xmlns:a16="http://schemas.microsoft.com/office/drawing/2014/main" id="{C0D4B9FF-72F4-9F9F-C2FA-7C64C82F08B8}"/>
             </a:ext>
           </a:extLst>
         </p:cNvPr>
@@ -1531,7 +1542,7 @@
           <p:cNvPr id="515" name="Google Shape;515;g1125d80b419_0_776:notes">
             <a:extLst>
               <a:ext uri="{FF2B5EF4-FFF2-40B4-BE49-F238E27FC236}">
-                <a16:creationId xmlns:a16="http://schemas.microsoft.com/office/drawing/2014/main" xmlns="" id="{8BDFF6EA-200C-3795-C724-A6341509A416}"/>
+                <a16:creationId xmlns:a16="http://schemas.microsoft.com/office/drawing/2014/main" id="{8BDFF6EA-200C-3795-C724-A6341509A416}"/>
               </a:ext>
             </a:extLst>
           </p:cNvPr>
@@ -1578,7 +1589,7 @@
           <p:cNvPr id="516" name="Google Shape;516;g1125d80b419_0_776:notes">
             <a:extLst>
               <a:ext uri="{FF2B5EF4-FFF2-40B4-BE49-F238E27FC236}">
-                <a16:creationId xmlns:a16="http://schemas.microsoft.com/office/drawing/2014/main" xmlns="" id="{C5751B9B-836C-3776-5719-45ECAB08ABD9}"/>
+                <a16:creationId xmlns:a16="http://schemas.microsoft.com/office/drawing/2014/main" id="{C5751B9B-836C-3776-5719-45ECAB08ABD9}"/>
               </a:ext>
             </a:extLst>
           </p:cNvPr>
@@ -1620,7 +1631,7 @@
     </p:spTree>
     <p:extLst>
       <p:ext uri="{BB962C8B-B14F-4D97-AF65-F5344CB8AC3E}">
-        <p14:creationId xmlns:p14="http://schemas.microsoft.com/office/powerpoint/2010/main" xmlns="" val="1134866504"/>
+        <p14:creationId xmlns:p14="http://schemas.microsoft.com/office/powerpoint/2010/main" val="1134866504"/>
       </p:ext>
     </p:extLst>
   </p:cSld>
@@ -1638,7 +1649,7 @@
         <p:cNvPr id="1" name="Shape 341">
           <a:extLst>
             <a:ext uri="{FF2B5EF4-FFF2-40B4-BE49-F238E27FC236}">
-              <a16:creationId xmlns:a16="http://schemas.microsoft.com/office/drawing/2014/main" xmlns="" id="{F89DE483-D03E-0A2F-2D21-A144161697E8}"/>
+              <a16:creationId xmlns:a16="http://schemas.microsoft.com/office/drawing/2014/main" id="{F89DE483-D03E-0A2F-2D21-A144161697E8}"/>
             </a:ext>
           </a:extLst>
         </p:cNvPr>
@@ -1658,7 +1669,7 @@
           <p:cNvPr id="342" name="Google Shape;342;g1ff18b49f31_1_71:notes">
             <a:extLst>
               <a:ext uri="{FF2B5EF4-FFF2-40B4-BE49-F238E27FC236}">
-                <a16:creationId xmlns:a16="http://schemas.microsoft.com/office/drawing/2014/main" xmlns="" id="{7C040D7C-D1D4-7061-9B92-97FFD97E4E2C}"/>
+                <a16:creationId xmlns:a16="http://schemas.microsoft.com/office/drawing/2014/main" id="{7C040D7C-D1D4-7061-9B92-97FFD97E4E2C}"/>
               </a:ext>
             </a:extLst>
           </p:cNvPr>
@@ -1705,7 +1716,7 @@
           <p:cNvPr id="343" name="Google Shape;343;g1ff18b49f31_1_71:notes">
             <a:extLst>
               <a:ext uri="{FF2B5EF4-FFF2-40B4-BE49-F238E27FC236}">
-                <a16:creationId xmlns:a16="http://schemas.microsoft.com/office/drawing/2014/main" xmlns="" id="{D6A8EBEC-5C21-5332-436A-5DE85E3058BB}"/>
+                <a16:creationId xmlns:a16="http://schemas.microsoft.com/office/drawing/2014/main" id="{D6A8EBEC-5C21-5332-436A-5DE85E3058BB}"/>
               </a:ext>
             </a:extLst>
           </p:cNvPr>
@@ -1747,7 +1758,7 @@
     </p:spTree>
     <p:extLst>
       <p:ext uri="{BB962C8B-B14F-4D97-AF65-F5344CB8AC3E}">
-        <p14:creationId xmlns:p14="http://schemas.microsoft.com/office/powerpoint/2010/main" xmlns="" val="2139460300"/>
+        <p14:creationId xmlns:p14="http://schemas.microsoft.com/office/powerpoint/2010/main" val="2139460300"/>
       </p:ext>
     </p:extLst>
   </p:cSld>
@@ -1765,7 +1776,7 @@
         <p:cNvPr id="1" name="Shape 236">
           <a:extLst>
             <a:ext uri="{FF2B5EF4-FFF2-40B4-BE49-F238E27FC236}">
-              <a16:creationId xmlns:a16="http://schemas.microsoft.com/office/drawing/2014/main" xmlns="" id="{9B947317-0C65-F1CE-C4B7-A039BDC63CD3}"/>
+              <a16:creationId xmlns:a16="http://schemas.microsoft.com/office/drawing/2014/main" id="{9B947317-0C65-F1CE-C4B7-A039BDC63CD3}"/>
             </a:ext>
           </a:extLst>
         </p:cNvPr>
@@ -1785,7 +1796,7 @@
           <p:cNvPr id="237" name="Google Shape;237;g13376c31365_0_0:notes">
             <a:extLst>
               <a:ext uri="{FF2B5EF4-FFF2-40B4-BE49-F238E27FC236}">
-                <a16:creationId xmlns:a16="http://schemas.microsoft.com/office/drawing/2014/main" xmlns="" id="{CC2D845C-D897-92B6-B335-711AA8FA3970}"/>
+                <a16:creationId xmlns:a16="http://schemas.microsoft.com/office/drawing/2014/main" id="{CC2D845C-D897-92B6-B335-711AA8FA3970}"/>
               </a:ext>
             </a:extLst>
           </p:cNvPr>
@@ -1832,7 +1843,7 @@
           <p:cNvPr id="238" name="Google Shape;238;g13376c31365_0_0:notes">
             <a:extLst>
               <a:ext uri="{FF2B5EF4-FFF2-40B4-BE49-F238E27FC236}">
-                <a16:creationId xmlns:a16="http://schemas.microsoft.com/office/drawing/2014/main" xmlns="" id="{3BDBE669-0836-4F29-9AF0-12C803E1BA1F}"/>
+                <a16:creationId xmlns:a16="http://schemas.microsoft.com/office/drawing/2014/main" id="{3BDBE669-0836-4F29-9AF0-12C803E1BA1F}"/>
               </a:ext>
             </a:extLst>
           </p:cNvPr>
@@ -1874,7 +1885,7 @@
     </p:spTree>
     <p:extLst>
       <p:ext uri="{BB962C8B-B14F-4D97-AF65-F5344CB8AC3E}">
-        <p14:creationId xmlns:p14="http://schemas.microsoft.com/office/powerpoint/2010/main" xmlns="" val="3740097853"/>
+        <p14:creationId xmlns:p14="http://schemas.microsoft.com/office/powerpoint/2010/main" val="3740097853"/>
       </p:ext>
     </p:extLst>
   </p:cSld>
@@ -23563,7 +23574,7 @@
         <p:cNvPr id="1" name="Shape 517">
           <a:extLst>
             <a:ext uri="{FF2B5EF4-FFF2-40B4-BE49-F238E27FC236}">
-              <a16:creationId xmlns:a16="http://schemas.microsoft.com/office/drawing/2014/main" xmlns="" id="{778372F4-0B97-B0C3-9CC7-BA08FECF818B}"/>
+              <a16:creationId xmlns:a16="http://schemas.microsoft.com/office/drawing/2014/main" id="{778372F4-0B97-B0C3-9CC7-BA08FECF818B}"/>
             </a:ext>
           </a:extLst>
         </p:cNvPr>
@@ -23583,7 +23594,7 @@
           <p:cNvPr id="526" name="Google Shape;526;p43">
             <a:extLst>
               <a:ext uri="{FF2B5EF4-FFF2-40B4-BE49-F238E27FC236}">
-                <a16:creationId xmlns:a16="http://schemas.microsoft.com/office/drawing/2014/main" xmlns="" id="{647CA77E-0097-CBCB-3AD2-0A83ADF23FEE}"/>
+                <a16:creationId xmlns:a16="http://schemas.microsoft.com/office/drawing/2014/main" id="{647CA77E-0097-CBCB-3AD2-0A83ADF23FEE}"/>
               </a:ext>
             </a:extLst>
           </p:cNvPr>
@@ -23631,7 +23642,7 @@
           <p:cNvPr id="528" name="Google Shape;528;p43">
             <a:extLst>
               <a:ext uri="{FF2B5EF4-FFF2-40B4-BE49-F238E27FC236}">
-                <a16:creationId xmlns:a16="http://schemas.microsoft.com/office/drawing/2014/main" xmlns="" id="{FC861F7C-EC24-6FC2-5A59-2684A9E8712D}"/>
+                <a16:creationId xmlns:a16="http://schemas.microsoft.com/office/drawing/2014/main" id="{FC861F7C-EC24-6FC2-5A59-2684A9E8712D}"/>
               </a:ext>
             </a:extLst>
           </p:cNvPr>
@@ -24015,7 +24026,7 @@
           <p:cNvPr id="16" name="TextBox 15">
             <a:extLst>
               <a:ext uri="{FF2B5EF4-FFF2-40B4-BE49-F238E27FC236}">
-                <a16:creationId xmlns:a16="http://schemas.microsoft.com/office/drawing/2014/main" xmlns="" id="{51863F01-16CB-02CE-8BEB-3442667A3145}"/>
+                <a16:creationId xmlns:a16="http://schemas.microsoft.com/office/drawing/2014/main" id="{51863F01-16CB-02CE-8BEB-3442667A3145}"/>
               </a:ext>
             </a:extLst>
           </p:cNvPr>
@@ -24075,7 +24086,7 @@
           <p:cNvPr id="4" name="Picture 3">
             <a:extLst>
               <a:ext uri="{FF2B5EF4-FFF2-40B4-BE49-F238E27FC236}">
-                <a16:creationId xmlns:a16="http://schemas.microsoft.com/office/drawing/2014/main" xmlns="" id="{02072A8A-A9F8-B282-99FC-4EBA9F1D82BC}"/>
+                <a16:creationId xmlns:a16="http://schemas.microsoft.com/office/drawing/2014/main" id="{02072A8A-A9F8-B282-99FC-4EBA9F1D82BC}"/>
               </a:ext>
             </a:extLst>
           </p:cNvPr>
@@ -24103,7 +24114,7 @@
     </p:spTree>
     <p:extLst>
       <p:ext uri="{BB962C8B-B14F-4D97-AF65-F5344CB8AC3E}">
-        <p14:creationId xmlns:p14="http://schemas.microsoft.com/office/powerpoint/2010/main" xmlns="" val="18947604"/>
+        <p14:creationId xmlns:p14="http://schemas.microsoft.com/office/powerpoint/2010/main" val="18947604"/>
       </p:ext>
     </p:extLst>
   </p:cSld>
@@ -24121,7 +24132,7 @@
         <p:cNvPr id="1" name="Shape 517">
           <a:extLst>
             <a:ext uri="{FF2B5EF4-FFF2-40B4-BE49-F238E27FC236}">
-              <a16:creationId xmlns:a16="http://schemas.microsoft.com/office/drawing/2014/main" xmlns="" id="{E079A550-886B-FF90-CDFD-6B9DEA7FE04E}"/>
+              <a16:creationId xmlns:a16="http://schemas.microsoft.com/office/drawing/2014/main" id="{E079A550-886B-FF90-CDFD-6B9DEA7FE04E}"/>
             </a:ext>
           </a:extLst>
         </p:cNvPr>
@@ -24141,7 +24152,7 @@
           <p:cNvPr id="526" name="Google Shape;526;p43">
             <a:extLst>
               <a:ext uri="{FF2B5EF4-FFF2-40B4-BE49-F238E27FC236}">
-                <a16:creationId xmlns:a16="http://schemas.microsoft.com/office/drawing/2014/main" xmlns="" id="{551FF704-C68A-E2A8-DD4F-2B02AF026395}"/>
+                <a16:creationId xmlns:a16="http://schemas.microsoft.com/office/drawing/2014/main" id="{551FF704-C68A-E2A8-DD4F-2B02AF026395}"/>
               </a:ext>
             </a:extLst>
           </p:cNvPr>
@@ -24189,7 +24200,7 @@
           <p:cNvPr id="528" name="Google Shape;528;p43">
             <a:extLst>
               <a:ext uri="{FF2B5EF4-FFF2-40B4-BE49-F238E27FC236}">
-                <a16:creationId xmlns:a16="http://schemas.microsoft.com/office/drawing/2014/main" xmlns="" id="{72303ABF-1A08-756E-EA2F-D45134FE4312}"/>
+                <a16:creationId xmlns:a16="http://schemas.microsoft.com/office/drawing/2014/main" id="{72303ABF-1A08-756E-EA2F-D45134FE4312}"/>
               </a:ext>
             </a:extLst>
           </p:cNvPr>
@@ -24573,7 +24584,7 @@
           <p:cNvPr id="16" name="TextBox 15">
             <a:extLst>
               <a:ext uri="{FF2B5EF4-FFF2-40B4-BE49-F238E27FC236}">
-                <a16:creationId xmlns:a16="http://schemas.microsoft.com/office/drawing/2014/main" xmlns="" id="{C72B92BC-6D18-9381-20DE-1B21E678781B}"/>
+                <a16:creationId xmlns:a16="http://schemas.microsoft.com/office/drawing/2014/main" id="{C72B92BC-6D18-9381-20DE-1B21E678781B}"/>
               </a:ext>
             </a:extLst>
           </p:cNvPr>
@@ -24700,7 +24711,7 @@
           <p:cNvPr id="2" name="Picture 1">
             <a:extLst>
               <a:ext uri="{FF2B5EF4-FFF2-40B4-BE49-F238E27FC236}">
-                <a16:creationId xmlns:a16="http://schemas.microsoft.com/office/drawing/2014/main" xmlns="" id="{F6B6C705-6E92-0BA2-EB25-33A194892989}"/>
+                <a16:creationId xmlns:a16="http://schemas.microsoft.com/office/drawing/2014/main" id="{F6B6C705-6E92-0BA2-EB25-33A194892989}"/>
               </a:ext>
             </a:extLst>
           </p:cNvPr>
@@ -24728,7 +24739,7 @@
     </p:spTree>
     <p:extLst>
       <p:ext uri="{BB962C8B-B14F-4D97-AF65-F5344CB8AC3E}">
-        <p14:creationId xmlns:p14="http://schemas.microsoft.com/office/powerpoint/2010/main" xmlns="" val="3948539492"/>
+        <p14:creationId xmlns:p14="http://schemas.microsoft.com/office/powerpoint/2010/main" val="3948539492"/>
       </p:ext>
     </p:extLst>
   </p:cSld>
@@ -24746,7 +24757,7 @@
         <p:cNvPr id="1" name="Shape 517">
           <a:extLst>
             <a:ext uri="{FF2B5EF4-FFF2-40B4-BE49-F238E27FC236}">
-              <a16:creationId xmlns:a16="http://schemas.microsoft.com/office/drawing/2014/main" xmlns="" id="{0BD08CFE-9B0B-44A4-9959-96F54FC15BFD}"/>
+              <a16:creationId xmlns:a16="http://schemas.microsoft.com/office/drawing/2014/main" id="{0BD08CFE-9B0B-44A4-9959-96F54FC15BFD}"/>
             </a:ext>
           </a:extLst>
         </p:cNvPr>
@@ -24766,7 +24777,7 @@
           <p:cNvPr id="526" name="Google Shape;526;p43">
             <a:extLst>
               <a:ext uri="{FF2B5EF4-FFF2-40B4-BE49-F238E27FC236}">
-                <a16:creationId xmlns:a16="http://schemas.microsoft.com/office/drawing/2014/main" xmlns="" id="{17089448-43EE-342A-DA36-6DCC1F95C327}"/>
+                <a16:creationId xmlns:a16="http://schemas.microsoft.com/office/drawing/2014/main" id="{17089448-43EE-342A-DA36-6DCC1F95C327}"/>
               </a:ext>
             </a:extLst>
           </p:cNvPr>
@@ -24814,7 +24825,7 @@
           <p:cNvPr id="528" name="Google Shape;528;p43">
             <a:extLst>
               <a:ext uri="{FF2B5EF4-FFF2-40B4-BE49-F238E27FC236}">
-                <a16:creationId xmlns:a16="http://schemas.microsoft.com/office/drawing/2014/main" xmlns="" id="{58295107-A601-C396-6BE6-88589BF17656}"/>
+                <a16:creationId xmlns:a16="http://schemas.microsoft.com/office/drawing/2014/main" id="{58295107-A601-C396-6BE6-88589BF17656}"/>
               </a:ext>
             </a:extLst>
           </p:cNvPr>
@@ -25221,7 +25232,7 @@
           <p:cNvPr id="16" name="TextBox 15">
             <a:extLst>
               <a:ext uri="{FF2B5EF4-FFF2-40B4-BE49-F238E27FC236}">
-                <a16:creationId xmlns:a16="http://schemas.microsoft.com/office/drawing/2014/main" xmlns="" id="{DB477804-3CFF-EBD3-9E6B-54AD2B9A5E17}"/>
+                <a16:creationId xmlns:a16="http://schemas.microsoft.com/office/drawing/2014/main" id="{DB477804-3CFF-EBD3-9E6B-54AD2B9A5E17}"/>
               </a:ext>
             </a:extLst>
           </p:cNvPr>
@@ -25289,7 +25300,7 @@
           <p:cNvPr id="4" name="Picture 3">
             <a:extLst>
               <a:ext uri="{FF2B5EF4-FFF2-40B4-BE49-F238E27FC236}">
-                <a16:creationId xmlns:a16="http://schemas.microsoft.com/office/drawing/2014/main" xmlns="" id="{766AAF87-89BD-D79C-BF5F-C57A0F3AF228}"/>
+                <a16:creationId xmlns:a16="http://schemas.microsoft.com/office/drawing/2014/main" id="{766AAF87-89BD-D79C-BF5F-C57A0F3AF228}"/>
               </a:ext>
             </a:extLst>
           </p:cNvPr>
@@ -25317,7 +25328,7 @@
     </p:spTree>
     <p:extLst>
       <p:ext uri="{BB962C8B-B14F-4D97-AF65-F5344CB8AC3E}">
-        <p14:creationId xmlns:p14="http://schemas.microsoft.com/office/powerpoint/2010/main" xmlns="" val="1060836345"/>
+        <p14:creationId xmlns:p14="http://schemas.microsoft.com/office/powerpoint/2010/main" val="1060836345"/>
       </p:ext>
     </p:extLst>
   </p:cSld>
@@ -25335,7 +25346,7 @@
         <p:cNvPr id="1" name="Shape 517">
           <a:extLst>
             <a:ext uri="{FF2B5EF4-FFF2-40B4-BE49-F238E27FC236}">
-              <a16:creationId xmlns:a16="http://schemas.microsoft.com/office/drawing/2014/main" xmlns="" id="{7EF2034D-2A05-F323-ED16-FE913AADCA4E}"/>
+              <a16:creationId xmlns:a16="http://schemas.microsoft.com/office/drawing/2014/main" id="{7EF2034D-2A05-F323-ED16-FE913AADCA4E}"/>
             </a:ext>
           </a:extLst>
         </p:cNvPr>
@@ -25355,7 +25366,7 @@
           <p:cNvPr id="526" name="Google Shape;526;p43">
             <a:extLst>
               <a:ext uri="{FF2B5EF4-FFF2-40B4-BE49-F238E27FC236}">
-                <a16:creationId xmlns:a16="http://schemas.microsoft.com/office/drawing/2014/main" xmlns="" id="{5C12EE7F-1B20-052E-C381-28C3354C64D2}"/>
+                <a16:creationId xmlns:a16="http://schemas.microsoft.com/office/drawing/2014/main" id="{5C12EE7F-1B20-052E-C381-28C3354C64D2}"/>
               </a:ext>
             </a:extLst>
           </p:cNvPr>
@@ -25403,7 +25414,7 @@
           <p:cNvPr id="528" name="Google Shape;528;p43">
             <a:extLst>
               <a:ext uri="{FF2B5EF4-FFF2-40B4-BE49-F238E27FC236}">
-                <a16:creationId xmlns:a16="http://schemas.microsoft.com/office/drawing/2014/main" xmlns="" id="{08C105C3-E3B6-BA33-72E1-CF1AF06FEDDF}"/>
+                <a16:creationId xmlns:a16="http://schemas.microsoft.com/office/drawing/2014/main" id="{08C105C3-E3B6-BA33-72E1-CF1AF06FEDDF}"/>
               </a:ext>
             </a:extLst>
           </p:cNvPr>
@@ -25810,7 +25821,7 @@
           <p:cNvPr id="16" name="TextBox 15">
             <a:extLst>
               <a:ext uri="{FF2B5EF4-FFF2-40B4-BE49-F238E27FC236}">
-                <a16:creationId xmlns:a16="http://schemas.microsoft.com/office/drawing/2014/main" xmlns="" id="{F6DEBC00-A1A2-F9FC-575F-3552873E2987}"/>
+                <a16:creationId xmlns:a16="http://schemas.microsoft.com/office/drawing/2014/main" id="{F6DEBC00-A1A2-F9FC-575F-3552873E2987}"/>
               </a:ext>
             </a:extLst>
           </p:cNvPr>
@@ -25852,58 +25863,94 @@
               <a:t>Shortcuts - </a:t>
             </a:r>
             <a:r>
-              <a:rPr lang="en-CA" dirty="0"/>
+              <a:rPr lang="en-CA" dirty="0">
+                <a:latin typeface="Yusei Magic" panose="020B0604020202020204" charset="-128"/>
+                <a:ea typeface="Yusei Magic" panose="020B0604020202020204" charset="-128"/>
+                <a:cs typeface="Yusei Magic" panose="020B0604020202020204" charset="-128"/>
+              </a:rPr>
               <a:t>press Menu button, shows a drop-down menu of all 3 menus:</a:t>
             </a:r>
           </a:p>
           <a:p>
             <a:r>
-              <a:rPr lang="en-CA" dirty="0"/>
+              <a:rPr lang="en-CA" dirty="0">
+                <a:latin typeface="Yusei Magic" panose="020B0604020202020204" charset="-128"/>
+                <a:ea typeface="Yusei Magic" panose="020B0604020202020204" charset="-128"/>
+                <a:cs typeface="Yusei Magic" panose="020B0604020202020204" charset="-128"/>
+              </a:rPr>
               <a:t> </a:t>
             </a:r>
           </a:p>
           <a:p>
             <a:pPr lvl="0"/>
             <a:r>
-              <a:rPr lang="en-CA" dirty="0"/>
+              <a:rPr lang="en-CA" dirty="0">
+                <a:latin typeface="Yusei Magic" panose="020B0604020202020204" charset="-128"/>
+                <a:ea typeface="Yusei Magic" panose="020B0604020202020204" charset="-128"/>
+                <a:cs typeface="Yusei Magic" panose="020B0604020202020204" charset="-128"/>
+              </a:rPr>
               <a:t>Hot Drinks</a:t>
             </a:r>
           </a:p>
           <a:p>
             <a:pPr lvl="0"/>
             <a:r>
-              <a:rPr lang="en-CA" dirty="0"/>
+              <a:rPr lang="en-CA" dirty="0">
+                <a:latin typeface="Yusei Magic" panose="020B0604020202020204" charset="-128"/>
+                <a:ea typeface="Yusei Magic" panose="020B0604020202020204" charset="-128"/>
+                <a:cs typeface="Yusei Magic" panose="020B0604020202020204" charset="-128"/>
+              </a:rPr>
               <a:t>Cold Drinks</a:t>
             </a:r>
           </a:p>
           <a:p>
             <a:pPr lvl="0"/>
             <a:r>
-              <a:rPr lang="en-CA" dirty="0"/>
+              <a:rPr lang="en-CA" dirty="0">
+                <a:latin typeface="Yusei Magic" panose="020B0604020202020204" charset="-128"/>
+                <a:ea typeface="Yusei Magic" panose="020B0604020202020204" charset="-128"/>
+                <a:cs typeface="Yusei Magic" panose="020B0604020202020204" charset="-128"/>
+              </a:rPr>
               <a:t>Pastries</a:t>
             </a:r>
           </a:p>
           <a:p>
             <a:r>
-              <a:rPr lang="en-CA" dirty="0"/>
+              <a:rPr lang="en-CA" dirty="0">
+                <a:latin typeface="Yusei Magic" panose="020B0604020202020204" charset="-128"/>
+                <a:ea typeface="Yusei Magic" panose="020B0604020202020204" charset="-128"/>
+                <a:cs typeface="Yusei Magic" panose="020B0604020202020204" charset="-128"/>
+              </a:rPr>
               <a:t> </a:t>
             </a:r>
           </a:p>
           <a:p>
             <a:r>
-              <a:rPr lang="en-CA" dirty="0"/>
+              <a:rPr lang="en-CA" dirty="0">
+                <a:latin typeface="Yusei Magic" panose="020B0604020202020204" charset="-128"/>
+                <a:ea typeface="Yusei Magic" panose="020B0604020202020204" charset="-128"/>
+                <a:cs typeface="Yusei Magic" panose="020B0604020202020204" charset="-128"/>
+              </a:rPr>
               <a:t>Easier and quicker to change between all 3 menus instead of having to close and reopen the program all over again.</a:t>
             </a:r>
           </a:p>
           <a:p>
             <a:r>
-              <a:rPr lang="en-CA" dirty="0"/>
+              <a:rPr lang="en-CA" dirty="0">
+                <a:latin typeface="Yusei Magic" panose="020B0604020202020204" charset="-128"/>
+                <a:ea typeface="Yusei Magic" panose="020B0604020202020204" charset="-128"/>
+                <a:cs typeface="Yusei Magic" panose="020B0604020202020204" charset="-128"/>
+              </a:rPr>
               <a:t> </a:t>
             </a:r>
           </a:p>
           <a:p>
             <a:r>
-              <a:rPr lang="en-CA" dirty="0"/>
+              <a:rPr lang="en-CA" dirty="0">
+                <a:latin typeface="Yusei Magic" panose="020B0604020202020204" charset="-128"/>
+                <a:ea typeface="Yusei Magic" panose="020B0604020202020204" charset="-128"/>
+                <a:cs typeface="Yusei Magic" panose="020B0604020202020204" charset="-128"/>
+              </a:rPr>
               <a:t>Once you have added an item to cart, the Cart and Checkout button will change from light grey(unclickable) to black(clickable)</a:t>
             </a:r>
             <a:endParaRPr kumimoji="0" lang="en-CA" sz="1400" b="0" i="0" u="none" strike="noStrike" kern="0" cap="none" spc="0" normalizeH="0" baseline="0" noProof="0" dirty="0">
@@ -25929,7 +25976,7 @@
           <p:cNvPr id="2" name="Picture 1">
             <a:extLst>
               <a:ext uri="{FF2B5EF4-FFF2-40B4-BE49-F238E27FC236}">
-                <a16:creationId xmlns:a16="http://schemas.microsoft.com/office/drawing/2014/main" xmlns="" id="{36AF0D59-0BA5-23ED-F473-3627493F5C87}"/>
+                <a16:creationId xmlns:a16="http://schemas.microsoft.com/office/drawing/2014/main" id="{36AF0D59-0BA5-23ED-F473-3627493F5C87}"/>
               </a:ext>
             </a:extLst>
           </p:cNvPr>
@@ -25957,7 +26004,7 @@
     </p:spTree>
     <p:extLst>
       <p:ext uri="{BB962C8B-B14F-4D97-AF65-F5344CB8AC3E}">
-        <p14:creationId xmlns:p14="http://schemas.microsoft.com/office/powerpoint/2010/main" xmlns="" val="3691897577"/>
+        <p14:creationId xmlns:p14="http://schemas.microsoft.com/office/powerpoint/2010/main" val="3691897577"/>
       </p:ext>
     </p:extLst>
   </p:cSld>
@@ -25975,7 +26022,7 @@
         <p:cNvPr id="1" name="Shape 517">
           <a:extLst>
             <a:ext uri="{FF2B5EF4-FFF2-40B4-BE49-F238E27FC236}">
-              <a16:creationId xmlns:a16="http://schemas.microsoft.com/office/drawing/2014/main" xmlns="" id="{2AA71854-4773-2E65-A776-4404ADE641DD}"/>
+              <a16:creationId xmlns:a16="http://schemas.microsoft.com/office/drawing/2014/main" id="{2AA71854-4773-2E65-A776-4404ADE641DD}"/>
             </a:ext>
           </a:extLst>
         </p:cNvPr>
@@ -25995,7 +26042,7 @@
           <p:cNvPr id="526" name="Google Shape;526;p43">
             <a:extLst>
               <a:ext uri="{FF2B5EF4-FFF2-40B4-BE49-F238E27FC236}">
-                <a16:creationId xmlns:a16="http://schemas.microsoft.com/office/drawing/2014/main" xmlns="" id="{2C35BC9E-1C55-A673-BF3C-F7CB1A01CD18}"/>
+                <a16:creationId xmlns:a16="http://schemas.microsoft.com/office/drawing/2014/main" id="{2C35BC9E-1C55-A673-BF3C-F7CB1A01CD18}"/>
               </a:ext>
             </a:extLst>
           </p:cNvPr>
@@ -26043,7 +26090,7 @@
           <p:cNvPr id="528" name="Google Shape;528;p43">
             <a:extLst>
               <a:ext uri="{FF2B5EF4-FFF2-40B4-BE49-F238E27FC236}">
-                <a16:creationId xmlns:a16="http://schemas.microsoft.com/office/drawing/2014/main" xmlns="" id="{3FF86ECE-DD00-7FE6-5A6A-2B7E1A654293}"/>
+                <a16:creationId xmlns:a16="http://schemas.microsoft.com/office/drawing/2014/main" id="{3FF86ECE-DD00-7FE6-5A6A-2B7E1A654293}"/>
               </a:ext>
             </a:extLst>
           </p:cNvPr>
@@ -26450,7 +26497,7 @@
           <p:cNvPr id="16" name="TextBox 15">
             <a:extLst>
               <a:ext uri="{FF2B5EF4-FFF2-40B4-BE49-F238E27FC236}">
-                <a16:creationId xmlns:a16="http://schemas.microsoft.com/office/drawing/2014/main" xmlns="" id="{56AFB24F-2DC4-8CEE-9C6C-62375E429607}"/>
+                <a16:creationId xmlns:a16="http://schemas.microsoft.com/office/drawing/2014/main" id="{56AFB24F-2DC4-8CEE-9C6C-62375E429607}"/>
               </a:ext>
             </a:extLst>
           </p:cNvPr>
@@ -26543,7 +26590,7 @@
           <p:cNvPr id="3" name="Picture 2">
             <a:extLst>
               <a:ext uri="{FF2B5EF4-FFF2-40B4-BE49-F238E27FC236}">
-                <a16:creationId xmlns:a16="http://schemas.microsoft.com/office/drawing/2014/main" xmlns="" id="{1EE81E81-44AC-0BDE-7205-044AA3B5D724}"/>
+                <a16:creationId xmlns:a16="http://schemas.microsoft.com/office/drawing/2014/main" id="{1EE81E81-44AC-0BDE-7205-044AA3B5D724}"/>
               </a:ext>
             </a:extLst>
           </p:cNvPr>
@@ -26571,7 +26618,7 @@
     </p:spTree>
     <p:extLst>
       <p:ext uri="{BB962C8B-B14F-4D97-AF65-F5344CB8AC3E}">
-        <p14:creationId xmlns:p14="http://schemas.microsoft.com/office/powerpoint/2010/main" xmlns="" val="3601285605"/>
+        <p14:creationId xmlns:p14="http://schemas.microsoft.com/office/powerpoint/2010/main" val="3601285605"/>
       </p:ext>
     </p:extLst>
   </p:cSld>
@@ -26589,7 +26636,7 @@
         <p:cNvPr id="1" name="Shape 517">
           <a:extLst>
             <a:ext uri="{FF2B5EF4-FFF2-40B4-BE49-F238E27FC236}">
-              <a16:creationId xmlns:a16="http://schemas.microsoft.com/office/drawing/2014/main" xmlns="" id="{7EADA809-8186-E062-BBDA-3B223583EAD9}"/>
+              <a16:creationId xmlns:a16="http://schemas.microsoft.com/office/drawing/2014/main" id="{7EADA809-8186-E062-BBDA-3B223583EAD9}"/>
             </a:ext>
           </a:extLst>
         </p:cNvPr>
@@ -26609,7 +26656,7 @@
           <p:cNvPr id="526" name="Google Shape;526;p43">
             <a:extLst>
               <a:ext uri="{FF2B5EF4-FFF2-40B4-BE49-F238E27FC236}">
-                <a16:creationId xmlns:a16="http://schemas.microsoft.com/office/drawing/2014/main" xmlns="" id="{5C48613D-3B0F-3D97-C005-F237806320B6}"/>
+                <a16:creationId xmlns:a16="http://schemas.microsoft.com/office/drawing/2014/main" id="{5C48613D-3B0F-3D97-C005-F237806320B6}"/>
               </a:ext>
             </a:extLst>
           </p:cNvPr>
@@ -26657,7 +26704,7 @@
           <p:cNvPr id="528" name="Google Shape;528;p43">
             <a:extLst>
               <a:ext uri="{FF2B5EF4-FFF2-40B4-BE49-F238E27FC236}">
-                <a16:creationId xmlns:a16="http://schemas.microsoft.com/office/drawing/2014/main" xmlns="" id="{16A39515-7E8B-F830-C0C4-538BC5CEC977}"/>
+                <a16:creationId xmlns:a16="http://schemas.microsoft.com/office/drawing/2014/main" id="{16A39515-7E8B-F830-C0C4-538BC5CEC977}"/>
               </a:ext>
             </a:extLst>
           </p:cNvPr>
@@ -27064,7 +27111,7 @@
           <p:cNvPr id="16" name="TextBox 15">
             <a:extLst>
               <a:ext uri="{FF2B5EF4-FFF2-40B4-BE49-F238E27FC236}">
-                <a16:creationId xmlns:a16="http://schemas.microsoft.com/office/drawing/2014/main" xmlns="" id="{F58DE669-8976-F547-4900-A9EAAA61C37F}"/>
+                <a16:creationId xmlns:a16="http://schemas.microsoft.com/office/drawing/2014/main" id="{F58DE669-8976-F547-4900-A9EAAA61C37F}"/>
               </a:ext>
             </a:extLst>
           </p:cNvPr>
@@ -27229,7 +27276,7 @@
     </p:spTree>
     <p:extLst>
       <p:ext uri="{BB962C8B-B14F-4D97-AF65-F5344CB8AC3E}">
-        <p14:creationId xmlns:p14="http://schemas.microsoft.com/office/powerpoint/2010/main" xmlns="" val="1303504811"/>
+        <p14:creationId xmlns:p14="http://schemas.microsoft.com/office/powerpoint/2010/main" val="1303504811"/>
       </p:ext>
     </p:extLst>
   </p:cSld>
@@ -27247,7 +27294,7 @@
         <p:cNvPr id="1" name="Shape 344">
           <a:extLst>
             <a:ext uri="{FF2B5EF4-FFF2-40B4-BE49-F238E27FC236}">
-              <a16:creationId xmlns:a16="http://schemas.microsoft.com/office/drawing/2014/main" xmlns="" id="{8CEDEE0A-D760-12C4-61CC-C0D667161E03}"/>
+              <a16:creationId xmlns:a16="http://schemas.microsoft.com/office/drawing/2014/main" id="{8CEDEE0A-D760-12C4-61CC-C0D667161E03}"/>
             </a:ext>
           </a:extLst>
         </p:cNvPr>
@@ -27267,7 +27314,7 @@
           <p:cNvPr id="345" name="Google Shape;345;p36">
             <a:extLst>
               <a:ext uri="{FF2B5EF4-FFF2-40B4-BE49-F238E27FC236}">
-                <a16:creationId xmlns:a16="http://schemas.microsoft.com/office/drawing/2014/main" xmlns="" id="{BD13D5CC-77BF-6E65-A2D2-76969B90A0F6}"/>
+                <a16:creationId xmlns:a16="http://schemas.microsoft.com/office/drawing/2014/main" id="{BD13D5CC-77BF-6E65-A2D2-76969B90A0F6}"/>
               </a:ext>
             </a:extLst>
           </p:cNvPr>
@@ -27315,7 +27362,7 @@
           <p:cNvPr id="347" name="Google Shape;347;p36">
             <a:extLst>
               <a:ext uri="{FF2B5EF4-FFF2-40B4-BE49-F238E27FC236}">
-                <a16:creationId xmlns:a16="http://schemas.microsoft.com/office/drawing/2014/main" xmlns="" id="{75CCAC5B-979E-34F9-5037-F7EA000FE375}"/>
+                <a16:creationId xmlns:a16="http://schemas.microsoft.com/office/drawing/2014/main" id="{75CCAC5B-979E-34F9-5037-F7EA000FE375}"/>
               </a:ext>
             </a:extLst>
           </p:cNvPr>
@@ -27699,7 +27746,7 @@
           <p:cNvPr id="348" name="Google Shape;348;p36">
             <a:extLst>
               <a:ext uri="{FF2B5EF4-FFF2-40B4-BE49-F238E27FC236}">
-                <a16:creationId xmlns:a16="http://schemas.microsoft.com/office/drawing/2014/main" xmlns="" id="{4E05CB1A-5860-FCCB-798C-42A3C38AF92D}"/>
+                <a16:creationId xmlns:a16="http://schemas.microsoft.com/office/drawing/2014/main" id="{4E05CB1A-5860-FCCB-798C-42A3C38AF92D}"/>
               </a:ext>
             </a:extLst>
           </p:cNvPr>
@@ -27889,7 +27936,7 @@
           <p:cNvPr id="349" name="Google Shape;349;p36">
             <a:extLst>
               <a:ext uri="{FF2B5EF4-FFF2-40B4-BE49-F238E27FC236}">
-                <a16:creationId xmlns:a16="http://schemas.microsoft.com/office/drawing/2014/main" xmlns="" id="{6EA424CB-9632-D2B5-C7BC-48BBBE27F593}"/>
+                <a16:creationId xmlns:a16="http://schemas.microsoft.com/office/drawing/2014/main" id="{6EA424CB-9632-D2B5-C7BC-48BBBE27F593}"/>
               </a:ext>
             </a:extLst>
           </p:cNvPr>
@@ -27909,7 +27956,7 @@
             <p:cNvPr id="350" name="Google Shape;350;p36">
               <a:extLst>
                 <a:ext uri="{FF2B5EF4-FFF2-40B4-BE49-F238E27FC236}">
-                  <a16:creationId xmlns:a16="http://schemas.microsoft.com/office/drawing/2014/main" xmlns="" id="{8BCE8F58-782F-3D4C-E18F-D2CEE3DA9E11}"/>
+                  <a16:creationId xmlns:a16="http://schemas.microsoft.com/office/drawing/2014/main" id="{8BCE8F58-782F-3D4C-E18F-D2CEE3DA9E11}"/>
                 </a:ext>
               </a:extLst>
             </p:cNvPr>
@@ -28057,7 +28104,7 @@
             <p:cNvPr id="351" name="Google Shape;351;p36">
               <a:extLst>
                 <a:ext uri="{FF2B5EF4-FFF2-40B4-BE49-F238E27FC236}">
-                  <a16:creationId xmlns:a16="http://schemas.microsoft.com/office/drawing/2014/main" xmlns="" id="{ACE09898-8959-6531-8ADA-6CD090BC55B3}"/>
+                  <a16:creationId xmlns:a16="http://schemas.microsoft.com/office/drawing/2014/main" id="{ACE09898-8959-6531-8ADA-6CD090BC55B3}"/>
                 </a:ext>
               </a:extLst>
             </p:cNvPr>
@@ -28219,7 +28266,7 @@
           <p:cNvPr id="352" name="Google Shape;352;p36">
             <a:extLst>
               <a:ext uri="{FF2B5EF4-FFF2-40B4-BE49-F238E27FC236}">
-                <a16:creationId xmlns:a16="http://schemas.microsoft.com/office/drawing/2014/main" xmlns="" id="{C15BE8D2-8674-4D0D-5813-0E70674DA539}"/>
+                <a16:creationId xmlns:a16="http://schemas.microsoft.com/office/drawing/2014/main" id="{C15BE8D2-8674-4D0D-5813-0E70674DA539}"/>
               </a:ext>
             </a:extLst>
           </p:cNvPr>
@@ -28239,7 +28286,7 @@
             <p:cNvPr id="353" name="Google Shape;353;p36">
               <a:extLst>
                 <a:ext uri="{FF2B5EF4-FFF2-40B4-BE49-F238E27FC236}">
-                  <a16:creationId xmlns:a16="http://schemas.microsoft.com/office/drawing/2014/main" xmlns="" id="{1ED29610-87D2-0F33-EED3-8C328B8DC197}"/>
+                  <a16:creationId xmlns:a16="http://schemas.microsoft.com/office/drawing/2014/main" id="{1ED29610-87D2-0F33-EED3-8C328B8DC197}"/>
                 </a:ext>
               </a:extLst>
             </p:cNvPr>
@@ -28447,7 +28494,7 @@
             <p:cNvPr id="354" name="Google Shape;354;p36">
               <a:extLst>
                 <a:ext uri="{FF2B5EF4-FFF2-40B4-BE49-F238E27FC236}">
-                  <a16:creationId xmlns:a16="http://schemas.microsoft.com/office/drawing/2014/main" xmlns="" id="{1E0F7D2C-4E5D-64C0-656D-52B5BC8BCD92}"/>
+                  <a16:creationId xmlns:a16="http://schemas.microsoft.com/office/drawing/2014/main" id="{1E0F7D2C-4E5D-64C0-656D-52B5BC8BCD92}"/>
                 </a:ext>
               </a:extLst>
             </p:cNvPr>
@@ -28647,7 +28694,7 @@
           <p:cNvPr id="355" name="Google Shape;355;p36">
             <a:extLst>
               <a:ext uri="{FF2B5EF4-FFF2-40B4-BE49-F238E27FC236}">
-                <a16:creationId xmlns:a16="http://schemas.microsoft.com/office/drawing/2014/main" xmlns="" id="{7BD62752-F70E-2690-E471-60632730E862}"/>
+                <a16:creationId xmlns:a16="http://schemas.microsoft.com/office/drawing/2014/main" id="{7BD62752-F70E-2690-E471-60632730E862}"/>
               </a:ext>
             </a:extLst>
           </p:cNvPr>
@@ -28796,7 +28843,7 @@
           <p:cNvPr id="356" name="Google Shape;356;p36">
             <a:extLst>
               <a:ext uri="{FF2B5EF4-FFF2-40B4-BE49-F238E27FC236}">
-                <a16:creationId xmlns:a16="http://schemas.microsoft.com/office/drawing/2014/main" xmlns="" id="{3E388EAC-9E67-19C6-108F-5CEAF0A80437}"/>
+                <a16:creationId xmlns:a16="http://schemas.microsoft.com/office/drawing/2014/main" id="{3E388EAC-9E67-19C6-108F-5CEAF0A80437}"/>
               </a:ext>
             </a:extLst>
           </p:cNvPr>
@@ -29194,7 +29241,7 @@
           <p:cNvPr id="357" name="Google Shape;357;p36">
             <a:extLst>
               <a:ext uri="{FF2B5EF4-FFF2-40B4-BE49-F238E27FC236}">
-                <a16:creationId xmlns:a16="http://schemas.microsoft.com/office/drawing/2014/main" xmlns="" id="{D8F6A307-1044-7DA4-ADBF-E7E89D8B9A86}"/>
+                <a16:creationId xmlns:a16="http://schemas.microsoft.com/office/drawing/2014/main" id="{D8F6A307-1044-7DA4-ADBF-E7E89D8B9A86}"/>
               </a:ext>
             </a:extLst>
           </p:cNvPr>
@@ -29214,7 +29261,7 @@
             <p:cNvPr id="358" name="Google Shape;358;p36">
               <a:extLst>
                 <a:ext uri="{FF2B5EF4-FFF2-40B4-BE49-F238E27FC236}">
-                  <a16:creationId xmlns:a16="http://schemas.microsoft.com/office/drawing/2014/main" xmlns="" id="{109F9A28-87E9-A9EE-3D71-86B3C0133943}"/>
+                  <a16:creationId xmlns:a16="http://schemas.microsoft.com/office/drawing/2014/main" id="{109F9A28-87E9-A9EE-3D71-86B3C0133943}"/>
                 </a:ext>
               </a:extLst>
             </p:cNvPr>
@@ -29422,7 +29469,7 @@
             <p:cNvPr id="359" name="Google Shape;359;p36">
               <a:extLst>
                 <a:ext uri="{FF2B5EF4-FFF2-40B4-BE49-F238E27FC236}">
-                  <a16:creationId xmlns:a16="http://schemas.microsoft.com/office/drawing/2014/main" xmlns="" id="{53E142AC-80B7-A59D-65CE-5A923A607F56}"/>
+                  <a16:creationId xmlns:a16="http://schemas.microsoft.com/office/drawing/2014/main" id="{53E142AC-80B7-A59D-65CE-5A923A607F56}"/>
                 </a:ext>
               </a:extLst>
             </p:cNvPr>
@@ -29622,7 +29669,7 @@
           <p:cNvPr id="360" name="Google Shape;360;p36">
             <a:extLst>
               <a:ext uri="{FF2B5EF4-FFF2-40B4-BE49-F238E27FC236}">
-                <a16:creationId xmlns:a16="http://schemas.microsoft.com/office/drawing/2014/main" xmlns="" id="{FE20AAD1-9936-BADB-1A5E-2CD7D25B2499}"/>
+                <a16:creationId xmlns:a16="http://schemas.microsoft.com/office/drawing/2014/main" id="{FE20AAD1-9936-BADB-1A5E-2CD7D25B2499}"/>
               </a:ext>
             </a:extLst>
           </p:cNvPr>
@@ -30006,7 +30053,7 @@
           <p:cNvPr id="8" name="TextBox 7">
             <a:extLst>
               <a:ext uri="{FF2B5EF4-FFF2-40B4-BE49-F238E27FC236}">
-                <a16:creationId xmlns:a16="http://schemas.microsoft.com/office/drawing/2014/main" xmlns="" id="{DF7D2CD3-4348-F620-3CB8-B705A722EC64}"/>
+                <a16:creationId xmlns:a16="http://schemas.microsoft.com/office/drawing/2014/main" id="{DF7D2CD3-4348-F620-3CB8-B705A722EC64}"/>
               </a:ext>
             </a:extLst>
           </p:cNvPr>
@@ -30039,7 +30086,7 @@
                 <a:ea typeface="Yusei Magic" panose="020B0604020202020204" charset="-128"/>
                 <a:cs typeface="Yusei Magic" panose="020B0604020202020204" charset="-128"/>
               </a:rPr>
-              <a:t>Demonstartion</a:t>
+              <a:t>Demonstration</a:t>
             </a:r>
             <a:endParaRPr lang="en-CA" sz="5000" dirty="0">
               <a:latin typeface="Yusei Magic" panose="020B0604020202020204" charset="-128"/>
@@ -30052,7 +30099,7 @@
     </p:spTree>
     <p:extLst>
       <p:ext uri="{BB962C8B-B14F-4D97-AF65-F5344CB8AC3E}">
-        <p14:creationId xmlns:p14="http://schemas.microsoft.com/office/powerpoint/2010/main" xmlns="" val="3546235126"/>
+        <p14:creationId xmlns:p14="http://schemas.microsoft.com/office/powerpoint/2010/main" val="3546235126"/>
       </p:ext>
     </p:extLst>
   </p:cSld>
@@ -30070,7 +30117,7 @@
         <p:cNvPr id="1" name="Shape 239">
           <a:extLst>
             <a:ext uri="{FF2B5EF4-FFF2-40B4-BE49-F238E27FC236}">
-              <a16:creationId xmlns:a16="http://schemas.microsoft.com/office/drawing/2014/main" xmlns="" id="{0FDDC864-942A-0FB0-2912-ED11E13DCE51}"/>
+              <a16:creationId xmlns:a16="http://schemas.microsoft.com/office/drawing/2014/main" id="{0FDDC864-942A-0FB0-2912-ED11E13DCE51}"/>
             </a:ext>
           </a:extLst>
         </p:cNvPr>
@@ -30090,7 +30137,7 @@
           <p:cNvPr id="240" name="Google Shape;240;p30">
             <a:extLst>
               <a:ext uri="{FF2B5EF4-FFF2-40B4-BE49-F238E27FC236}">
-                <a16:creationId xmlns:a16="http://schemas.microsoft.com/office/drawing/2014/main" xmlns="" id="{43B2734E-91A5-059B-A1AD-C2371FC97756}"/>
+                <a16:creationId xmlns:a16="http://schemas.microsoft.com/office/drawing/2014/main" id="{43B2734E-91A5-059B-A1AD-C2371FC97756}"/>
               </a:ext>
             </a:extLst>
           </p:cNvPr>
@@ -30142,7 +30189,7 @@
           <p:cNvPr id="242" name="Google Shape;242;p30">
             <a:extLst>
               <a:ext uri="{FF2B5EF4-FFF2-40B4-BE49-F238E27FC236}">
-                <a16:creationId xmlns:a16="http://schemas.microsoft.com/office/drawing/2014/main" xmlns="" id="{2D5F6068-66E1-F55A-C0B8-380D8CE0040C}"/>
+                <a16:creationId xmlns:a16="http://schemas.microsoft.com/office/drawing/2014/main" id="{2D5F6068-66E1-F55A-C0B8-380D8CE0040C}"/>
               </a:ext>
             </a:extLst>
           </p:cNvPr>
@@ -30526,7 +30573,7 @@
           <p:cNvPr id="243" name="Google Shape;243;p30">
             <a:extLst>
               <a:ext uri="{FF2B5EF4-FFF2-40B4-BE49-F238E27FC236}">
-                <a16:creationId xmlns:a16="http://schemas.microsoft.com/office/drawing/2014/main" xmlns="" id="{D0D82E7A-13F0-05A5-BD9B-A311A44BEA76}"/>
+                <a16:creationId xmlns:a16="http://schemas.microsoft.com/office/drawing/2014/main" id="{D0D82E7A-13F0-05A5-BD9B-A311A44BEA76}"/>
               </a:ext>
             </a:extLst>
           </p:cNvPr>
@@ -30716,7 +30763,7 @@
           <p:cNvPr id="244" name="Google Shape;244;p30">
             <a:extLst>
               <a:ext uri="{FF2B5EF4-FFF2-40B4-BE49-F238E27FC236}">
-                <a16:creationId xmlns:a16="http://schemas.microsoft.com/office/drawing/2014/main" xmlns="" id="{6D2B884A-569E-790F-21FC-D3A546F8B70D}"/>
+                <a16:creationId xmlns:a16="http://schemas.microsoft.com/office/drawing/2014/main" id="{6D2B884A-569E-790F-21FC-D3A546F8B70D}"/>
               </a:ext>
             </a:extLst>
           </p:cNvPr>
@@ -30736,7 +30783,7 @@
             <p:cNvPr id="245" name="Google Shape;245;p30">
               <a:extLst>
                 <a:ext uri="{FF2B5EF4-FFF2-40B4-BE49-F238E27FC236}">
-                  <a16:creationId xmlns:a16="http://schemas.microsoft.com/office/drawing/2014/main" xmlns="" id="{1DC610B5-234E-FFB3-ECB7-10F12F102407}"/>
+                  <a16:creationId xmlns:a16="http://schemas.microsoft.com/office/drawing/2014/main" id="{1DC610B5-234E-FFB3-ECB7-10F12F102407}"/>
                 </a:ext>
               </a:extLst>
             </p:cNvPr>
@@ -30884,7 +30931,7 @@
             <p:cNvPr id="246" name="Google Shape;246;p30">
               <a:extLst>
                 <a:ext uri="{FF2B5EF4-FFF2-40B4-BE49-F238E27FC236}">
-                  <a16:creationId xmlns:a16="http://schemas.microsoft.com/office/drawing/2014/main" xmlns="" id="{C95814CF-5DCB-1833-4403-A51BF1694660}"/>
+                  <a16:creationId xmlns:a16="http://schemas.microsoft.com/office/drawing/2014/main" id="{C95814CF-5DCB-1833-4403-A51BF1694660}"/>
                 </a:ext>
               </a:extLst>
             </p:cNvPr>
@@ -31046,7 +31093,7 @@
           <p:cNvPr id="247" name="Google Shape;247;p30">
             <a:extLst>
               <a:ext uri="{FF2B5EF4-FFF2-40B4-BE49-F238E27FC236}">
-                <a16:creationId xmlns:a16="http://schemas.microsoft.com/office/drawing/2014/main" xmlns="" id="{EE3FABC0-43C4-1C96-A8C9-053D609DCFB2}"/>
+                <a16:creationId xmlns:a16="http://schemas.microsoft.com/office/drawing/2014/main" id="{EE3FABC0-43C4-1C96-A8C9-053D609DCFB2}"/>
               </a:ext>
             </a:extLst>
           </p:cNvPr>
@@ -31066,7 +31113,7 @@
             <p:cNvPr id="248" name="Google Shape;248;p30">
               <a:extLst>
                 <a:ext uri="{FF2B5EF4-FFF2-40B4-BE49-F238E27FC236}">
-                  <a16:creationId xmlns:a16="http://schemas.microsoft.com/office/drawing/2014/main" xmlns="" id="{836F3A37-AC63-A3A4-13CE-8C03281CB50C}"/>
+                  <a16:creationId xmlns:a16="http://schemas.microsoft.com/office/drawing/2014/main" id="{836F3A37-AC63-A3A4-13CE-8C03281CB50C}"/>
                 </a:ext>
               </a:extLst>
             </p:cNvPr>
@@ -31274,7 +31321,7 @@
             <p:cNvPr id="249" name="Google Shape;249;p30">
               <a:extLst>
                 <a:ext uri="{FF2B5EF4-FFF2-40B4-BE49-F238E27FC236}">
-                  <a16:creationId xmlns:a16="http://schemas.microsoft.com/office/drawing/2014/main" xmlns="" id="{8BB63651-2785-BD13-9C50-14C5740F532E}"/>
+                  <a16:creationId xmlns:a16="http://schemas.microsoft.com/office/drawing/2014/main" id="{8BB63651-2785-BD13-9C50-14C5740F532E}"/>
                 </a:ext>
               </a:extLst>
             </p:cNvPr>
@@ -31474,7 +31521,7 @@
           <p:cNvPr id="250" name="Google Shape;250;p30">
             <a:extLst>
               <a:ext uri="{FF2B5EF4-FFF2-40B4-BE49-F238E27FC236}">
-                <a16:creationId xmlns:a16="http://schemas.microsoft.com/office/drawing/2014/main" xmlns="" id="{A3CAAB73-561D-BE53-9716-CADC160D1F8E}"/>
+                <a16:creationId xmlns:a16="http://schemas.microsoft.com/office/drawing/2014/main" id="{A3CAAB73-561D-BE53-9716-CADC160D1F8E}"/>
               </a:ext>
             </a:extLst>
           </p:cNvPr>
@@ -31623,7 +31670,7 @@
           <p:cNvPr id="251" name="Google Shape;251;p30">
             <a:extLst>
               <a:ext uri="{FF2B5EF4-FFF2-40B4-BE49-F238E27FC236}">
-                <a16:creationId xmlns:a16="http://schemas.microsoft.com/office/drawing/2014/main" xmlns="" id="{53BAB5C5-3D67-F3D2-551C-15269A6D8469}"/>
+                <a16:creationId xmlns:a16="http://schemas.microsoft.com/office/drawing/2014/main" id="{53BAB5C5-3D67-F3D2-551C-15269A6D8469}"/>
               </a:ext>
             </a:extLst>
           </p:cNvPr>
@@ -32021,7 +32068,7 @@
           <p:cNvPr id="252" name="Google Shape;252;p30">
             <a:extLst>
               <a:ext uri="{FF2B5EF4-FFF2-40B4-BE49-F238E27FC236}">
-                <a16:creationId xmlns:a16="http://schemas.microsoft.com/office/drawing/2014/main" xmlns="" id="{27E7F11A-2A03-F7DD-1E42-32BBF8CB1519}"/>
+                <a16:creationId xmlns:a16="http://schemas.microsoft.com/office/drawing/2014/main" id="{27E7F11A-2A03-F7DD-1E42-32BBF8CB1519}"/>
               </a:ext>
             </a:extLst>
           </p:cNvPr>
@@ -32041,7 +32088,7 @@
             <p:cNvPr id="253" name="Google Shape;253;p30">
               <a:extLst>
                 <a:ext uri="{FF2B5EF4-FFF2-40B4-BE49-F238E27FC236}">
-                  <a16:creationId xmlns:a16="http://schemas.microsoft.com/office/drawing/2014/main" xmlns="" id="{73E20D35-0CC2-619A-B598-3AA581861E70}"/>
+                  <a16:creationId xmlns:a16="http://schemas.microsoft.com/office/drawing/2014/main" id="{73E20D35-0CC2-619A-B598-3AA581861E70}"/>
                 </a:ext>
               </a:extLst>
             </p:cNvPr>
@@ -32249,7 +32296,7 @@
             <p:cNvPr id="254" name="Google Shape;254;p30">
               <a:extLst>
                 <a:ext uri="{FF2B5EF4-FFF2-40B4-BE49-F238E27FC236}">
-                  <a16:creationId xmlns:a16="http://schemas.microsoft.com/office/drawing/2014/main" xmlns="" id="{B1ABA285-0994-AA01-DCA1-E03C2DD2EFB2}"/>
+                  <a16:creationId xmlns:a16="http://schemas.microsoft.com/office/drawing/2014/main" id="{B1ABA285-0994-AA01-DCA1-E03C2DD2EFB2}"/>
                 </a:ext>
               </a:extLst>
             </p:cNvPr>
@@ -32449,7 +32496,7 @@
           <p:cNvPr id="255" name="Google Shape;255;p30">
             <a:extLst>
               <a:ext uri="{FF2B5EF4-FFF2-40B4-BE49-F238E27FC236}">
-                <a16:creationId xmlns:a16="http://schemas.microsoft.com/office/drawing/2014/main" xmlns="" id="{5891AE76-D81F-0B6F-F585-8D3698842FC6}"/>
+                <a16:creationId xmlns:a16="http://schemas.microsoft.com/office/drawing/2014/main" id="{5891AE76-D81F-0B6F-F585-8D3698842FC6}"/>
               </a:ext>
             </a:extLst>
           </p:cNvPr>
@@ -32932,7 +32979,7 @@
           <p:cNvPr id="256" name="Google Shape;256;p30">
             <a:extLst>
               <a:ext uri="{FF2B5EF4-FFF2-40B4-BE49-F238E27FC236}">
-                <a16:creationId xmlns:a16="http://schemas.microsoft.com/office/drawing/2014/main" xmlns="" id="{FF32A08F-EDD9-9F60-5A35-CBE5C14E5B8D}"/>
+                <a16:creationId xmlns:a16="http://schemas.microsoft.com/office/drawing/2014/main" id="{FF32A08F-EDD9-9F60-5A35-CBE5C14E5B8D}"/>
               </a:ext>
             </a:extLst>
           </p:cNvPr>
@@ -33314,7 +33361,7 @@
     </p:spTree>
     <p:extLst>
       <p:ext uri="{BB962C8B-B14F-4D97-AF65-F5344CB8AC3E}">
-        <p14:creationId xmlns:p14="http://schemas.microsoft.com/office/powerpoint/2010/main" xmlns="" val="2695156669"/>
+        <p14:creationId xmlns:p14="http://schemas.microsoft.com/office/powerpoint/2010/main" val="2695156669"/>
       </p:ext>
     </p:extLst>
   </p:cSld>
@@ -39817,7 +39864,7 @@
           <p:cNvPr id="5" name="Picture Placeholder 4">
             <a:extLst>
               <a:ext uri="{FF2B5EF4-FFF2-40B4-BE49-F238E27FC236}">
-                <a16:creationId xmlns:a16="http://schemas.microsoft.com/office/drawing/2014/main" xmlns="" id="{B394A123-382B-1F09-63C7-10D213176693}"/>
+                <a16:creationId xmlns:a16="http://schemas.microsoft.com/office/drawing/2014/main" id="{B394A123-382B-1F09-63C7-10D213176693}"/>
               </a:ext>
             </a:extLst>
           </p:cNvPr>
@@ -40451,7 +40498,7 @@
           <p:cNvPr id="2" name="TextBox 1">
             <a:extLst>
               <a:ext uri="{FF2B5EF4-FFF2-40B4-BE49-F238E27FC236}">
-                <a16:creationId xmlns:a16="http://schemas.microsoft.com/office/drawing/2014/main" xmlns="" id="{F9320FEA-5605-4017-D30B-25DD20E36FBF}"/>
+                <a16:creationId xmlns:a16="http://schemas.microsoft.com/office/drawing/2014/main" id="{F9320FEA-5605-4017-D30B-25DD20E36FBF}"/>
               </a:ext>
             </a:extLst>
           </p:cNvPr>
@@ -40544,10 +40591,6 @@
               <a:rPr lang="en" u="sng" dirty="0"/>
               <a:t>Description</a:t>
             </a:r>
-            <a:r>
-              <a:rPr lang="en" dirty="0"/>
-              <a:t/>
-            </a:r>
             <a:br>
               <a:rPr lang="en" dirty="0"/>
             </a:br>
@@ -41635,7 +41678,7 @@
           <p:cNvPr id="2" name="TextBox 1">
             <a:extLst>
               <a:ext uri="{FF2B5EF4-FFF2-40B4-BE49-F238E27FC236}">
-                <a16:creationId xmlns:a16="http://schemas.microsoft.com/office/drawing/2014/main" xmlns="" id="{668BF7B2-7690-8E66-6E71-F9F22B12F079}"/>
+                <a16:creationId xmlns:a16="http://schemas.microsoft.com/office/drawing/2014/main" id="{668BF7B2-7690-8E66-6E71-F9F22B12F079}"/>
               </a:ext>
             </a:extLst>
           </p:cNvPr>
@@ -41670,7 +41713,7 @@
           <p:cNvPr id="5" name="Google Shape;314;p34">
             <a:extLst>
               <a:ext uri="{FF2B5EF4-FFF2-40B4-BE49-F238E27FC236}">
-                <a16:creationId xmlns:a16="http://schemas.microsoft.com/office/drawing/2014/main" xmlns="" id="{8067693C-4DEC-2A48-DFCA-800B510083E5}"/>
+                <a16:creationId xmlns:a16="http://schemas.microsoft.com/office/drawing/2014/main" id="{8067693C-4DEC-2A48-DFCA-800B510083E5}"/>
               </a:ext>
             </a:extLst>
           </p:cNvPr>
@@ -41966,7 +42009,7 @@
           <p:cNvPr id="6" name="Google Shape;314;p34">
             <a:extLst>
               <a:ext uri="{FF2B5EF4-FFF2-40B4-BE49-F238E27FC236}">
-                <a16:creationId xmlns:a16="http://schemas.microsoft.com/office/drawing/2014/main" xmlns="" id="{840DEFD2-1135-4A61-3726-8EDFFAE65E05}"/>
+                <a16:creationId xmlns:a16="http://schemas.microsoft.com/office/drawing/2014/main" id="{840DEFD2-1135-4A61-3726-8EDFFAE65E05}"/>
               </a:ext>
             </a:extLst>
           </p:cNvPr>
@@ -42259,7 +42302,7 @@
           <p:cNvPr id="7" name="Google Shape;314;p34">
             <a:extLst>
               <a:ext uri="{FF2B5EF4-FFF2-40B4-BE49-F238E27FC236}">
-                <a16:creationId xmlns:a16="http://schemas.microsoft.com/office/drawing/2014/main" xmlns="" id="{6F7E97FE-41A6-9293-46FF-ECB6A351024B}"/>
+                <a16:creationId xmlns:a16="http://schemas.microsoft.com/office/drawing/2014/main" id="{6F7E97FE-41A6-9293-46FF-ECB6A351024B}"/>
               </a:ext>
             </a:extLst>
           </p:cNvPr>
@@ -43155,7 +43198,7 @@
           <p:cNvPr id="4" name="TextBox 3">
             <a:extLst>
               <a:ext uri="{FF2B5EF4-FFF2-40B4-BE49-F238E27FC236}">
-                <a16:creationId xmlns:a16="http://schemas.microsoft.com/office/drawing/2014/main" xmlns="" id="{0FAA349C-52A2-7811-B2D8-4B949E3A5B02}"/>
+                <a16:creationId xmlns:a16="http://schemas.microsoft.com/office/drawing/2014/main" id="{0FAA349C-52A2-7811-B2D8-4B949E3A5B02}"/>
               </a:ext>
             </a:extLst>
           </p:cNvPr>
@@ -45864,7 +45907,7 @@
           <p:cNvPr id="8" name="TextBox 7">
             <a:extLst>
               <a:ext uri="{FF2B5EF4-FFF2-40B4-BE49-F238E27FC236}">
-                <a16:creationId xmlns:a16="http://schemas.microsoft.com/office/drawing/2014/main" xmlns="" id="{06BE5B69-0077-D281-87D3-3D8A46F73B94}"/>
+                <a16:creationId xmlns:a16="http://schemas.microsoft.com/office/drawing/2014/main" id="{06BE5B69-0077-D281-87D3-3D8A46F73B94}"/>
               </a:ext>
             </a:extLst>
           </p:cNvPr>
@@ -46357,7 +46400,7 @@
           <p:cNvPr id="3" name="Picture 2">
             <a:extLst>
               <a:ext uri="{FF2B5EF4-FFF2-40B4-BE49-F238E27FC236}">
-                <a16:creationId xmlns:a16="http://schemas.microsoft.com/office/drawing/2014/main" xmlns="" id="{B2727EFE-D35F-7D04-AA2B-494E2F5E27C6}"/>
+                <a16:creationId xmlns:a16="http://schemas.microsoft.com/office/drawing/2014/main" id="{B2727EFE-D35F-7D04-AA2B-494E2F5E27C6}"/>
               </a:ext>
             </a:extLst>
           </p:cNvPr>
@@ -46387,7 +46430,7 @@
           <p:cNvPr id="16" name="TextBox 15">
             <a:extLst>
               <a:ext uri="{FF2B5EF4-FFF2-40B4-BE49-F238E27FC236}">
-                <a16:creationId xmlns:a16="http://schemas.microsoft.com/office/drawing/2014/main" xmlns="" id="{BF904828-B486-ED70-4A6D-5EFEEC7F1171}"/>
+                <a16:creationId xmlns:a16="http://schemas.microsoft.com/office/drawing/2014/main" id="{BF904828-B486-ED70-4A6D-5EFEEC7F1171}"/>
               </a:ext>
             </a:extLst>
           </p:cNvPr>

--- a/PowerPointAppDev.pptx
+++ b/PowerPointAppDev.pptx
@@ -42579,7 +42579,7 @@
             <a:pPr marL="0" indent="0"/>
             <a:r>
               <a:rPr lang="en-CA" dirty="0"/>
-              <a:t>A database</a:t>
+              <a:t>A database(to perfect)</a:t>
             </a:r>
           </a:p>
           <a:p>

--- a/PowerPointAppDev.pptx
+++ b/PowerPointAppDev.pptx
@@ -5,7 +5,7 @@
     <p:sldMasterId id="2147483672" r:id="rId1"/>
   </p:sldMasterIdLst>
   <p:notesMasterIdLst>
-    <p:notesMasterId r:id="rId20"/>
+    <p:notesMasterId r:id="rId19"/>
   </p:notesMasterIdLst>
   <p:sldIdLst>
     <p:sldId id="256" r:id="rId2"/>
@@ -24,38 +24,37 @@
     <p:sldId id="300" r:id="rId15"/>
     <p:sldId id="301" r:id="rId16"/>
     <p:sldId id="304" r:id="rId17"/>
-    <p:sldId id="303" r:id="rId18"/>
-    <p:sldId id="302" r:id="rId19"/>
+    <p:sldId id="302" r:id="rId18"/>
   </p:sldIdLst>
   <p:sldSz cx="9144000" cy="5143500" type="screen16x9"/>
   <p:notesSz cx="6858000" cy="9144000"/>
   <p:embeddedFontLst>
     <p:embeddedFont>
       <p:font typeface="Yusei Magic" panose="020B0604020202020204" charset="-128"/>
+      <p:regular r:id="rId20"/>
+    </p:embeddedFont>
+    <p:embeddedFont>
+      <p:font typeface="Bebas Neue" panose="020B0606020202050201" pitchFamily="34" charset="0"/>
       <p:regular r:id="rId21"/>
     </p:embeddedFont>
     <p:embeddedFont>
-      <p:font typeface="Bebas Neue" panose="020B0606020202050201" pitchFamily="34" charset="0"/>
+      <p:font typeface="DM Sans Medium" pitchFamily="2" charset="0"/>
       <p:regular r:id="rId22"/>
-    </p:embeddedFont>
-    <p:embeddedFont>
-      <p:font typeface="DM Sans Medium" pitchFamily="2" charset="0"/>
-      <p:regular r:id="rId23"/>
-      <p:bold r:id="rId24"/>
-      <p:italic r:id="rId25"/>
-      <p:boldItalic r:id="rId26"/>
+      <p:bold r:id="rId23"/>
+      <p:italic r:id="rId24"/>
+      <p:boldItalic r:id="rId25"/>
     </p:embeddedFont>
     <p:embeddedFont>
       <p:font typeface="Nunito Light" pitchFamily="2" charset="0"/>
-      <p:regular r:id="rId27"/>
-      <p:italic r:id="rId28"/>
+      <p:regular r:id="rId26"/>
+      <p:italic r:id="rId27"/>
     </p:embeddedFont>
     <p:embeddedFont>
       <p:font typeface="Raleway" pitchFamily="2" charset="0"/>
-      <p:regular r:id="rId29"/>
-      <p:bold r:id="rId30"/>
-      <p:italic r:id="rId31"/>
-      <p:boldItalic r:id="rId32"/>
+      <p:regular r:id="rId28"/>
+      <p:bold r:id="rId29"/>
+      <p:italic r:id="rId30"/>
+      <p:boldItalic r:id="rId31"/>
     </p:embeddedFont>
   </p:embeddedFontLst>
   <p:defaultTextStyle>
@@ -306,29 +305,193 @@
 </p:presentation>
 </file>
 
+<file path=ppt/revisionInfo.xml><?xml version="1.0" encoding="utf-8"?>
+<p1510:revInfo xmlns:a="http://schemas.openxmlformats.org/drawingml/2006/main" xmlns:r="http://schemas.openxmlformats.org/officeDocument/2006/relationships" xmlns:p1510="http://schemas.microsoft.com/office/powerpoint/2015/10/main">
+  <p1510:revLst>
+    <p1510:client id="{E97355DB-4924-4764-BC7B-BA6526E8DC65}" v="3" dt="2025-12-14T20:50:04.491"/>
+  </p1510:revLst>
+</p1510:revInfo>
+</file>
+
 <file path=ppt/changesInfos/changesInfo1.xml><?xml version="1.0" encoding="utf-8"?>
 <pc:chgInfo xmlns:a="http://schemas.openxmlformats.org/drawingml/2006/main" xmlns:r="http://schemas.openxmlformats.org/officeDocument/2006/relationships" xmlns:ac="http://schemas.microsoft.com/office/drawing/2013/main/command" xmlns:pc="http://schemas.microsoft.com/office/powerpoint/2013/main/command">
   <pc:docChgLst>
     <pc:chgData name="Audreane Deschenes" userId="23aa82a02f6ee89b" providerId="LiveId" clId="{6C83BED0-3AB7-417E-AB86-80F74B7F3F60}"/>
     <pc:docChg chg="custSel addSld delSld modSld">
-      <pc:chgData name="Audreane Deschenes" userId="23aa82a02f6ee89b" providerId="LiveId" clId="{6C83BED0-3AB7-417E-AB86-80F74B7F3F60}" dt="2025-12-11T08:25:12.756" v="3" actId="2696"/>
+      <pc:chgData name="Audreane Deschenes" userId="23aa82a02f6ee89b" providerId="LiveId" clId="{6C83BED0-3AB7-417E-AB86-80F74B7F3F60}" dt="2025-12-14T20:54:01.408" v="141" actId="47"/>
       <pc:docMkLst>
         <pc:docMk/>
       </pc:docMkLst>
-      <pc:sldChg chg="delSp modSp add del mod">
-        <pc:chgData name="Audreane Deschenes" userId="23aa82a02f6ee89b" providerId="LiveId" clId="{6C83BED0-3AB7-417E-AB86-80F74B7F3F60}" dt="2025-12-11T08:25:12.756" v="3" actId="2696"/>
+      <pc:sldChg chg="modSp mod">
+        <pc:chgData name="Audreane Deschenes" userId="23aa82a02f6ee89b" providerId="LiveId" clId="{6C83BED0-3AB7-417E-AB86-80F74B7F3F60}" dt="2025-12-14T20:39:49.703" v="6" actId="732"/>
         <pc:sldMkLst>
           <pc:docMk/>
-          <pc:sldMk cId="3613149469" sldId="304"/>
+          <pc:sldMk cId="0" sldId="260"/>
         </pc:sldMkLst>
-        <pc:picChg chg="del mod">
-          <ac:chgData name="Audreane Deschenes" userId="23aa82a02f6ee89b" providerId="LiveId" clId="{6C83BED0-3AB7-417E-AB86-80F74B7F3F60}" dt="2025-12-11T08:24:54.531" v="2" actId="478"/>
+        <pc:picChg chg="mod modCrop">
+          <ac:chgData name="Audreane Deschenes" userId="23aa82a02f6ee89b" providerId="LiveId" clId="{6C83BED0-3AB7-417E-AB86-80F74B7F3F60}" dt="2025-12-14T20:39:49.703" v="6" actId="732"/>
           <ac:picMkLst>
             <pc:docMk/>
-            <pc:sldMk cId="3613149469" sldId="304"/>
-            <ac:picMk id="3" creationId="{3ADE4781-62F6-D8BE-A8B0-CB0A7A8B5084}"/>
+            <pc:sldMk cId="0" sldId="260"/>
+            <ac:picMk id="5" creationId="{B394A123-382B-1F09-63C7-10D213176693}"/>
           </ac:picMkLst>
         </pc:picChg>
+      </pc:sldChg>
+      <pc:sldChg chg="addSp delSp modSp mod">
+        <pc:chgData name="Audreane Deschenes" userId="23aa82a02f6ee89b" providerId="LiveId" clId="{6C83BED0-3AB7-417E-AB86-80F74B7F3F60}" dt="2025-12-14T20:42:12.267" v="14" actId="478"/>
+        <pc:sldMkLst>
+          <pc:docMk/>
+          <pc:sldMk cId="3948539492" sldId="297"/>
+        </pc:sldMkLst>
+        <pc:picChg chg="del">
+          <ac:chgData name="Audreane Deschenes" userId="23aa82a02f6ee89b" providerId="LiveId" clId="{6C83BED0-3AB7-417E-AB86-80F74B7F3F60}" dt="2025-12-14T20:42:12.267" v="14" actId="478"/>
+          <ac:picMkLst>
+            <pc:docMk/>
+            <pc:sldMk cId="3948539492" sldId="297"/>
+            <ac:picMk id="2" creationId="{F6B6C705-6E92-0BA2-EB25-33A194892989}"/>
+          </ac:picMkLst>
+        </pc:picChg>
+        <pc:picChg chg="add mod">
+          <ac:chgData name="Audreane Deschenes" userId="23aa82a02f6ee89b" providerId="LiveId" clId="{6C83BED0-3AB7-417E-AB86-80F74B7F3F60}" dt="2025-12-14T20:42:09.747" v="13" actId="14100"/>
+          <ac:picMkLst>
+            <pc:docMk/>
+            <pc:sldMk cId="3948539492" sldId="297"/>
+            <ac:picMk id="4" creationId="{7A6B9E54-8604-FD7A-0EAB-A931BC792BDD}"/>
+          </ac:picMkLst>
+        </pc:picChg>
+      </pc:sldChg>
+      <pc:sldChg chg="addSp delSp modSp mod">
+        <pc:chgData name="Audreane Deschenes" userId="23aa82a02f6ee89b" providerId="LiveId" clId="{6C83BED0-3AB7-417E-AB86-80F74B7F3F60}" dt="2025-12-14T20:51:13.996" v="114" actId="14100"/>
+        <pc:sldMkLst>
+          <pc:docMk/>
+          <pc:sldMk cId="3601285605" sldId="300"/>
+        </pc:sldMkLst>
+        <pc:spChg chg="del">
+          <ac:chgData name="Audreane Deschenes" userId="23aa82a02f6ee89b" providerId="LiveId" clId="{6C83BED0-3AB7-417E-AB86-80F74B7F3F60}" dt="2025-12-14T20:47:17.411" v="27" actId="478"/>
+          <ac:spMkLst>
+            <pc:docMk/>
+            <pc:sldMk cId="3601285605" sldId="300"/>
+            <ac:spMk id="5" creationId="{6516C008-9773-B796-1ADB-E636463CAA88}"/>
+          </ac:spMkLst>
+        </pc:spChg>
+        <pc:spChg chg="del">
+          <ac:chgData name="Audreane Deschenes" userId="23aa82a02f6ee89b" providerId="LiveId" clId="{6C83BED0-3AB7-417E-AB86-80F74B7F3F60}" dt="2025-12-14T20:47:15.988" v="26" actId="478"/>
+          <ac:spMkLst>
+            <pc:docMk/>
+            <pc:sldMk cId="3601285605" sldId="300"/>
+            <ac:spMk id="6" creationId="{CC874410-74A8-C633-963E-024EBF734A75}"/>
+          </ac:spMkLst>
+        </pc:spChg>
+        <pc:spChg chg="add mod">
+          <ac:chgData name="Audreane Deschenes" userId="23aa82a02f6ee89b" providerId="LiveId" clId="{6C83BED0-3AB7-417E-AB86-80F74B7F3F60}" dt="2025-12-14T20:49:09.638" v="67" actId="1582"/>
+          <ac:spMkLst>
+            <pc:docMk/>
+            <pc:sldMk cId="3601285605" sldId="300"/>
+            <ac:spMk id="12" creationId="{BB091BE3-2DEB-BD69-06D4-C96F304CB32D}"/>
+          </ac:spMkLst>
+        </pc:spChg>
+        <pc:spChg chg="add mod">
+          <ac:chgData name="Audreane Deschenes" userId="23aa82a02f6ee89b" providerId="LiveId" clId="{6C83BED0-3AB7-417E-AB86-80F74B7F3F60}" dt="2025-12-14T20:49:49.577" v="81" actId="1076"/>
+          <ac:spMkLst>
+            <pc:docMk/>
+            <pc:sldMk cId="3601285605" sldId="300"/>
+            <ac:spMk id="14" creationId="{261F0109-5AB9-5878-EDDD-6378F06F436E}"/>
+          </ac:spMkLst>
+        </pc:spChg>
+        <pc:spChg chg="add mod">
+          <ac:chgData name="Audreane Deschenes" userId="23aa82a02f6ee89b" providerId="LiveId" clId="{6C83BED0-3AB7-417E-AB86-80F74B7F3F60}" dt="2025-12-14T20:50:58.429" v="104" actId="1036"/>
+          <ac:spMkLst>
+            <pc:docMk/>
+            <pc:sldMk cId="3601285605" sldId="300"/>
+            <ac:spMk id="20" creationId="{C9DD95F7-6ACA-719F-BBA8-A0CA0B799939}"/>
+          </ac:spMkLst>
+        </pc:spChg>
+        <pc:picChg chg="del">
+          <ac:chgData name="Audreane Deschenes" userId="23aa82a02f6ee89b" providerId="LiveId" clId="{6C83BED0-3AB7-417E-AB86-80F74B7F3F60}" dt="2025-12-14T20:47:12.726" v="24" actId="478"/>
+          <ac:picMkLst>
+            <pc:docMk/>
+            <pc:sldMk cId="3601285605" sldId="300"/>
+            <ac:picMk id="3" creationId="{1EE81E81-44AC-0BDE-7205-044AA3B5D724}"/>
+          </ac:picMkLst>
+        </pc:picChg>
+        <pc:picChg chg="del mod">
+          <ac:chgData name="Audreane Deschenes" userId="23aa82a02f6ee89b" providerId="LiveId" clId="{6C83BED0-3AB7-417E-AB86-80F74B7F3F60}" dt="2025-12-14T20:46:07.517" v="16" actId="478"/>
+          <ac:picMkLst>
+            <pc:docMk/>
+            <pc:sldMk cId="3601285605" sldId="300"/>
+            <ac:picMk id="4" creationId="{78244C7D-5973-9E2B-B25F-D253A94F1579}"/>
+          </ac:picMkLst>
+        </pc:picChg>
+        <pc:picChg chg="add del mod">
+          <ac:chgData name="Audreane Deschenes" userId="23aa82a02f6ee89b" providerId="LiveId" clId="{6C83BED0-3AB7-417E-AB86-80F74B7F3F60}" dt="2025-12-14T20:47:14.253" v="25" actId="478"/>
+          <ac:picMkLst>
+            <pc:docMk/>
+            <pc:sldMk cId="3601285605" sldId="300"/>
+            <ac:picMk id="7" creationId="{79140445-20CF-9C6C-ACEC-623E719C8872}"/>
+          </ac:picMkLst>
+        </pc:picChg>
+        <pc:picChg chg="add mod">
+          <ac:chgData name="Audreane Deschenes" userId="23aa82a02f6ee89b" providerId="LiveId" clId="{6C83BED0-3AB7-417E-AB86-80F74B7F3F60}" dt="2025-12-14T20:47:23.770" v="32" actId="1076"/>
+          <ac:picMkLst>
+            <pc:docMk/>
+            <pc:sldMk cId="3601285605" sldId="300"/>
+            <ac:picMk id="9" creationId="{1642ABC1-BF5D-E7E0-D085-63295F59508D}"/>
+          </ac:picMkLst>
+        </pc:picChg>
+        <pc:cxnChg chg="add mod">
+          <ac:chgData name="Audreane Deschenes" userId="23aa82a02f6ee89b" providerId="LiveId" clId="{6C83BED0-3AB7-417E-AB86-80F74B7F3F60}" dt="2025-12-14T20:48:12.706" v="36" actId="13822"/>
+          <ac:cxnSpMkLst>
+            <pc:docMk/>
+            <pc:sldMk cId="3601285605" sldId="300"/>
+            <ac:cxnSpMk id="11" creationId="{06742050-2329-F919-55C3-54747CCE0B9E}"/>
+          </ac:cxnSpMkLst>
+        </pc:cxnChg>
+        <pc:cxnChg chg="add mod">
+          <ac:chgData name="Audreane Deschenes" userId="23aa82a02f6ee89b" providerId="LiveId" clId="{6C83BED0-3AB7-417E-AB86-80F74B7F3F60}" dt="2025-12-14T20:49:55.043" v="84" actId="14100"/>
+          <ac:cxnSpMkLst>
+            <pc:docMk/>
+            <pc:sldMk cId="3601285605" sldId="300"/>
+            <ac:cxnSpMk id="13" creationId="{24063004-5014-1828-1D7E-66699E17DC6A}"/>
+          </ac:cxnSpMkLst>
+        </pc:cxnChg>
+        <pc:cxnChg chg="add mod">
+          <ac:chgData name="Audreane Deschenes" userId="23aa82a02f6ee89b" providerId="LiveId" clId="{6C83BED0-3AB7-417E-AB86-80F74B7F3F60}" dt="2025-12-14T20:51:13.996" v="114" actId="14100"/>
+          <ac:cxnSpMkLst>
+            <pc:docMk/>
+            <pc:sldMk cId="3601285605" sldId="300"/>
+            <ac:cxnSpMk id="19" creationId="{8A0E0A79-9709-AEBE-DC13-68A07C412E35}"/>
+          </ac:cxnSpMkLst>
+        </pc:cxnChg>
+      </pc:sldChg>
+      <pc:sldChg chg="addSp delSp modSp mod">
+        <pc:chgData name="Audreane Deschenes" userId="23aa82a02f6ee89b" providerId="LiveId" clId="{6C83BED0-3AB7-417E-AB86-80F74B7F3F60}" dt="2025-12-14T20:53:42.380" v="140" actId="1036"/>
+        <pc:sldMkLst>
+          <pc:docMk/>
+          <pc:sldMk cId="1303504811" sldId="301"/>
+        </pc:sldMkLst>
+        <pc:picChg chg="add mod">
+          <ac:chgData name="Audreane Deschenes" userId="23aa82a02f6ee89b" providerId="LiveId" clId="{6C83BED0-3AB7-417E-AB86-80F74B7F3F60}" dt="2025-12-14T20:53:42.380" v="140" actId="1036"/>
+          <ac:picMkLst>
+            <pc:docMk/>
+            <pc:sldMk cId="1303504811" sldId="301"/>
+            <ac:picMk id="3" creationId="{74FD59F3-876C-A68C-15A4-4B1EE341E034}"/>
+          </ac:picMkLst>
+        </pc:picChg>
+        <pc:picChg chg="del">
+          <ac:chgData name="Audreane Deschenes" userId="23aa82a02f6ee89b" providerId="LiveId" clId="{6C83BED0-3AB7-417E-AB86-80F74B7F3F60}" dt="2025-12-14T20:53:32.844" v="118" actId="478"/>
+          <ac:picMkLst>
+            <pc:docMk/>
+            <pc:sldMk cId="1303504811" sldId="301"/>
+            <ac:picMk id="1026" creationId="{00000000-0000-0000-0000-000000000000}"/>
+          </ac:picMkLst>
+        </pc:picChg>
+      </pc:sldChg>
+      <pc:sldChg chg="del">
+        <pc:chgData name="Audreane Deschenes" userId="23aa82a02f6ee89b" providerId="LiveId" clId="{6C83BED0-3AB7-417E-AB86-80F74B7F3F60}" dt="2025-12-14T20:54:01.408" v="141" actId="47"/>
+        <pc:sldMkLst>
+          <pc:docMk/>
+          <pc:sldMk cId="3546235126" sldId="303"/>
+        </pc:sldMkLst>
       </pc:sldChg>
     </pc:docChg>
   </pc:docChgLst>
@@ -1770,133 +1933,6 @@
 </file>
 
 <file path=ppt/notesSlides/notesSlide17.xml><?xml version="1.0" encoding="utf-8"?>
-<p:notes xmlns:a="http://schemas.openxmlformats.org/drawingml/2006/main" xmlns:r="http://schemas.openxmlformats.org/officeDocument/2006/relationships" xmlns:p="http://schemas.openxmlformats.org/presentationml/2006/main" showMasterSp="0" showMasterPhAnim="0">
-  <p:cSld>
-    <p:spTree>
-      <p:nvGrpSpPr>
-        <p:cNvPr id="1" name="Shape 341">
-          <a:extLst>
-            <a:ext uri="{FF2B5EF4-FFF2-40B4-BE49-F238E27FC236}">
-              <a16:creationId xmlns:a16="http://schemas.microsoft.com/office/drawing/2014/main" id="{F89DE483-D03E-0A2F-2D21-A144161697E8}"/>
-            </a:ext>
-          </a:extLst>
-        </p:cNvPr>
-        <p:cNvGrpSpPr/>
-        <p:nvPr/>
-      </p:nvGrpSpPr>
-      <p:grpSpPr>
-        <a:xfrm>
-          <a:off x="0" y="0"/>
-          <a:ext cx="0" cy="0"/>
-          <a:chOff x="0" y="0"/>
-          <a:chExt cx="0" cy="0"/>
-        </a:xfrm>
-      </p:grpSpPr>
-      <p:sp>
-        <p:nvSpPr>
-          <p:cNvPr id="342" name="Google Shape;342;g1ff18b49f31_1_71:notes">
-            <a:extLst>
-              <a:ext uri="{FF2B5EF4-FFF2-40B4-BE49-F238E27FC236}">
-                <a16:creationId xmlns:a16="http://schemas.microsoft.com/office/drawing/2014/main" id="{7C040D7C-D1D4-7061-9B92-97FFD97E4E2C}"/>
-              </a:ext>
-            </a:extLst>
-          </p:cNvPr>
-          <p:cNvSpPr>
-            <a:spLocks noGrp="1" noRot="1" noChangeAspect="1"/>
-          </p:cNvSpPr>
-          <p:nvPr>
-            <p:ph type="sldImg" idx="2"/>
-          </p:nvPr>
-        </p:nvSpPr>
-        <p:spPr>
-          <a:xfrm>
-            <a:off x="381000" y="685800"/>
-            <a:ext cx="6096000" cy="3429000"/>
-          </a:xfrm>
-          <a:custGeom>
-            <a:avLst/>
-            <a:gdLst/>
-            <a:ahLst/>
-            <a:cxnLst/>
-            <a:rect l="l" t="t" r="r" b="b"/>
-            <a:pathLst>
-              <a:path w="120000" h="120000" extrusionOk="0">
-                <a:moveTo>
-                  <a:pt x="0" y="0"/>
-                </a:moveTo>
-                <a:lnTo>
-                  <a:pt x="120000" y="0"/>
-                </a:lnTo>
-                <a:lnTo>
-                  <a:pt x="120000" y="120000"/>
-                </a:lnTo>
-                <a:lnTo>
-                  <a:pt x="0" y="120000"/>
-                </a:lnTo>
-                <a:close/>
-              </a:path>
-            </a:pathLst>
-          </a:custGeom>
-        </p:spPr>
-      </p:sp>
-      <p:sp>
-        <p:nvSpPr>
-          <p:cNvPr id="343" name="Google Shape;343;g1ff18b49f31_1_71:notes">
-            <a:extLst>
-              <a:ext uri="{FF2B5EF4-FFF2-40B4-BE49-F238E27FC236}">
-                <a16:creationId xmlns:a16="http://schemas.microsoft.com/office/drawing/2014/main" id="{D6A8EBEC-5C21-5332-436A-5DE85E3058BB}"/>
-              </a:ext>
-            </a:extLst>
-          </p:cNvPr>
-          <p:cNvSpPr txBox="1">
-            <a:spLocks noGrp="1"/>
-          </p:cNvSpPr>
-          <p:nvPr>
-            <p:ph type="body" idx="1"/>
-          </p:nvPr>
-        </p:nvSpPr>
-        <p:spPr>
-          <a:xfrm>
-            <a:off x="685800" y="4343400"/>
-            <a:ext cx="5486400" cy="4114800"/>
-          </a:xfrm>
-          <a:prstGeom prst="rect">
-            <a:avLst/>
-          </a:prstGeom>
-        </p:spPr>
-        <p:txBody>
-          <a:bodyPr spcFirstLastPara="1" wrap="square" lIns="91425" tIns="91425" rIns="91425" bIns="91425" anchor="t" anchorCtr="0">
-            <a:noAutofit/>
-          </a:bodyPr>
-          <a:lstStyle/>
-          <a:p>
-            <a:pPr marL="0" lvl="0" indent="0" algn="l" rtl="0">
-              <a:spcBef>
-                <a:spcPts val="0"/>
-              </a:spcBef>
-              <a:spcAft>
-                <a:spcPts val="0"/>
-              </a:spcAft>
-              <a:buNone/>
-            </a:pPr>
-            <a:endParaRPr/>
-          </a:p>
-        </p:txBody>
-      </p:sp>
-    </p:spTree>
-    <p:extLst>
-      <p:ext uri="{BB962C8B-B14F-4D97-AF65-F5344CB8AC3E}">
-        <p14:creationId xmlns:p14="http://schemas.microsoft.com/office/powerpoint/2010/main" val="2139460300"/>
-      </p:ext>
-    </p:extLst>
-  </p:cSld>
-  <p:clrMapOvr>
-    <a:masterClrMapping/>
-  </p:clrMapOvr>
-</p:notes>
-</file>
-
-<file path=ppt/notesSlides/notesSlide18.xml><?xml version="1.0" encoding="utf-8"?>
 <p:notes xmlns:a="http://schemas.openxmlformats.org/drawingml/2006/main" xmlns:r="http://schemas.openxmlformats.org/officeDocument/2006/relationships" xmlns:p="http://schemas.openxmlformats.org/presentationml/2006/main" showMasterSp="0" showMasterPhAnim="0">
   <p:cSld>
     <p:spTree>
@@ -24887,10 +24923,10 @@
       </p:sp>
       <p:pic>
         <p:nvPicPr>
-          <p:cNvPr id="2" name="Picture 1">
+          <p:cNvPr id="4" name="Picture 3" descr="A screenshot of a computer&#10;&#10;AI-generated content may be incorrect.">
             <a:extLst>
               <a:ext uri="{FF2B5EF4-FFF2-40B4-BE49-F238E27FC236}">
-                <a16:creationId xmlns:a16="http://schemas.microsoft.com/office/drawing/2014/main" id="{F6B6C705-6E92-0BA2-EB25-33A194892989}"/>
+                <a16:creationId xmlns:a16="http://schemas.microsoft.com/office/drawing/2014/main" id="{7A6B9E54-8604-FD7A-0EAB-A931BC792BDD}"/>
               </a:ext>
             </a:extLst>
           </p:cNvPr>
@@ -24907,8 +24943,8 @@
         </p:blipFill>
         <p:spPr>
           <a:xfrm>
-            <a:off x="103862" y="1330036"/>
-            <a:ext cx="5314289" cy="3368439"/>
+            <a:off x="102610" y="1272664"/>
+            <a:ext cx="5426377" cy="3308969"/>
           </a:xfrm>
           <a:prstGeom prst="rect">
             <a:avLst/>
@@ -26775,10 +26811,10 @@
       </p:sp>
       <p:pic>
         <p:nvPicPr>
-          <p:cNvPr id="3" name="Picture 2">
+          <p:cNvPr id="9" name="Picture 8" descr="A screenshot of a menu&#10;&#10;AI-generated content may be incorrect.">
             <a:extLst>
               <a:ext uri="{FF2B5EF4-FFF2-40B4-BE49-F238E27FC236}">
-                <a16:creationId xmlns:a16="http://schemas.microsoft.com/office/drawing/2014/main" id="{1EE81E81-44AC-0BDE-7205-044AA3B5D724}"/>
+                <a16:creationId xmlns:a16="http://schemas.microsoft.com/office/drawing/2014/main" id="{1642ABC1-BF5D-E7E0-D085-63295F59508D}"/>
               </a:ext>
             </a:extLst>
           </p:cNvPr>
@@ -26795,147 +26831,246 @@
         </p:blipFill>
         <p:spPr>
           <a:xfrm>
-            <a:off x="1256145" y="1565094"/>
-            <a:ext cx="5931044" cy="3373796"/>
+            <a:off x="1552908" y="1498996"/>
+            <a:ext cx="6038184" cy="3435174"/>
           </a:xfrm>
           <a:prstGeom prst="rect">
             <a:avLst/>
           </a:prstGeom>
         </p:spPr>
       </p:pic>
-      <p:pic>
-        <p:nvPicPr>
-          <p:cNvPr id="4" name="Picture 3">
+      <p:cxnSp>
+        <p:nvCxnSpPr>
+          <p:cNvPr id="11" name="Straight Connector 10">
             <a:extLst>
               <a:ext uri="{FF2B5EF4-FFF2-40B4-BE49-F238E27FC236}">
-                <a16:creationId xmlns:a16="http://schemas.microsoft.com/office/drawing/2014/main" id="{78244C7D-5973-9E2B-B25F-D253A94F1579}"/>
+                <a16:creationId xmlns:a16="http://schemas.microsoft.com/office/drawing/2014/main" id="{06742050-2329-F919-55C3-54747CCE0B9E}"/>
               </a:ext>
             </a:extLst>
           </p:cNvPr>
-          <p:cNvPicPr>
-            <a:picLocks noChangeAspect="1"/>
-          </p:cNvPicPr>
+          <p:cNvCxnSpPr/>
           <p:nvPr/>
-        </p:nvPicPr>
-        <p:blipFill>
-          <a:blip r:embed="rId4"/>
-          <a:stretch>
-            <a:fillRect/>
-          </a:stretch>
-        </p:blipFill>
+        </p:nvCxnSpPr>
         <p:spPr>
           <a:xfrm>
-            <a:off x="2988683" y="1660735"/>
-            <a:ext cx="3266218" cy="2523337"/>
+            <a:off x="4463503" y="4204952"/>
+            <a:ext cx="0" cy="206062"/>
+          </a:xfrm>
+          <a:prstGeom prst="line">
+            <a:avLst/>
+          </a:prstGeom>
+          <a:ln/>
+        </p:spPr>
+        <p:style>
+          <a:lnRef idx="2">
+            <a:schemeClr val="dk1"/>
+          </a:lnRef>
+          <a:fillRef idx="0">
+            <a:schemeClr val="dk1"/>
+          </a:fillRef>
+          <a:effectRef idx="1">
+            <a:schemeClr val="dk1"/>
+          </a:effectRef>
+          <a:fontRef idx="minor">
+            <a:schemeClr val="tx1"/>
+          </a:fontRef>
+        </p:style>
+      </p:cxnSp>
+      <p:sp>
+        <p:nvSpPr>
+          <p:cNvPr id="12" name="TextBox 11">
+            <a:extLst>
+              <a:ext uri="{FF2B5EF4-FFF2-40B4-BE49-F238E27FC236}">
+                <a16:creationId xmlns:a16="http://schemas.microsoft.com/office/drawing/2014/main" id="{BB091BE3-2DEB-BD69-06D4-C96F304CB32D}"/>
+              </a:ext>
+            </a:extLst>
+          </p:cNvPr>
+          <p:cNvSpPr txBox="1"/>
+          <p:nvPr/>
+        </p:nvSpPr>
+        <p:spPr>
+          <a:xfrm>
+            <a:off x="3858196" y="4411014"/>
+            <a:ext cx="997136" cy="215444"/>
           </a:xfrm>
           <a:prstGeom prst="rect">
             <a:avLst/>
           </a:prstGeom>
+          <a:noFill/>
+          <a:ln w="12700">
+            <a:solidFill>
+              <a:srgbClr val="000000"/>
+            </a:solidFill>
+          </a:ln>
         </p:spPr>
-      </p:pic>
-      <p:sp>
-        <p:nvSpPr>
-          <p:cNvPr id="5" name="Rectangle 4">
+        <p:txBody>
+          <a:bodyPr wrap="square" rtlCol="0">
+            <a:spAutoFit/>
+          </a:bodyPr>
+          <a:lstStyle/>
+          <a:p>
+            <a:r>
+              <a:rPr lang="en-CA" sz="800" dirty="0"/>
+              <a:t>Edit Item button</a:t>
+            </a:r>
+          </a:p>
+        </p:txBody>
+      </p:sp>
+      <p:cxnSp>
+        <p:nvCxnSpPr>
+          <p:cNvPr id="13" name="Straight Connector 12">
             <a:extLst>
               <a:ext uri="{FF2B5EF4-FFF2-40B4-BE49-F238E27FC236}">
-                <a16:creationId xmlns:a16="http://schemas.microsoft.com/office/drawing/2014/main" id="{6516C008-9773-B796-1ADB-E636463CAA88}"/>
+                <a16:creationId xmlns:a16="http://schemas.microsoft.com/office/drawing/2014/main" id="{24063004-5014-1828-1D7E-66699E17DC6A}"/>
               </a:ext>
             </a:extLst>
           </p:cNvPr>
-          <p:cNvSpPr/>
+          <p:cNvCxnSpPr>
+            <a:cxnSpLocks/>
+          </p:cNvCxnSpPr>
+          <p:nvPr/>
+        </p:nvCxnSpPr>
+        <p:spPr>
+          <a:xfrm>
+            <a:off x="6478073" y="4204952"/>
+            <a:ext cx="386366" cy="385801"/>
+          </a:xfrm>
+          <a:prstGeom prst="line">
+            <a:avLst/>
+          </a:prstGeom>
+          <a:ln/>
+        </p:spPr>
+        <p:style>
+          <a:lnRef idx="2">
+            <a:schemeClr val="dk1"/>
+          </a:lnRef>
+          <a:fillRef idx="0">
+            <a:schemeClr val="dk1"/>
+          </a:fillRef>
+          <a:effectRef idx="1">
+            <a:schemeClr val="dk1"/>
+          </a:effectRef>
+          <a:fontRef idx="minor">
+            <a:schemeClr val="tx1"/>
+          </a:fontRef>
+        </p:style>
+      </p:cxnSp>
+      <p:sp>
+        <p:nvSpPr>
+          <p:cNvPr id="14" name="TextBox 13">
+            <a:extLst>
+              <a:ext uri="{FF2B5EF4-FFF2-40B4-BE49-F238E27FC236}">
+                <a16:creationId xmlns:a16="http://schemas.microsoft.com/office/drawing/2014/main" id="{261F0109-5AB9-5878-EDDD-6378F06F436E}"/>
+              </a:ext>
+            </a:extLst>
+          </p:cNvPr>
+          <p:cNvSpPr txBox="1"/>
           <p:nvPr/>
         </p:nvSpPr>
         <p:spPr>
           <a:xfrm>
-            <a:off x="3519055" y="4197926"/>
-            <a:ext cx="1697181" cy="644237"/>
+            <a:off x="6542931" y="4590753"/>
+            <a:ext cx="997136" cy="215444"/>
           </a:xfrm>
           <a:prstGeom prst="rect">
             <a:avLst/>
           </a:prstGeom>
-          <a:ln>
-            <a:noFill/>
+          <a:noFill/>
+          <a:ln w="12700">
+            <a:solidFill>
+              <a:srgbClr val="000000"/>
+            </a:solidFill>
           </a:ln>
+        </p:spPr>
+        <p:txBody>
+          <a:bodyPr wrap="square" rtlCol="0">
+            <a:spAutoFit/>
+          </a:bodyPr>
+          <a:lstStyle/>
+          <a:p>
+            <a:r>
+              <a:rPr lang="en-CA" sz="800" dirty="0"/>
+              <a:t>Checkout button</a:t>
+            </a:r>
+          </a:p>
+        </p:txBody>
+      </p:sp>
+      <p:cxnSp>
+        <p:nvCxnSpPr>
+          <p:cNvPr id="19" name="Straight Connector 18">
+            <a:extLst>
+              <a:ext uri="{FF2B5EF4-FFF2-40B4-BE49-F238E27FC236}">
+                <a16:creationId xmlns:a16="http://schemas.microsoft.com/office/drawing/2014/main" id="{8A0E0A79-9709-AEBE-DC13-68A07C412E35}"/>
+              </a:ext>
+            </a:extLst>
+          </p:cNvPr>
+          <p:cNvCxnSpPr>
+            <a:cxnSpLocks/>
+          </p:cNvCxnSpPr>
+          <p:nvPr/>
+        </p:nvCxnSpPr>
+        <p:spPr>
+          <a:xfrm>
+            <a:off x="5103506" y="4204952"/>
+            <a:ext cx="257811" cy="206062"/>
+          </a:xfrm>
+          <a:prstGeom prst="line">
+            <a:avLst/>
+          </a:prstGeom>
+          <a:ln/>
         </p:spPr>
         <p:style>
           <a:lnRef idx="2">
-            <a:schemeClr val="accent5">
-              <a:shade val="15000"/>
-            </a:schemeClr>
+            <a:schemeClr val="dk1"/>
           </a:lnRef>
-          <a:fillRef idx="1">
-            <a:schemeClr val="accent5"/>
+          <a:fillRef idx="0">
+            <a:schemeClr val="dk1"/>
           </a:fillRef>
-          <a:effectRef idx="0">
-            <a:schemeClr val="accent5"/>
+          <a:effectRef idx="1">
+            <a:schemeClr val="dk1"/>
           </a:effectRef>
           <a:fontRef idx="minor">
-            <a:schemeClr val="lt1"/>
+            <a:schemeClr val="tx1"/>
           </a:fontRef>
         </p:style>
-        <p:txBody>
-          <a:bodyPr rtlCol="0" anchor="ctr"/>
-          <a:lstStyle/>
-          <a:p>
-            <a:pPr algn="ctr"/>
-            <a:endParaRPr lang="en-US">
-              <a:solidFill>
-                <a:schemeClr val="accent6"/>
-              </a:solidFill>
-            </a:endParaRPr>
-          </a:p>
-        </p:txBody>
-      </p:sp>
+      </p:cxnSp>
       <p:sp>
         <p:nvSpPr>
-          <p:cNvPr id="6" name="Rectangle 5">
+          <p:cNvPr id="20" name="TextBox 19">
             <a:extLst>
               <a:ext uri="{FF2B5EF4-FFF2-40B4-BE49-F238E27FC236}">
-                <a16:creationId xmlns:a16="http://schemas.microsoft.com/office/drawing/2014/main" id="{CC874410-74A8-C633-963E-024EBF734A75}"/>
+                <a16:creationId xmlns:a16="http://schemas.microsoft.com/office/drawing/2014/main" id="{C9DD95F7-6ACA-719F-BBA8-A0CA0B799939}"/>
               </a:ext>
             </a:extLst>
           </p:cNvPr>
-          <p:cNvSpPr/>
+          <p:cNvSpPr txBox="1"/>
           <p:nvPr/>
         </p:nvSpPr>
         <p:spPr>
           <a:xfrm>
-            <a:off x="6254902" y="3683865"/>
-            <a:ext cx="932288" cy="644237"/>
+            <a:off x="5103506" y="4411014"/>
+            <a:ext cx="997136" cy="215444"/>
           </a:xfrm>
           <a:prstGeom prst="rect">
             <a:avLst/>
           </a:prstGeom>
-          <a:ln>
-            <a:noFill/>
+          <a:noFill/>
+          <a:ln w="12700">
+            <a:solidFill>
+              <a:srgbClr val="000000"/>
+            </a:solidFill>
           </a:ln>
         </p:spPr>
-        <p:style>
-          <a:lnRef idx="2">
-            <a:schemeClr val="accent5">
-              <a:shade val="15000"/>
-            </a:schemeClr>
-          </a:lnRef>
-          <a:fillRef idx="1">
-            <a:schemeClr val="accent5"/>
-          </a:fillRef>
-          <a:effectRef idx="0">
-            <a:schemeClr val="accent5"/>
-          </a:effectRef>
-          <a:fontRef idx="minor">
-            <a:schemeClr val="lt1"/>
-          </a:fontRef>
-        </p:style>
         <p:txBody>
-          <a:bodyPr rtlCol="0" anchor="ctr"/>
+          <a:bodyPr wrap="square" rtlCol="0">
+            <a:spAutoFit/>
+          </a:bodyPr>
           <a:lstStyle/>
           <a:p>
-            <a:pPr algn="ctr"/>
-            <a:endParaRPr lang="en-US">
-              <a:solidFill>
-                <a:schemeClr val="accent6"/>
-              </a:solidFill>
-            </a:endParaRPr>
+            <a:r>
+              <a:rPr lang="en-CA" sz="800" dirty="0"/>
+              <a:t>Total label</a:t>
+            </a:r>
           </a:p>
         </p:txBody>
       </p:sp>
@@ -27503,35 +27638,32 @@
       </p:sp>
       <p:pic>
         <p:nvPicPr>
-          <p:cNvPr id="1026" name="Picture 2"/>
+          <p:cNvPr id="3" name="Picture 2" descr="A screenshot of a computer&#10;&#10;AI-generated content may be incorrect.">
+            <a:extLst>
+              <a:ext uri="{FF2B5EF4-FFF2-40B4-BE49-F238E27FC236}">
+                <a16:creationId xmlns:a16="http://schemas.microsoft.com/office/drawing/2014/main" id="{74FD59F3-876C-A68C-15A4-4B1EE341E034}"/>
+              </a:ext>
+            </a:extLst>
+          </p:cNvPr>
           <p:cNvPicPr>
-            <a:picLocks noChangeAspect="1" noChangeArrowheads="1"/>
+            <a:picLocks noChangeAspect="1"/>
           </p:cNvPicPr>
           <p:nvPr/>
         </p:nvPicPr>
         <p:blipFill>
           <a:blip r:embed="rId3"/>
-          <a:srcRect/>
           <a:stretch>
             <a:fillRect/>
           </a:stretch>
         </p:blipFill>
-        <p:spPr bwMode="auto">
+        <p:spPr>
           <a:xfrm>
-            <a:off x="2204009" y="1565084"/>
-            <a:ext cx="4058860" cy="3157747"/>
+            <a:off x="2019079" y="1638464"/>
+            <a:ext cx="5105842" cy="3132091"/>
           </a:xfrm>
           <a:prstGeom prst="rect">
             <a:avLst/>
           </a:prstGeom>
-          <a:noFill/>
-          <a:ln w="9525">
-            <a:noFill/>
-            <a:miter lim="800000"/>
-            <a:headEnd/>
-            <a:tailEnd/>
-          </a:ln>
-          <a:effectLst/>
         </p:spPr>
       </p:pic>
     </p:spTree>
@@ -28365,2832 +28497,6 @@
   <p:cSld>
     <p:spTree>
       <p:nvGrpSpPr>
-        <p:cNvPr id="1" name="Shape 344">
-          <a:extLst>
-            <a:ext uri="{FF2B5EF4-FFF2-40B4-BE49-F238E27FC236}">
-              <a16:creationId xmlns:a16="http://schemas.microsoft.com/office/drawing/2014/main" id="{8CEDEE0A-D760-12C4-61CC-C0D667161E03}"/>
-            </a:ext>
-          </a:extLst>
-        </p:cNvPr>
-        <p:cNvGrpSpPr/>
-        <p:nvPr/>
-      </p:nvGrpSpPr>
-      <p:grpSpPr>
-        <a:xfrm>
-          <a:off x="0" y="0"/>
-          <a:ext cx="0" cy="0"/>
-          <a:chOff x="0" y="0"/>
-          <a:chExt cx="0" cy="0"/>
-        </a:xfrm>
-      </p:grpSpPr>
-      <p:sp>
-        <p:nvSpPr>
-          <p:cNvPr id="345" name="Google Shape;345;p36">
-            <a:extLst>
-              <a:ext uri="{FF2B5EF4-FFF2-40B4-BE49-F238E27FC236}">
-                <a16:creationId xmlns:a16="http://schemas.microsoft.com/office/drawing/2014/main" id="{BD13D5CC-77BF-6E65-A2D2-76969B90A0F6}"/>
-              </a:ext>
-            </a:extLst>
-          </p:cNvPr>
-          <p:cNvSpPr txBox="1">
-            <a:spLocks noGrp="1"/>
-          </p:cNvSpPr>
-          <p:nvPr>
-            <p:ph type="title"/>
-          </p:nvPr>
-        </p:nvSpPr>
-        <p:spPr>
-          <a:xfrm>
-            <a:off x="1454525" y="1201455"/>
-            <a:ext cx="5836200" cy="1511100"/>
-          </a:xfrm>
-          <a:prstGeom prst="rect">
-            <a:avLst/>
-          </a:prstGeom>
-        </p:spPr>
-        <p:txBody>
-          <a:bodyPr spcFirstLastPara="1" wrap="square" lIns="91425" tIns="91425" rIns="91425" bIns="91425" anchor="b" anchorCtr="0">
-            <a:noAutofit/>
-          </a:bodyPr>
-          <a:lstStyle/>
-          <a:p>
-            <a:pPr marL="0" lvl="0" indent="0" algn="ctr" rtl="0">
-              <a:spcBef>
-                <a:spcPts val="0"/>
-              </a:spcBef>
-              <a:spcAft>
-                <a:spcPts val="0"/>
-              </a:spcAft>
-              <a:buNone/>
-            </a:pPr>
-            <a:r>
-              <a:rPr lang="en" dirty="0"/>
-              <a:t>03</a:t>
-            </a:r>
-            <a:endParaRPr dirty="0"/>
-          </a:p>
-        </p:txBody>
-      </p:sp>
-      <p:sp>
-        <p:nvSpPr>
-          <p:cNvPr id="347" name="Google Shape;347;p36">
-            <a:extLst>
-              <a:ext uri="{FF2B5EF4-FFF2-40B4-BE49-F238E27FC236}">
-                <a16:creationId xmlns:a16="http://schemas.microsoft.com/office/drawing/2014/main" id="{75CCAC5B-979E-34F9-5037-F7EA000FE375}"/>
-              </a:ext>
-            </a:extLst>
-          </p:cNvPr>
-          <p:cNvSpPr/>
-          <p:nvPr/>
-        </p:nvSpPr>
-        <p:spPr>
-          <a:xfrm>
-            <a:off x="7020299" y="4089550"/>
-            <a:ext cx="2123739" cy="1053969"/>
-          </a:xfrm>
-          <a:custGeom>
-            <a:avLst/>
-            <a:gdLst/>
-            <a:ahLst/>
-            <a:cxnLst/>
-            <a:rect l="l" t="t" r="r" b="b"/>
-            <a:pathLst>
-              <a:path w="83064" h="41223" extrusionOk="0">
-                <a:moveTo>
-                  <a:pt x="1958" y="1"/>
-                </a:moveTo>
-                <a:cubicBezTo>
-                  <a:pt x="1411" y="1"/>
-                  <a:pt x="865" y="223"/>
-                  <a:pt x="467" y="671"/>
-                </a:cubicBezTo>
-                <a:cubicBezTo>
-                  <a:pt x="23" y="1185"/>
-                  <a:pt x="0" y="1780"/>
-                  <a:pt x="58" y="2387"/>
-                </a:cubicBezTo>
-                <a:cubicBezTo>
-                  <a:pt x="175" y="3391"/>
-                  <a:pt x="665" y="4255"/>
-                  <a:pt x="1191" y="5095"/>
-                </a:cubicBezTo>
-                <a:cubicBezTo>
-                  <a:pt x="2533" y="7197"/>
-                  <a:pt x="4121" y="9146"/>
-                  <a:pt x="5906" y="10897"/>
-                </a:cubicBezTo>
-                <a:cubicBezTo>
-                  <a:pt x="6840" y="11819"/>
-                  <a:pt x="7832" y="12683"/>
-                  <a:pt x="8825" y="13547"/>
-                </a:cubicBezTo>
-                <a:cubicBezTo>
-                  <a:pt x="10821" y="15227"/>
-                  <a:pt x="12933" y="16780"/>
-                  <a:pt x="15140" y="18181"/>
-                </a:cubicBezTo>
-                <a:cubicBezTo>
-                  <a:pt x="17719" y="19838"/>
-                  <a:pt x="20451" y="21216"/>
-                  <a:pt x="23171" y="22605"/>
-                </a:cubicBezTo>
-                <a:cubicBezTo>
-                  <a:pt x="24968" y="23538"/>
-                  <a:pt x="26766" y="24461"/>
-                  <a:pt x="28540" y="25429"/>
-                </a:cubicBezTo>
-                <a:cubicBezTo>
-                  <a:pt x="29112" y="25745"/>
-                  <a:pt x="29602" y="26176"/>
-                  <a:pt x="30081" y="26620"/>
-                </a:cubicBezTo>
-                <a:cubicBezTo>
-                  <a:pt x="30221" y="26783"/>
-                  <a:pt x="30268" y="27017"/>
-                  <a:pt x="30209" y="27227"/>
-                </a:cubicBezTo>
-                <a:cubicBezTo>
-                  <a:pt x="30127" y="27402"/>
-                  <a:pt x="29859" y="27542"/>
-                  <a:pt x="29649" y="27589"/>
-                </a:cubicBezTo>
-                <a:cubicBezTo>
-                  <a:pt x="29582" y="27596"/>
-                  <a:pt x="29514" y="27600"/>
-                  <a:pt x="29445" y="27600"/>
-                </a:cubicBezTo>
-                <a:cubicBezTo>
-                  <a:pt x="29287" y="27600"/>
-                  <a:pt x="29127" y="27579"/>
-                  <a:pt x="28972" y="27531"/>
-                </a:cubicBezTo>
-                <a:cubicBezTo>
-                  <a:pt x="28575" y="27437"/>
-                  <a:pt x="28190" y="27297"/>
-                  <a:pt x="27793" y="27204"/>
-                </a:cubicBezTo>
-                <a:cubicBezTo>
-                  <a:pt x="27428" y="27131"/>
-                  <a:pt x="27068" y="27029"/>
-                  <a:pt x="26695" y="27029"/>
-                </a:cubicBezTo>
-                <a:cubicBezTo>
-                  <a:pt x="26531" y="27029"/>
-                  <a:pt x="26364" y="27049"/>
-                  <a:pt x="26194" y="27099"/>
-                </a:cubicBezTo>
-                <a:cubicBezTo>
-                  <a:pt x="25598" y="27285"/>
-                  <a:pt x="25237" y="27752"/>
-                  <a:pt x="25435" y="28336"/>
-                </a:cubicBezTo>
-                <a:cubicBezTo>
-                  <a:pt x="25587" y="28756"/>
-                  <a:pt x="25820" y="29141"/>
-                  <a:pt x="26124" y="29468"/>
-                </a:cubicBezTo>
-                <a:cubicBezTo>
-                  <a:pt x="27279" y="30659"/>
-                  <a:pt x="28703" y="31453"/>
-                  <a:pt x="30268" y="31955"/>
-                </a:cubicBezTo>
-                <a:cubicBezTo>
-                  <a:pt x="32240" y="32597"/>
-                  <a:pt x="34260" y="33122"/>
-                  <a:pt x="36256" y="33717"/>
-                </a:cubicBezTo>
-                <a:cubicBezTo>
-                  <a:pt x="37108" y="33974"/>
-                  <a:pt x="37948" y="34277"/>
-                  <a:pt x="38684" y="34814"/>
-                </a:cubicBezTo>
-                <a:cubicBezTo>
-                  <a:pt x="39174" y="35188"/>
-                  <a:pt x="39197" y="35772"/>
-                  <a:pt x="38684" y="36110"/>
-                </a:cubicBezTo>
-                <a:cubicBezTo>
-                  <a:pt x="38322" y="36344"/>
-                  <a:pt x="37925" y="36519"/>
-                  <a:pt x="37505" y="36624"/>
-                </a:cubicBezTo>
-                <a:cubicBezTo>
-                  <a:pt x="36862" y="36788"/>
-                  <a:pt x="36214" y="36848"/>
-                  <a:pt x="35560" y="36848"/>
-                </a:cubicBezTo>
-                <a:cubicBezTo>
-                  <a:pt x="35241" y="36848"/>
-                  <a:pt x="34920" y="36833"/>
-                  <a:pt x="34598" y="36810"/>
-                </a:cubicBezTo>
-                <a:cubicBezTo>
-                  <a:pt x="33081" y="36717"/>
-                  <a:pt x="31587" y="36425"/>
-                  <a:pt x="30139" y="35947"/>
-                </a:cubicBezTo>
-                <a:cubicBezTo>
-                  <a:pt x="27921" y="35188"/>
-                  <a:pt x="25703" y="34406"/>
-                  <a:pt x="23521" y="33542"/>
-                </a:cubicBezTo>
-                <a:cubicBezTo>
-                  <a:pt x="21922" y="32912"/>
-                  <a:pt x="20381" y="32141"/>
-                  <a:pt x="18828" y="31406"/>
-                </a:cubicBezTo>
-                <a:cubicBezTo>
-                  <a:pt x="18268" y="31149"/>
-                  <a:pt x="17766" y="30787"/>
-                  <a:pt x="17194" y="30589"/>
-                </a:cubicBezTo>
-                <a:cubicBezTo>
-                  <a:pt x="16991" y="30519"/>
-                  <a:pt x="16792" y="30485"/>
-                  <a:pt x="16606" y="30485"/>
-                </a:cubicBezTo>
-                <a:cubicBezTo>
-                  <a:pt x="15895" y="30485"/>
-                  <a:pt x="15362" y="30982"/>
-                  <a:pt x="15408" y="31861"/>
-                </a:cubicBezTo>
-                <a:cubicBezTo>
-                  <a:pt x="15420" y="32176"/>
-                  <a:pt x="15502" y="32503"/>
-                  <a:pt x="15642" y="32795"/>
-                </a:cubicBezTo>
-                <a:cubicBezTo>
-                  <a:pt x="16062" y="33740"/>
-                  <a:pt x="16809" y="34429"/>
-                  <a:pt x="17673" y="34943"/>
-                </a:cubicBezTo>
-                <a:cubicBezTo>
-                  <a:pt x="18758" y="35608"/>
-                  <a:pt x="19890" y="36215"/>
-                  <a:pt x="21034" y="36775"/>
-                </a:cubicBezTo>
-                <a:cubicBezTo>
-                  <a:pt x="23439" y="37931"/>
-                  <a:pt x="25937" y="38853"/>
-                  <a:pt x="28517" y="39530"/>
-                </a:cubicBezTo>
-                <a:cubicBezTo>
-                  <a:pt x="30513" y="40067"/>
-                  <a:pt x="32544" y="40487"/>
-                  <a:pt x="34563" y="40919"/>
-                </a:cubicBezTo>
-                <a:cubicBezTo>
-                  <a:pt x="35287" y="41094"/>
-                  <a:pt x="36034" y="41199"/>
-                  <a:pt x="36781" y="41211"/>
-                </a:cubicBezTo>
-                <a:cubicBezTo>
-                  <a:pt x="52072" y="41223"/>
-                  <a:pt x="67375" y="41223"/>
-                  <a:pt x="82667" y="41223"/>
-                </a:cubicBezTo>
-                <a:lnTo>
-                  <a:pt x="83063" y="41223"/>
-                </a:lnTo>
-                <a:lnTo>
-                  <a:pt x="83063" y="13967"/>
-                </a:lnTo>
-                <a:cubicBezTo>
-                  <a:pt x="81908" y="14200"/>
-                  <a:pt x="80799" y="14375"/>
-                  <a:pt x="79690" y="14644"/>
-                </a:cubicBezTo>
-                <a:cubicBezTo>
-                  <a:pt x="77846" y="15076"/>
-                  <a:pt x="76013" y="15531"/>
-                  <a:pt x="74192" y="16033"/>
-                </a:cubicBezTo>
-                <a:cubicBezTo>
-                  <a:pt x="72219" y="16558"/>
-                  <a:pt x="70247" y="17130"/>
-                  <a:pt x="68286" y="17702"/>
-                </a:cubicBezTo>
-                <a:cubicBezTo>
-                  <a:pt x="66430" y="18251"/>
-                  <a:pt x="64585" y="18846"/>
-                  <a:pt x="62730" y="19383"/>
-                </a:cubicBezTo>
-                <a:cubicBezTo>
-                  <a:pt x="60920" y="19920"/>
-                  <a:pt x="59088" y="20410"/>
-                  <a:pt x="57278" y="20924"/>
-                </a:cubicBezTo>
-                <a:cubicBezTo>
-                  <a:pt x="55796" y="21344"/>
-                  <a:pt x="54278" y="21577"/>
-                  <a:pt x="52749" y="21589"/>
-                </a:cubicBezTo>
-                <a:cubicBezTo>
-                  <a:pt x="52598" y="21593"/>
-                  <a:pt x="52446" y="21594"/>
-                  <a:pt x="52295" y="21594"/>
-                </a:cubicBezTo>
-                <a:cubicBezTo>
-                  <a:pt x="50941" y="21594"/>
-                  <a:pt x="49588" y="21455"/>
-                  <a:pt x="48255" y="21192"/>
-                </a:cubicBezTo>
-                <a:cubicBezTo>
-                  <a:pt x="46703" y="20877"/>
-                  <a:pt x="45150" y="20527"/>
-                  <a:pt x="43598" y="20188"/>
-                </a:cubicBezTo>
-                <a:cubicBezTo>
-                  <a:pt x="42839" y="20025"/>
-                  <a:pt x="42080" y="19815"/>
-                  <a:pt x="41310" y="19721"/>
-                </a:cubicBezTo>
-                <a:cubicBezTo>
-                  <a:pt x="41236" y="19713"/>
-                  <a:pt x="41162" y="19709"/>
-                  <a:pt x="41090" y="19709"/>
-                </a:cubicBezTo>
-                <a:cubicBezTo>
-                  <a:pt x="40278" y="19709"/>
-                  <a:pt x="39629" y="20244"/>
-                  <a:pt x="39758" y="21134"/>
-                </a:cubicBezTo>
-                <a:cubicBezTo>
-                  <a:pt x="39851" y="21647"/>
-                  <a:pt x="40213" y="21928"/>
-                  <a:pt x="40633" y="22173"/>
-                </a:cubicBezTo>
-                <a:cubicBezTo>
-                  <a:pt x="41088" y="22395"/>
-                  <a:pt x="41520" y="22663"/>
-                  <a:pt x="41929" y="22955"/>
-                </a:cubicBezTo>
-                <a:cubicBezTo>
-                  <a:pt x="42255" y="23223"/>
-                  <a:pt x="42255" y="23620"/>
-                  <a:pt x="41929" y="23889"/>
-                </a:cubicBezTo>
-                <a:cubicBezTo>
-                  <a:pt x="41532" y="24215"/>
-                  <a:pt x="41088" y="24484"/>
-                  <a:pt x="40610" y="24671"/>
-                </a:cubicBezTo>
-                <a:cubicBezTo>
-                  <a:pt x="39805" y="24960"/>
-                  <a:pt x="38980" y="25081"/>
-                  <a:pt x="38137" y="25081"/>
-                </a:cubicBezTo>
-                <a:cubicBezTo>
-                  <a:pt x="37720" y="25081"/>
-                  <a:pt x="37299" y="25052"/>
-                  <a:pt x="36874" y="24998"/>
-                </a:cubicBezTo>
-                <a:cubicBezTo>
-                  <a:pt x="35812" y="24869"/>
-                  <a:pt x="34762" y="24706"/>
-                  <a:pt x="33793" y="24286"/>
-                </a:cubicBezTo>
-                <a:cubicBezTo>
-                  <a:pt x="31295" y="23223"/>
-                  <a:pt x="28820" y="22138"/>
-                  <a:pt x="26392" y="20947"/>
-                </a:cubicBezTo>
-                <a:cubicBezTo>
-                  <a:pt x="24606" y="20083"/>
-                  <a:pt x="22879" y="19091"/>
-                  <a:pt x="21174" y="18064"/>
-                </a:cubicBezTo>
-                <a:cubicBezTo>
-                  <a:pt x="18070" y="16208"/>
-                  <a:pt x="15210" y="13990"/>
-                  <a:pt x="12630" y="11457"/>
-                </a:cubicBezTo>
-                <a:cubicBezTo>
-                  <a:pt x="11533" y="10383"/>
-                  <a:pt x="10471" y="9274"/>
-                  <a:pt x="9455" y="8119"/>
-                </a:cubicBezTo>
-                <a:cubicBezTo>
-                  <a:pt x="8229" y="6753"/>
-                  <a:pt x="7062" y="5341"/>
-                  <a:pt x="5918" y="3916"/>
-                </a:cubicBezTo>
-                <a:cubicBezTo>
-                  <a:pt x="5089" y="2889"/>
-                  <a:pt x="4354" y="1792"/>
-                  <a:pt x="3549" y="776"/>
-                </a:cubicBezTo>
-                <a:cubicBezTo>
-                  <a:pt x="3142" y="261"/>
-                  <a:pt x="2550" y="1"/>
-                  <a:pt x="1958" y="1"/>
-                </a:cubicBezTo>
-                <a:close/>
-              </a:path>
-            </a:pathLst>
-          </a:custGeom>
-          <a:solidFill>
-            <a:schemeClr val="lt2"/>
-          </a:solidFill>
-          <a:ln>
-            <a:noFill/>
-          </a:ln>
-        </p:spPr>
-        <p:txBody>
-          <a:bodyPr spcFirstLastPara="1" wrap="square" lIns="91425" tIns="91425" rIns="91425" bIns="91425" anchor="ctr" anchorCtr="0">
-            <a:noAutofit/>
-          </a:bodyPr>
-          <a:lstStyle/>
-          <a:p>
-            <a:pPr marL="0" lvl="0" indent="0" algn="l" rtl="0">
-              <a:spcBef>
-                <a:spcPts val="0"/>
-              </a:spcBef>
-              <a:spcAft>
-                <a:spcPts val="0"/>
-              </a:spcAft>
-              <a:buNone/>
-            </a:pPr>
-            <a:endParaRPr/>
-          </a:p>
-        </p:txBody>
-      </p:sp>
-      <p:sp>
-        <p:nvSpPr>
-          <p:cNvPr id="348" name="Google Shape;348;p36">
-            <a:extLst>
-              <a:ext uri="{FF2B5EF4-FFF2-40B4-BE49-F238E27FC236}">
-                <a16:creationId xmlns:a16="http://schemas.microsoft.com/office/drawing/2014/main" id="{4E05CB1A-5860-FCCB-798C-42A3C38AF92D}"/>
-              </a:ext>
-            </a:extLst>
-          </p:cNvPr>
-          <p:cNvSpPr/>
-          <p:nvPr/>
-        </p:nvSpPr>
-        <p:spPr>
-          <a:xfrm>
-            <a:off x="0" y="3794725"/>
-            <a:ext cx="2307425" cy="1348800"/>
-          </a:xfrm>
-          <a:custGeom>
-            <a:avLst/>
-            <a:gdLst/>
-            <a:ahLst/>
-            <a:cxnLst/>
-            <a:rect l="l" t="t" r="r" b="b"/>
-            <a:pathLst>
-              <a:path w="92297" h="53952" extrusionOk="0">
-                <a:moveTo>
-                  <a:pt x="38287" y="1"/>
-                </a:moveTo>
-                <a:cubicBezTo>
-                  <a:pt x="37676" y="1"/>
-                  <a:pt x="37064" y="10"/>
-                  <a:pt x="36454" y="35"/>
-                </a:cubicBezTo>
-                <a:cubicBezTo>
-                  <a:pt x="34843" y="117"/>
-                  <a:pt x="33232" y="292"/>
-                  <a:pt x="31645" y="584"/>
-                </a:cubicBezTo>
-                <a:cubicBezTo>
-                  <a:pt x="29766" y="899"/>
-                  <a:pt x="27898" y="1307"/>
-                  <a:pt x="26042" y="1774"/>
-                </a:cubicBezTo>
-                <a:cubicBezTo>
-                  <a:pt x="23976" y="2300"/>
-                  <a:pt x="21980" y="3058"/>
-                  <a:pt x="20019" y="3899"/>
-                </a:cubicBezTo>
-                <a:cubicBezTo>
-                  <a:pt x="17462" y="4984"/>
-                  <a:pt x="15000" y="6257"/>
-                  <a:pt x="12700" y="7821"/>
-                </a:cubicBezTo>
-                <a:cubicBezTo>
-                  <a:pt x="10972" y="8988"/>
-                  <a:pt x="9280" y="10225"/>
-                  <a:pt x="7692" y="11556"/>
-                </a:cubicBezTo>
-                <a:cubicBezTo>
-                  <a:pt x="6198" y="12817"/>
-                  <a:pt x="4786" y="14159"/>
-                  <a:pt x="3455" y="15583"/>
-                </a:cubicBezTo>
-                <a:cubicBezTo>
-                  <a:pt x="2276" y="16821"/>
-                  <a:pt x="1237" y="18198"/>
-                  <a:pt x="152" y="19517"/>
-                </a:cubicBezTo>
-                <a:cubicBezTo>
-                  <a:pt x="47" y="19692"/>
-                  <a:pt x="0" y="19891"/>
-                  <a:pt x="12" y="20089"/>
-                </a:cubicBezTo>
-                <a:lnTo>
-                  <a:pt x="12" y="43119"/>
-                </a:lnTo>
-                <a:lnTo>
-                  <a:pt x="12" y="53952"/>
-                </a:lnTo>
-                <a:lnTo>
-                  <a:pt x="92227" y="53952"/>
-                </a:lnTo>
-                <a:cubicBezTo>
-                  <a:pt x="92262" y="53928"/>
-                  <a:pt x="92273" y="53847"/>
-                  <a:pt x="92297" y="53800"/>
-                </a:cubicBezTo>
-                <a:lnTo>
-                  <a:pt x="87919" y="53788"/>
-                </a:lnTo>
-                <a:cubicBezTo>
-                  <a:pt x="87966" y="53170"/>
-                  <a:pt x="88036" y="52574"/>
-                  <a:pt x="88048" y="51979"/>
-                </a:cubicBezTo>
-                <a:cubicBezTo>
-                  <a:pt x="88094" y="50263"/>
-                  <a:pt x="88153" y="48547"/>
-                  <a:pt x="88129" y="46820"/>
-                </a:cubicBezTo>
-                <a:cubicBezTo>
-                  <a:pt x="88094" y="45617"/>
-                  <a:pt x="88001" y="44415"/>
-                  <a:pt x="87849" y="43224"/>
-                </a:cubicBezTo>
-                <a:cubicBezTo>
-                  <a:pt x="87557" y="40820"/>
-                  <a:pt x="87172" y="38427"/>
-                  <a:pt x="86472" y="36116"/>
-                </a:cubicBezTo>
-                <a:cubicBezTo>
-                  <a:pt x="85900" y="34260"/>
-                  <a:pt x="85316" y="32392"/>
-                  <a:pt x="84628" y="30571"/>
-                </a:cubicBezTo>
-                <a:cubicBezTo>
-                  <a:pt x="83659" y="28096"/>
-                  <a:pt x="82468" y="25704"/>
-                  <a:pt x="81067" y="23451"/>
-                </a:cubicBezTo>
-                <a:cubicBezTo>
-                  <a:pt x="79632" y="21081"/>
-                  <a:pt x="77997" y="18852"/>
-                  <a:pt x="76176" y="16786"/>
-                </a:cubicBezTo>
-                <a:cubicBezTo>
-                  <a:pt x="75336" y="15840"/>
-                  <a:pt x="74484" y="14883"/>
-                  <a:pt x="73585" y="13996"/>
-                </a:cubicBezTo>
-                <a:cubicBezTo>
-                  <a:pt x="69710" y="10179"/>
-                  <a:pt x="65239" y="7039"/>
-                  <a:pt x="60348" y="4693"/>
-                </a:cubicBezTo>
-                <a:cubicBezTo>
-                  <a:pt x="58422" y="3759"/>
-                  <a:pt x="56438" y="2977"/>
-                  <a:pt x="54395" y="2358"/>
-                </a:cubicBezTo>
-                <a:cubicBezTo>
-                  <a:pt x="52609" y="1821"/>
-                  <a:pt x="50812" y="1342"/>
-                  <a:pt x="48991" y="922"/>
-                </a:cubicBezTo>
-                <a:cubicBezTo>
-                  <a:pt x="47905" y="677"/>
-                  <a:pt x="46796" y="502"/>
-                  <a:pt x="45687" y="385"/>
-                </a:cubicBezTo>
-                <a:cubicBezTo>
-                  <a:pt x="44637" y="245"/>
-                  <a:pt x="43586" y="128"/>
-                  <a:pt x="42524" y="93"/>
-                </a:cubicBezTo>
-                <a:cubicBezTo>
-                  <a:pt x="41115" y="53"/>
-                  <a:pt x="39700" y="1"/>
-                  <a:pt x="38287" y="1"/>
-                </a:cubicBezTo>
-                <a:close/>
-              </a:path>
-            </a:pathLst>
-          </a:custGeom>
-          <a:solidFill>
-            <a:schemeClr val="accent1"/>
-          </a:solidFill>
-          <a:ln>
-            <a:noFill/>
-          </a:ln>
-        </p:spPr>
-        <p:txBody>
-          <a:bodyPr spcFirstLastPara="1" wrap="square" lIns="91425" tIns="91425" rIns="91425" bIns="91425" anchor="ctr" anchorCtr="0">
-            <a:noAutofit/>
-          </a:bodyPr>
-          <a:lstStyle/>
-          <a:p>
-            <a:pPr marL="0" lvl="0" indent="0" algn="l" rtl="0">
-              <a:spcBef>
-                <a:spcPts val="0"/>
-              </a:spcBef>
-              <a:spcAft>
-                <a:spcPts val="0"/>
-              </a:spcAft>
-              <a:buNone/>
-            </a:pPr>
-            <a:endParaRPr/>
-          </a:p>
-        </p:txBody>
-      </p:sp>
-      <p:grpSp>
-        <p:nvGrpSpPr>
-          <p:cNvPr id="349" name="Google Shape;349;p36">
-            <a:extLst>
-              <a:ext uri="{FF2B5EF4-FFF2-40B4-BE49-F238E27FC236}">
-                <a16:creationId xmlns:a16="http://schemas.microsoft.com/office/drawing/2014/main" id="{6EA424CB-9632-D2B5-C7BC-48BBBE27F593}"/>
-              </a:ext>
-            </a:extLst>
-          </p:cNvPr>
-          <p:cNvGrpSpPr/>
-          <p:nvPr/>
-        </p:nvGrpSpPr>
-        <p:grpSpPr>
-          <a:xfrm>
-            <a:off x="1101425" y="4597125"/>
-            <a:ext cx="469550" cy="374575"/>
-            <a:chOff x="1101425" y="4597125"/>
-            <a:chExt cx="469550" cy="374575"/>
-          </a:xfrm>
-        </p:grpSpPr>
-        <p:sp>
-          <p:nvSpPr>
-            <p:cNvPr id="350" name="Google Shape;350;p36">
-              <a:extLst>
-                <a:ext uri="{FF2B5EF4-FFF2-40B4-BE49-F238E27FC236}">
-                  <a16:creationId xmlns:a16="http://schemas.microsoft.com/office/drawing/2014/main" id="{8BCE8F58-782F-3D4C-E18F-D2CEE3DA9E11}"/>
-                </a:ext>
-              </a:extLst>
-            </p:cNvPr>
-            <p:cNvSpPr/>
-            <p:nvPr/>
-          </p:nvSpPr>
-          <p:spPr>
-            <a:xfrm>
-              <a:off x="1101425" y="4597125"/>
-              <a:ext cx="438050" cy="283250"/>
-            </a:xfrm>
-            <a:custGeom>
-              <a:avLst/>
-              <a:gdLst/>
-              <a:ahLst/>
-              <a:cxnLst/>
-              <a:rect l="l" t="t" r="r" b="b"/>
-              <a:pathLst>
-                <a:path w="17522" h="11330" extrusionOk="0">
-                  <a:moveTo>
-                    <a:pt x="12099" y="0"/>
-                  </a:moveTo>
-                  <a:cubicBezTo>
-                    <a:pt x="11486" y="0"/>
-                    <a:pt x="10870" y="51"/>
-                    <a:pt x="10261" y="146"/>
-                  </a:cubicBezTo>
-                  <a:cubicBezTo>
-                    <a:pt x="9607" y="228"/>
-                    <a:pt x="8965" y="357"/>
-                    <a:pt x="8335" y="532"/>
-                  </a:cubicBezTo>
-                  <a:cubicBezTo>
-                    <a:pt x="7086" y="870"/>
-                    <a:pt x="5895" y="1407"/>
-                    <a:pt x="4809" y="2119"/>
-                  </a:cubicBezTo>
-                  <a:cubicBezTo>
-                    <a:pt x="3467" y="2971"/>
-                    <a:pt x="2276" y="4057"/>
-                    <a:pt x="1308" y="5318"/>
-                  </a:cubicBezTo>
-                  <a:cubicBezTo>
-                    <a:pt x="432" y="6438"/>
-                    <a:pt x="0" y="7699"/>
-                    <a:pt x="199" y="9135"/>
-                  </a:cubicBezTo>
-                  <a:cubicBezTo>
-                    <a:pt x="257" y="9660"/>
-                    <a:pt x="409" y="10162"/>
-                    <a:pt x="654" y="10640"/>
-                  </a:cubicBezTo>
-                  <a:cubicBezTo>
-                    <a:pt x="829" y="11014"/>
-                    <a:pt x="1121" y="11271"/>
-                    <a:pt x="1553" y="11306"/>
-                  </a:cubicBezTo>
-                  <a:cubicBezTo>
-                    <a:pt x="1833" y="11329"/>
-                    <a:pt x="2101" y="11329"/>
-                    <a:pt x="2381" y="11329"/>
-                  </a:cubicBezTo>
-                  <a:cubicBezTo>
-                    <a:pt x="3140" y="11317"/>
-                    <a:pt x="3899" y="11177"/>
-                    <a:pt x="4623" y="10909"/>
-                  </a:cubicBezTo>
-                  <a:cubicBezTo>
-                    <a:pt x="6269" y="10325"/>
-                    <a:pt x="7447" y="9193"/>
-                    <a:pt x="8405" y="7769"/>
-                  </a:cubicBezTo>
-                  <a:cubicBezTo>
-                    <a:pt x="8813" y="7162"/>
-                    <a:pt x="9257" y="6578"/>
-                    <a:pt x="9747" y="6018"/>
-                  </a:cubicBezTo>
-                  <a:cubicBezTo>
-                    <a:pt x="10459" y="5224"/>
-                    <a:pt x="11346" y="4594"/>
-                    <a:pt x="12338" y="4174"/>
-                  </a:cubicBezTo>
-                  <a:cubicBezTo>
-                    <a:pt x="12969" y="3893"/>
-                    <a:pt x="13634" y="3707"/>
-                    <a:pt x="14323" y="3602"/>
-                  </a:cubicBezTo>
-                  <a:cubicBezTo>
-                    <a:pt x="15011" y="3497"/>
-                    <a:pt x="15712" y="3415"/>
-                    <a:pt x="16412" y="3310"/>
-                  </a:cubicBezTo>
-                  <a:cubicBezTo>
-                    <a:pt x="16774" y="3275"/>
-                    <a:pt x="17124" y="3193"/>
-                    <a:pt x="17521" y="3123"/>
-                  </a:cubicBezTo>
-                  <a:cubicBezTo>
-                    <a:pt x="17439" y="2983"/>
-                    <a:pt x="17369" y="2866"/>
-                    <a:pt x="17311" y="2761"/>
-                  </a:cubicBezTo>
-                  <a:cubicBezTo>
-                    <a:pt x="16307" y="964"/>
-                    <a:pt x="14743" y="100"/>
-                    <a:pt x="12724" y="18"/>
-                  </a:cubicBezTo>
-                  <a:cubicBezTo>
-                    <a:pt x="12516" y="6"/>
-                    <a:pt x="12308" y="0"/>
-                    <a:pt x="12099" y="0"/>
-                  </a:cubicBezTo>
-                  <a:close/>
-                </a:path>
-              </a:pathLst>
-            </a:custGeom>
-            <a:solidFill>
-              <a:schemeClr val="dk1"/>
-            </a:solidFill>
-            <a:ln>
-              <a:noFill/>
-            </a:ln>
-          </p:spPr>
-          <p:txBody>
-            <a:bodyPr spcFirstLastPara="1" wrap="square" lIns="91425" tIns="91425" rIns="91425" bIns="91425" anchor="ctr" anchorCtr="0">
-              <a:noAutofit/>
-            </a:bodyPr>
-            <a:lstStyle/>
-            <a:p>
-              <a:pPr marL="0" lvl="0" indent="0" algn="l" rtl="0">
-                <a:spcBef>
-                  <a:spcPts val="0"/>
-                </a:spcBef>
-                <a:spcAft>
-                  <a:spcPts val="0"/>
-                </a:spcAft>
-                <a:buNone/>
-              </a:pPr>
-              <a:endParaRPr/>
-            </a:p>
-          </p:txBody>
-        </p:sp>
-        <p:sp>
-          <p:nvSpPr>
-            <p:cNvPr id="351" name="Google Shape;351;p36">
-              <a:extLst>
-                <a:ext uri="{FF2B5EF4-FFF2-40B4-BE49-F238E27FC236}">
-                  <a16:creationId xmlns:a16="http://schemas.microsoft.com/office/drawing/2014/main" id="{ACE09898-8959-6531-8ADA-6CD090BC55B3}"/>
-                </a:ext>
-              </a:extLst>
-            </p:cNvPr>
-            <p:cNvSpPr/>
-            <p:nvPr/>
-          </p:nvSpPr>
-          <p:spPr>
-            <a:xfrm>
-              <a:off x="1148975" y="4706625"/>
-              <a:ext cx="422000" cy="265075"/>
-            </a:xfrm>
-            <a:custGeom>
-              <a:avLst/>
-              <a:gdLst/>
-              <a:ahLst/>
-              <a:cxnLst/>
-              <a:rect l="l" t="t" r="r" b="b"/>
-              <a:pathLst>
-                <a:path w="16880" h="10603" extrusionOk="0">
-                  <a:moveTo>
-                    <a:pt x="15934" y="0"/>
-                  </a:moveTo>
-                  <a:cubicBezTo>
-                    <a:pt x="15911" y="0"/>
-                    <a:pt x="15888" y="1"/>
-                    <a:pt x="15864" y="4"/>
-                  </a:cubicBezTo>
-                  <a:cubicBezTo>
-                    <a:pt x="15339" y="15"/>
-                    <a:pt x="14825" y="62"/>
-                    <a:pt x="14312" y="132"/>
-                  </a:cubicBezTo>
-                  <a:cubicBezTo>
-                    <a:pt x="13214" y="296"/>
-                    <a:pt x="12141" y="611"/>
-                    <a:pt x="11113" y="1054"/>
-                  </a:cubicBezTo>
-                  <a:cubicBezTo>
-                    <a:pt x="10308" y="1428"/>
-                    <a:pt x="9561" y="1918"/>
-                    <a:pt x="8896" y="2525"/>
-                  </a:cubicBezTo>
-                  <a:cubicBezTo>
-                    <a:pt x="8102" y="3260"/>
-                    <a:pt x="7448" y="4148"/>
-                    <a:pt x="6970" y="5116"/>
-                  </a:cubicBezTo>
-                  <a:cubicBezTo>
-                    <a:pt x="6573" y="5863"/>
-                    <a:pt x="6001" y="6517"/>
-                    <a:pt x="5300" y="6996"/>
-                  </a:cubicBezTo>
-                  <a:cubicBezTo>
-                    <a:pt x="4308" y="7661"/>
-                    <a:pt x="3188" y="7918"/>
-                    <a:pt x="2020" y="8035"/>
-                  </a:cubicBezTo>
-                  <a:cubicBezTo>
-                    <a:pt x="1460" y="8093"/>
-                    <a:pt x="900" y="8163"/>
-                    <a:pt x="339" y="8233"/>
-                  </a:cubicBezTo>
-                  <a:cubicBezTo>
-                    <a:pt x="246" y="8245"/>
-                    <a:pt x="141" y="8256"/>
-                    <a:pt x="48" y="8280"/>
-                  </a:cubicBezTo>
-                  <a:lnTo>
-                    <a:pt x="1" y="8361"/>
-                  </a:lnTo>
-                  <a:cubicBezTo>
-                    <a:pt x="409" y="8723"/>
-                    <a:pt x="783" y="9108"/>
-                    <a:pt x="1203" y="9435"/>
-                  </a:cubicBezTo>
-                  <a:cubicBezTo>
-                    <a:pt x="2160" y="10182"/>
-                    <a:pt x="3281" y="10498"/>
-                    <a:pt x="4460" y="10568"/>
-                  </a:cubicBezTo>
-                  <a:cubicBezTo>
-                    <a:pt x="4814" y="10591"/>
-                    <a:pt x="5167" y="10603"/>
-                    <a:pt x="5519" y="10603"/>
-                  </a:cubicBezTo>
-                  <a:cubicBezTo>
-                    <a:pt x="6222" y="10603"/>
-                    <a:pt x="6923" y="10556"/>
-                    <a:pt x="7623" y="10463"/>
-                  </a:cubicBezTo>
-                  <a:cubicBezTo>
-                    <a:pt x="8569" y="10322"/>
-                    <a:pt x="9491" y="10066"/>
-                    <a:pt x="10366" y="9715"/>
-                  </a:cubicBezTo>
-                  <a:cubicBezTo>
-                    <a:pt x="11160" y="9389"/>
-                    <a:pt x="11907" y="8980"/>
-                    <a:pt x="12608" y="8478"/>
-                  </a:cubicBezTo>
-                  <a:cubicBezTo>
-                    <a:pt x="13460" y="7871"/>
-                    <a:pt x="14242" y="7147"/>
-                    <a:pt x="14930" y="6342"/>
-                  </a:cubicBezTo>
-                  <a:cubicBezTo>
-                    <a:pt x="15409" y="5758"/>
-                    <a:pt x="15899" y="5163"/>
-                    <a:pt x="16238" y="4474"/>
-                  </a:cubicBezTo>
-                  <a:cubicBezTo>
-                    <a:pt x="16541" y="3879"/>
-                    <a:pt x="16728" y="3237"/>
-                    <a:pt x="16798" y="2572"/>
-                  </a:cubicBezTo>
-                  <a:cubicBezTo>
-                    <a:pt x="16880" y="1871"/>
-                    <a:pt x="16821" y="1183"/>
-                    <a:pt x="16611" y="517"/>
-                  </a:cubicBezTo>
-                  <a:cubicBezTo>
-                    <a:pt x="16524" y="213"/>
-                    <a:pt x="16246" y="0"/>
-                    <a:pt x="15934" y="0"/>
-                  </a:cubicBezTo>
-                  <a:close/>
-                </a:path>
-              </a:pathLst>
-            </a:custGeom>
-            <a:solidFill>
-              <a:schemeClr val="dk1"/>
-            </a:solidFill>
-            <a:ln>
-              <a:noFill/>
-            </a:ln>
-          </p:spPr>
-          <p:txBody>
-            <a:bodyPr spcFirstLastPara="1" wrap="square" lIns="91425" tIns="91425" rIns="91425" bIns="91425" anchor="ctr" anchorCtr="0">
-              <a:noAutofit/>
-            </a:bodyPr>
-            <a:lstStyle/>
-            <a:p>
-              <a:pPr marL="0" lvl="0" indent="0" algn="l" rtl="0">
-                <a:spcBef>
-                  <a:spcPts val="0"/>
-                </a:spcBef>
-                <a:spcAft>
-                  <a:spcPts val="0"/>
-                </a:spcAft>
-                <a:buNone/>
-              </a:pPr>
-              <a:endParaRPr/>
-            </a:p>
-          </p:txBody>
-        </p:sp>
-      </p:grpSp>
-      <p:grpSp>
-        <p:nvGrpSpPr>
-          <p:cNvPr id="352" name="Google Shape;352;p36">
-            <a:extLst>
-              <a:ext uri="{FF2B5EF4-FFF2-40B4-BE49-F238E27FC236}">
-                <a16:creationId xmlns:a16="http://schemas.microsoft.com/office/drawing/2014/main" id="{C15BE8D2-8674-4D0D-5813-0E70674DA539}"/>
-              </a:ext>
-            </a:extLst>
-          </p:cNvPr>
-          <p:cNvGrpSpPr/>
-          <p:nvPr/>
-        </p:nvGrpSpPr>
-        <p:grpSpPr>
-          <a:xfrm>
-            <a:off x="1454525" y="4245300"/>
-            <a:ext cx="217125" cy="282300"/>
-            <a:chOff x="1454525" y="4245300"/>
-            <a:chExt cx="217125" cy="282300"/>
-          </a:xfrm>
-        </p:grpSpPr>
-        <p:sp>
-          <p:nvSpPr>
-            <p:cNvPr id="353" name="Google Shape;353;p36">
-              <a:extLst>
-                <a:ext uri="{FF2B5EF4-FFF2-40B4-BE49-F238E27FC236}">
-                  <a16:creationId xmlns:a16="http://schemas.microsoft.com/office/drawing/2014/main" id="{1ED29610-87D2-0F33-EED3-8C328B8DC197}"/>
-                </a:ext>
-              </a:extLst>
-            </p:cNvPr>
-            <p:cNvSpPr/>
-            <p:nvPr/>
-          </p:nvSpPr>
-          <p:spPr>
-            <a:xfrm>
-              <a:off x="1454525" y="4258175"/>
-              <a:ext cx="152350" cy="269425"/>
-            </a:xfrm>
-            <a:custGeom>
-              <a:avLst/>
-              <a:gdLst/>
-              <a:ahLst/>
-              <a:cxnLst/>
-              <a:rect l="l" t="t" r="r" b="b"/>
-              <a:pathLst>
-                <a:path w="6094" h="10777" extrusionOk="0">
-                  <a:moveTo>
-                    <a:pt x="2335" y="1"/>
-                  </a:moveTo>
-                  <a:cubicBezTo>
-                    <a:pt x="2230" y="24"/>
-                    <a:pt x="2136" y="59"/>
-                    <a:pt x="2055" y="94"/>
-                  </a:cubicBezTo>
-                  <a:cubicBezTo>
-                    <a:pt x="1634" y="257"/>
-                    <a:pt x="1261" y="514"/>
-                    <a:pt x="957" y="841"/>
-                  </a:cubicBezTo>
-                  <a:cubicBezTo>
-                    <a:pt x="782" y="1028"/>
-                    <a:pt x="642" y="1226"/>
-                    <a:pt x="514" y="1448"/>
-                  </a:cubicBezTo>
-                  <a:cubicBezTo>
-                    <a:pt x="421" y="1623"/>
-                    <a:pt x="339" y="1822"/>
-                    <a:pt x="269" y="2008"/>
-                  </a:cubicBezTo>
-                  <a:cubicBezTo>
-                    <a:pt x="210" y="2183"/>
-                    <a:pt x="152" y="2359"/>
-                    <a:pt x="129" y="2545"/>
-                  </a:cubicBezTo>
-                  <a:cubicBezTo>
-                    <a:pt x="82" y="2860"/>
-                    <a:pt x="47" y="3176"/>
-                    <a:pt x="24" y="3491"/>
-                  </a:cubicBezTo>
-                  <a:cubicBezTo>
-                    <a:pt x="0" y="3771"/>
-                    <a:pt x="0" y="4051"/>
-                    <a:pt x="0" y="4320"/>
-                  </a:cubicBezTo>
-                  <a:cubicBezTo>
-                    <a:pt x="0" y="4541"/>
-                    <a:pt x="24" y="4751"/>
-                    <a:pt x="59" y="4973"/>
-                  </a:cubicBezTo>
-                  <a:cubicBezTo>
-                    <a:pt x="94" y="5242"/>
-                    <a:pt x="129" y="5522"/>
-                    <a:pt x="187" y="5790"/>
-                  </a:cubicBezTo>
-                  <a:cubicBezTo>
-                    <a:pt x="280" y="6164"/>
-                    <a:pt x="386" y="6537"/>
-                    <a:pt x="514" y="6899"/>
-                  </a:cubicBezTo>
-                  <a:cubicBezTo>
-                    <a:pt x="619" y="7203"/>
-                    <a:pt x="759" y="7495"/>
-                    <a:pt x="911" y="7763"/>
-                  </a:cubicBezTo>
-                  <a:cubicBezTo>
-                    <a:pt x="1063" y="8067"/>
-                    <a:pt x="1249" y="8347"/>
-                    <a:pt x="1436" y="8638"/>
-                  </a:cubicBezTo>
-                  <a:cubicBezTo>
-                    <a:pt x="1541" y="8802"/>
-                    <a:pt x="1646" y="8954"/>
-                    <a:pt x="1775" y="9105"/>
-                  </a:cubicBezTo>
-                  <a:cubicBezTo>
-                    <a:pt x="1973" y="9351"/>
-                    <a:pt x="2195" y="9572"/>
-                    <a:pt x="2393" y="9806"/>
-                  </a:cubicBezTo>
-                  <a:cubicBezTo>
-                    <a:pt x="2603" y="10039"/>
-                    <a:pt x="2860" y="10238"/>
-                    <a:pt x="3140" y="10389"/>
-                  </a:cubicBezTo>
-                  <a:cubicBezTo>
-                    <a:pt x="3269" y="10459"/>
-                    <a:pt x="3397" y="10506"/>
-                    <a:pt x="3525" y="10564"/>
-                  </a:cubicBezTo>
-                  <a:cubicBezTo>
-                    <a:pt x="3858" y="10715"/>
-                    <a:pt x="4210" y="10776"/>
-                    <a:pt x="4572" y="10776"/>
-                  </a:cubicBezTo>
-                  <a:cubicBezTo>
-                    <a:pt x="4605" y="10776"/>
-                    <a:pt x="4637" y="10776"/>
-                    <a:pt x="4669" y="10775"/>
-                  </a:cubicBezTo>
-                  <a:cubicBezTo>
-                    <a:pt x="4891" y="10751"/>
-                    <a:pt x="5113" y="10728"/>
-                    <a:pt x="5335" y="10681"/>
-                  </a:cubicBezTo>
-                  <a:cubicBezTo>
-                    <a:pt x="5673" y="10635"/>
-                    <a:pt x="5953" y="10366"/>
-                    <a:pt x="5988" y="10028"/>
-                  </a:cubicBezTo>
-                  <a:cubicBezTo>
-                    <a:pt x="6070" y="9666"/>
-                    <a:pt x="6093" y="9304"/>
-                    <a:pt x="6070" y="8930"/>
-                  </a:cubicBezTo>
-                  <a:cubicBezTo>
-                    <a:pt x="6058" y="8580"/>
-                    <a:pt x="6000" y="8230"/>
-                    <a:pt x="5883" y="7891"/>
-                  </a:cubicBezTo>
-                  <a:cubicBezTo>
-                    <a:pt x="5743" y="7460"/>
-                    <a:pt x="5522" y="7051"/>
-                    <a:pt x="5253" y="6689"/>
-                  </a:cubicBezTo>
-                  <a:cubicBezTo>
-                    <a:pt x="5031" y="6386"/>
-                    <a:pt x="4774" y="6094"/>
-                    <a:pt x="4483" y="5849"/>
-                  </a:cubicBezTo>
-                  <a:cubicBezTo>
-                    <a:pt x="4086" y="5545"/>
-                    <a:pt x="3724" y="5183"/>
-                    <a:pt x="3420" y="4786"/>
-                  </a:cubicBezTo>
-                  <a:cubicBezTo>
-                    <a:pt x="3199" y="4495"/>
-                    <a:pt x="3000" y="4191"/>
-                    <a:pt x="2825" y="3876"/>
-                  </a:cubicBezTo>
-                  <a:cubicBezTo>
-                    <a:pt x="2650" y="3537"/>
-                    <a:pt x="2533" y="3176"/>
-                    <a:pt x="2487" y="2802"/>
-                  </a:cubicBezTo>
-                  <a:cubicBezTo>
-                    <a:pt x="2440" y="2405"/>
-                    <a:pt x="2393" y="2008"/>
-                    <a:pt x="2370" y="1611"/>
-                  </a:cubicBezTo>
-                  <a:cubicBezTo>
-                    <a:pt x="2347" y="1320"/>
-                    <a:pt x="2382" y="1039"/>
-                    <a:pt x="2382" y="748"/>
-                  </a:cubicBezTo>
-                  <a:cubicBezTo>
-                    <a:pt x="2370" y="503"/>
-                    <a:pt x="2347" y="257"/>
-                    <a:pt x="2335" y="1"/>
-                  </a:cubicBezTo>
-                  <a:close/>
-                </a:path>
-              </a:pathLst>
-            </a:custGeom>
-            <a:solidFill>
-              <a:schemeClr val="dk1"/>
-            </a:solidFill>
-            <a:ln>
-              <a:noFill/>
-            </a:ln>
-          </p:spPr>
-          <p:txBody>
-            <a:bodyPr spcFirstLastPara="1" wrap="square" lIns="91425" tIns="91425" rIns="91425" bIns="91425" anchor="ctr" anchorCtr="0">
-              <a:noAutofit/>
-            </a:bodyPr>
-            <a:lstStyle/>
-            <a:p>
-              <a:pPr marL="0" lvl="0" indent="0" algn="l" rtl="0">
-                <a:spcBef>
-                  <a:spcPts val="0"/>
-                </a:spcBef>
-                <a:spcAft>
-                  <a:spcPts val="0"/>
-                </a:spcAft>
-                <a:buNone/>
-              </a:pPr>
-              <a:endParaRPr/>
-            </a:p>
-          </p:txBody>
-        </p:sp>
-        <p:sp>
-          <p:nvSpPr>
-            <p:cNvPr id="354" name="Google Shape;354;p36">
-              <a:extLst>
-                <a:ext uri="{FF2B5EF4-FFF2-40B4-BE49-F238E27FC236}">
-                  <a16:creationId xmlns:a16="http://schemas.microsoft.com/office/drawing/2014/main" id="{1E0F7D2C-4E5D-64C0-656D-52B5BC8BCD92}"/>
-                </a:ext>
-              </a:extLst>
-            </p:cNvPr>
-            <p:cNvSpPr/>
-            <p:nvPr/>
-          </p:nvSpPr>
-          <p:spPr>
-            <a:xfrm>
-              <a:off x="1530400" y="4245300"/>
-              <a:ext cx="141250" cy="263000"/>
-            </a:xfrm>
-            <a:custGeom>
-              <a:avLst/>
-              <a:gdLst/>
-              <a:ahLst/>
-              <a:cxnLst/>
-              <a:rect l="l" t="t" r="r" b="b"/>
-              <a:pathLst>
-                <a:path w="5650" h="10520" extrusionOk="0">
-                  <a:moveTo>
-                    <a:pt x="913" y="1"/>
-                  </a:moveTo>
-                  <a:cubicBezTo>
-                    <a:pt x="783" y="1"/>
-                    <a:pt x="654" y="9"/>
-                    <a:pt x="525" y="25"/>
-                  </a:cubicBezTo>
-                  <a:cubicBezTo>
-                    <a:pt x="339" y="49"/>
-                    <a:pt x="152" y="107"/>
-                    <a:pt x="105" y="317"/>
-                  </a:cubicBezTo>
-                  <a:cubicBezTo>
-                    <a:pt x="47" y="562"/>
-                    <a:pt x="24" y="807"/>
-                    <a:pt x="12" y="1053"/>
-                  </a:cubicBezTo>
-                  <a:cubicBezTo>
-                    <a:pt x="0" y="1286"/>
-                    <a:pt x="12" y="1531"/>
-                    <a:pt x="35" y="1765"/>
-                  </a:cubicBezTo>
-                  <a:cubicBezTo>
-                    <a:pt x="70" y="2103"/>
-                    <a:pt x="117" y="2430"/>
-                    <a:pt x="175" y="2768"/>
-                  </a:cubicBezTo>
-                  <a:cubicBezTo>
-                    <a:pt x="210" y="2955"/>
-                    <a:pt x="269" y="3130"/>
-                    <a:pt x="315" y="3317"/>
-                  </a:cubicBezTo>
-                  <a:cubicBezTo>
-                    <a:pt x="409" y="3691"/>
-                    <a:pt x="561" y="4052"/>
-                    <a:pt x="771" y="4379"/>
-                  </a:cubicBezTo>
-                  <a:cubicBezTo>
-                    <a:pt x="899" y="4601"/>
-                    <a:pt x="1062" y="4800"/>
-                    <a:pt x="1203" y="5010"/>
-                  </a:cubicBezTo>
-                  <a:cubicBezTo>
-                    <a:pt x="1448" y="5336"/>
-                    <a:pt x="1751" y="5640"/>
-                    <a:pt x="2078" y="5885"/>
-                  </a:cubicBezTo>
-                  <a:cubicBezTo>
-                    <a:pt x="2230" y="6014"/>
-                    <a:pt x="2416" y="6095"/>
-                    <a:pt x="2557" y="6224"/>
-                  </a:cubicBezTo>
-                  <a:cubicBezTo>
-                    <a:pt x="2825" y="6445"/>
-                    <a:pt x="3058" y="6702"/>
-                    <a:pt x="3257" y="6994"/>
-                  </a:cubicBezTo>
-                  <a:cubicBezTo>
-                    <a:pt x="3420" y="7251"/>
-                    <a:pt x="3549" y="7543"/>
-                    <a:pt x="3630" y="7834"/>
-                  </a:cubicBezTo>
-                  <a:cubicBezTo>
-                    <a:pt x="3747" y="8231"/>
-                    <a:pt x="3794" y="8628"/>
-                    <a:pt x="3782" y="9025"/>
-                  </a:cubicBezTo>
-                  <a:cubicBezTo>
-                    <a:pt x="3771" y="9329"/>
-                    <a:pt x="3771" y="9632"/>
-                    <a:pt x="3771" y="9936"/>
-                  </a:cubicBezTo>
-                  <a:lnTo>
-                    <a:pt x="3771" y="10484"/>
-                  </a:lnTo>
-                  <a:lnTo>
-                    <a:pt x="3817" y="10519"/>
-                  </a:lnTo>
-                  <a:cubicBezTo>
-                    <a:pt x="3969" y="10391"/>
-                    <a:pt x="4132" y="10286"/>
-                    <a:pt x="4284" y="10157"/>
-                  </a:cubicBezTo>
-                  <a:cubicBezTo>
-                    <a:pt x="4704" y="9819"/>
-                    <a:pt x="5020" y="9375"/>
-                    <a:pt x="5218" y="8885"/>
-                  </a:cubicBezTo>
-                  <a:cubicBezTo>
-                    <a:pt x="5358" y="8547"/>
-                    <a:pt x="5463" y="8196"/>
-                    <a:pt x="5510" y="7834"/>
-                  </a:cubicBezTo>
-                  <a:cubicBezTo>
-                    <a:pt x="5545" y="7601"/>
-                    <a:pt x="5568" y="7368"/>
-                    <a:pt x="5591" y="7134"/>
-                  </a:cubicBezTo>
-                  <a:cubicBezTo>
-                    <a:pt x="5615" y="6842"/>
-                    <a:pt x="5650" y="6550"/>
-                    <a:pt x="5650" y="6259"/>
-                  </a:cubicBezTo>
-                  <a:cubicBezTo>
-                    <a:pt x="5650" y="6037"/>
-                    <a:pt x="5638" y="5827"/>
-                    <a:pt x="5603" y="5605"/>
-                  </a:cubicBezTo>
-                  <a:cubicBezTo>
-                    <a:pt x="5591" y="5336"/>
-                    <a:pt x="5545" y="5068"/>
-                    <a:pt x="5498" y="4800"/>
-                  </a:cubicBezTo>
-                  <a:cubicBezTo>
-                    <a:pt x="5405" y="4426"/>
-                    <a:pt x="5276" y="4064"/>
-                    <a:pt x="5160" y="3714"/>
-                  </a:cubicBezTo>
-                  <a:cubicBezTo>
-                    <a:pt x="4949" y="3142"/>
-                    <a:pt x="4658" y="2617"/>
-                    <a:pt x="4284" y="2150"/>
-                  </a:cubicBezTo>
-                  <a:cubicBezTo>
-                    <a:pt x="3969" y="1753"/>
-                    <a:pt x="3630" y="1368"/>
-                    <a:pt x="3280" y="1018"/>
-                  </a:cubicBezTo>
-                  <a:cubicBezTo>
-                    <a:pt x="3105" y="842"/>
-                    <a:pt x="2907" y="691"/>
-                    <a:pt x="2697" y="551"/>
-                  </a:cubicBezTo>
-                  <a:cubicBezTo>
-                    <a:pt x="2451" y="364"/>
-                    <a:pt x="2183" y="235"/>
-                    <a:pt x="1891" y="154"/>
-                  </a:cubicBezTo>
-                  <a:cubicBezTo>
-                    <a:pt x="1573" y="53"/>
-                    <a:pt x="1242" y="1"/>
-                    <a:pt x="913" y="1"/>
-                  </a:cubicBezTo>
-                  <a:close/>
-                </a:path>
-              </a:pathLst>
-            </a:custGeom>
-            <a:solidFill>
-              <a:schemeClr val="dk1"/>
-            </a:solidFill>
-            <a:ln>
-              <a:noFill/>
-            </a:ln>
-          </p:spPr>
-          <p:txBody>
-            <a:bodyPr spcFirstLastPara="1" wrap="square" lIns="91425" tIns="91425" rIns="91425" bIns="91425" anchor="ctr" anchorCtr="0">
-              <a:noAutofit/>
-            </a:bodyPr>
-            <a:lstStyle/>
-            <a:p>
-              <a:pPr marL="0" lvl="0" indent="0" algn="l" rtl="0">
-                <a:spcBef>
-                  <a:spcPts val="0"/>
-                </a:spcBef>
-                <a:spcAft>
-                  <a:spcPts val="0"/>
-                </a:spcAft>
-                <a:buNone/>
-              </a:pPr>
-              <a:endParaRPr/>
-            </a:p>
-          </p:txBody>
-        </p:sp>
-      </p:grpSp>
-      <p:sp>
-        <p:nvSpPr>
-          <p:cNvPr id="355" name="Google Shape;355;p36">
-            <a:extLst>
-              <a:ext uri="{FF2B5EF4-FFF2-40B4-BE49-F238E27FC236}">
-                <a16:creationId xmlns:a16="http://schemas.microsoft.com/office/drawing/2014/main" id="{7BD62752-F70E-2690-E471-60632730E862}"/>
-              </a:ext>
-            </a:extLst>
-          </p:cNvPr>
-          <p:cNvSpPr/>
-          <p:nvPr/>
-        </p:nvSpPr>
-        <p:spPr>
-          <a:xfrm flipH="1">
-            <a:off x="5672163" y="-31575"/>
-            <a:ext cx="3493599" cy="1054005"/>
-          </a:xfrm>
-          <a:custGeom>
-            <a:avLst/>
-            <a:gdLst/>
-            <a:ahLst/>
-            <a:cxnLst/>
-            <a:rect l="l" t="t" r="r" b="b"/>
-            <a:pathLst>
-              <a:path w="81138" h="24479" extrusionOk="0">
-                <a:moveTo>
-                  <a:pt x="0" y="1"/>
-                </a:moveTo>
-                <a:lnTo>
-                  <a:pt x="0" y="24479"/>
-                </a:lnTo>
-                <a:cubicBezTo>
-                  <a:pt x="444" y="24199"/>
-                  <a:pt x="876" y="23918"/>
-                  <a:pt x="1319" y="23650"/>
-                </a:cubicBezTo>
-                <a:cubicBezTo>
-                  <a:pt x="3327" y="22389"/>
-                  <a:pt x="5603" y="21619"/>
-                  <a:pt x="7973" y="21420"/>
-                </a:cubicBezTo>
-                <a:cubicBezTo>
-                  <a:pt x="8378" y="21385"/>
-                  <a:pt x="8783" y="21368"/>
-                  <a:pt x="9188" y="21368"/>
-                </a:cubicBezTo>
-                <a:cubicBezTo>
-                  <a:pt x="10135" y="21368"/>
-                  <a:pt x="11079" y="21462"/>
-                  <a:pt x="12011" y="21642"/>
-                </a:cubicBezTo>
-                <a:cubicBezTo>
-                  <a:pt x="13949" y="22027"/>
-                  <a:pt x="15899" y="22413"/>
-                  <a:pt x="17813" y="22891"/>
-                </a:cubicBezTo>
-                <a:cubicBezTo>
-                  <a:pt x="20241" y="23498"/>
-                  <a:pt x="22680" y="24058"/>
-                  <a:pt x="25190" y="24257"/>
-                </a:cubicBezTo>
-                <a:cubicBezTo>
-                  <a:pt x="25656" y="24288"/>
-                  <a:pt x="26122" y="24303"/>
-                  <a:pt x="26587" y="24303"/>
-                </a:cubicBezTo>
-                <a:cubicBezTo>
-                  <a:pt x="29645" y="24303"/>
-                  <a:pt x="32678" y="23641"/>
-                  <a:pt x="35474" y="22354"/>
-                </a:cubicBezTo>
-                <a:cubicBezTo>
-                  <a:pt x="38053" y="21152"/>
-                  <a:pt x="40458" y="19588"/>
-                  <a:pt x="42606" y="17720"/>
-                </a:cubicBezTo>
-                <a:cubicBezTo>
-                  <a:pt x="44147" y="16401"/>
-                  <a:pt x="45594" y="14977"/>
-                  <a:pt x="47135" y="13670"/>
-                </a:cubicBezTo>
-                <a:cubicBezTo>
-                  <a:pt x="48641" y="12386"/>
-                  <a:pt x="50193" y="11148"/>
-                  <a:pt x="51781" y="9981"/>
-                </a:cubicBezTo>
-                <a:cubicBezTo>
-                  <a:pt x="53893" y="8452"/>
-                  <a:pt x="56100" y="7063"/>
-                  <a:pt x="58399" y="5849"/>
-                </a:cubicBezTo>
-                <a:cubicBezTo>
-                  <a:pt x="60897" y="4483"/>
-                  <a:pt x="63477" y="3281"/>
-                  <a:pt x="66138" y="2265"/>
-                </a:cubicBezTo>
-                <a:cubicBezTo>
-                  <a:pt x="67749" y="1647"/>
-                  <a:pt x="69395" y="1098"/>
-                  <a:pt x="71041" y="549"/>
-                </a:cubicBezTo>
-                <a:cubicBezTo>
-                  <a:pt x="71543" y="374"/>
-                  <a:pt x="72080" y="164"/>
-                  <a:pt x="72605" y="164"/>
-                </a:cubicBezTo>
-                <a:cubicBezTo>
-                  <a:pt x="73825" y="149"/>
-                  <a:pt x="75044" y="145"/>
-                  <a:pt x="76262" y="145"/>
-                </a:cubicBezTo>
-                <a:cubicBezTo>
-                  <a:pt x="77886" y="145"/>
-                  <a:pt x="79510" y="153"/>
-                  <a:pt x="81138" y="153"/>
-                </a:cubicBezTo>
-                <a:lnTo>
-                  <a:pt x="81138" y="1"/>
-                </a:lnTo>
-                <a:close/>
-              </a:path>
-            </a:pathLst>
-          </a:custGeom>
-          <a:solidFill>
-            <a:schemeClr val="accent1"/>
-          </a:solidFill>
-          <a:ln>
-            <a:noFill/>
-          </a:ln>
-        </p:spPr>
-        <p:txBody>
-          <a:bodyPr spcFirstLastPara="1" wrap="square" lIns="91425" tIns="91425" rIns="91425" bIns="91425" anchor="ctr" anchorCtr="0">
-            <a:noAutofit/>
-          </a:bodyPr>
-          <a:lstStyle/>
-          <a:p>
-            <a:pPr marL="0" lvl="0" indent="0" algn="l" rtl="0">
-              <a:spcBef>
-                <a:spcPts val="0"/>
-              </a:spcBef>
-              <a:spcAft>
-                <a:spcPts val="0"/>
-              </a:spcAft>
-              <a:buNone/>
-            </a:pPr>
-            <a:endParaRPr/>
-          </a:p>
-        </p:txBody>
-      </p:sp>
-      <p:sp>
-        <p:nvSpPr>
-          <p:cNvPr id="356" name="Google Shape;356;p36">
-            <a:extLst>
-              <a:ext uri="{FF2B5EF4-FFF2-40B4-BE49-F238E27FC236}">
-                <a16:creationId xmlns:a16="http://schemas.microsoft.com/office/drawing/2014/main" id="{3E388EAC-9E67-19C6-108F-5CEAF0A80437}"/>
-              </a:ext>
-            </a:extLst>
-          </p:cNvPr>
-          <p:cNvSpPr/>
-          <p:nvPr/>
-        </p:nvSpPr>
-        <p:spPr>
-          <a:xfrm rot="-1826383">
-            <a:off x="-230976" y="-475488"/>
-            <a:ext cx="2396616" cy="1704147"/>
-          </a:xfrm>
-          <a:custGeom>
-            <a:avLst/>
-            <a:gdLst/>
-            <a:ahLst/>
-            <a:cxnLst/>
-            <a:rect l="l" t="t" r="r" b="b"/>
-            <a:pathLst>
-              <a:path w="57186" h="35183" extrusionOk="0">
-                <a:moveTo>
-                  <a:pt x="12829" y="1"/>
-                </a:moveTo>
-                <a:cubicBezTo>
-                  <a:pt x="11872" y="71"/>
-                  <a:pt x="10646" y="141"/>
-                  <a:pt x="9409" y="257"/>
-                </a:cubicBezTo>
-                <a:cubicBezTo>
-                  <a:pt x="7856" y="397"/>
-                  <a:pt x="6350" y="818"/>
-                  <a:pt x="4950" y="1506"/>
-                </a:cubicBezTo>
-                <a:cubicBezTo>
-                  <a:pt x="3129" y="2417"/>
-                  <a:pt x="1728" y="3748"/>
-                  <a:pt x="911" y="5627"/>
-                </a:cubicBezTo>
-                <a:cubicBezTo>
-                  <a:pt x="257" y="7156"/>
-                  <a:pt x="0" y="8814"/>
-                  <a:pt x="175" y="10471"/>
-                </a:cubicBezTo>
-                <a:cubicBezTo>
-                  <a:pt x="292" y="11907"/>
-                  <a:pt x="701" y="13319"/>
-                  <a:pt x="1378" y="14592"/>
-                </a:cubicBezTo>
-                <a:cubicBezTo>
-                  <a:pt x="1751" y="15339"/>
-                  <a:pt x="2277" y="15981"/>
-                  <a:pt x="2930" y="16494"/>
-                </a:cubicBezTo>
-                <a:cubicBezTo>
-                  <a:pt x="4031" y="17306"/>
-                  <a:pt x="5364" y="17747"/>
-                  <a:pt x="6728" y="17747"/>
-                </a:cubicBezTo>
-                <a:cubicBezTo>
-                  <a:pt x="6797" y="17747"/>
-                  <a:pt x="6865" y="17745"/>
-                  <a:pt x="6934" y="17743"/>
-                </a:cubicBezTo>
-                <a:cubicBezTo>
-                  <a:pt x="7880" y="17720"/>
-                  <a:pt x="8825" y="17486"/>
-                  <a:pt x="9759" y="17346"/>
-                </a:cubicBezTo>
-                <a:cubicBezTo>
-                  <a:pt x="10774" y="17183"/>
-                  <a:pt x="11802" y="16926"/>
-                  <a:pt x="12817" y="16844"/>
-                </a:cubicBezTo>
-                <a:cubicBezTo>
-                  <a:pt x="13199" y="16810"/>
-                  <a:pt x="13579" y="16794"/>
-                  <a:pt x="13957" y="16794"/>
-                </a:cubicBezTo>
-                <a:cubicBezTo>
-                  <a:pt x="15522" y="16794"/>
-                  <a:pt x="17058" y="17075"/>
-                  <a:pt x="18572" y="17545"/>
-                </a:cubicBezTo>
-                <a:cubicBezTo>
-                  <a:pt x="20544" y="18152"/>
-                  <a:pt x="22389" y="18981"/>
-                  <a:pt x="23965" y="20346"/>
-                </a:cubicBezTo>
-                <a:cubicBezTo>
-                  <a:pt x="25109" y="21338"/>
-                  <a:pt x="26217" y="22377"/>
-                  <a:pt x="27315" y="23440"/>
-                </a:cubicBezTo>
-                <a:cubicBezTo>
-                  <a:pt x="28003" y="24105"/>
-                  <a:pt x="28645" y="24817"/>
-                  <a:pt x="29252" y="25552"/>
-                </a:cubicBezTo>
-                <a:cubicBezTo>
-                  <a:pt x="29964" y="26404"/>
-                  <a:pt x="30816" y="27035"/>
-                  <a:pt x="31890" y="27292"/>
-                </a:cubicBezTo>
-                <a:cubicBezTo>
-                  <a:pt x="32087" y="27337"/>
-                  <a:pt x="32281" y="27365"/>
-                  <a:pt x="32463" y="27365"/>
-                </a:cubicBezTo>
-                <a:cubicBezTo>
-                  <a:pt x="33069" y="27365"/>
-                  <a:pt x="33540" y="27056"/>
-                  <a:pt x="33513" y="26078"/>
-                </a:cubicBezTo>
-                <a:cubicBezTo>
-                  <a:pt x="33501" y="25482"/>
-                  <a:pt x="33338" y="24887"/>
-                  <a:pt x="33279" y="24292"/>
-                </a:cubicBezTo>
-                <a:cubicBezTo>
-                  <a:pt x="33198" y="23603"/>
-                  <a:pt x="33174" y="22914"/>
-                  <a:pt x="33198" y="22226"/>
-                </a:cubicBezTo>
-                <a:cubicBezTo>
-                  <a:pt x="33247" y="21648"/>
-                  <a:pt x="33545" y="21325"/>
-                  <a:pt x="33962" y="21325"/>
-                </a:cubicBezTo>
-                <a:cubicBezTo>
-                  <a:pt x="34144" y="21325"/>
-                  <a:pt x="34348" y="21386"/>
-                  <a:pt x="34563" y="21514"/>
-                </a:cubicBezTo>
-                <a:cubicBezTo>
-                  <a:pt x="35159" y="21852"/>
-                  <a:pt x="35707" y="22261"/>
-                  <a:pt x="36221" y="22728"/>
-                </a:cubicBezTo>
-                <a:cubicBezTo>
-                  <a:pt x="37365" y="23848"/>
-                  <a:pt x="38357" y="25120"/>
-                  <a:pt x="39186" y="26498"/>
-                </a:cubicBezTo>
-                <a:cubicBezTo>
-                  <a:pt x="40073" y="27934"/>
-                  <a:pt x="40890" y="29439"/>
-                  <a:pt x="41754" y="30898"/>
-                </a:cubicBezTo>
-                <a:cubicBezTo>
-                  <a:pt x="42513" y="32206"/>
-                  <a:pt x="43330" y="33478"/>
-                  <a:pt x="44462" y="34505"/>
-                </a:cubicBezTo>
-                <a:cubicBezTo>
-                  <a:pt x="44754" y="34762"/>
-                  <a:pt x="45104" y="34972"/>
-                  <a:pt x="45466" y="35112"/>
-                </a:cubicBezTo>
-                <a:cubicBezTo>
-                  <a:pt x="45587" y="35160"/>
-                  <a:pt x="45698" y="35183"/>
-                  <a:pt x="45800" y="35183"/>
-                </a:cubicBezTo>
-                <a:cubicBezTo>
-                  <a:pt x="46122" y="35183"/>
-                  <a:pt x="46351" y="34957"/>
-                  <a:pt x="46493" y="34575"/>
-                </a:cubicBezTo>
-                <a:cubicBezTo>
-                  <a:pt x="46656" y="34097"/>
-                  <a:pt x="46563" y="33630"/>
-                  <a:pt x="46400" y="33198"/>
-                </a:cubicBezTo>
-                <a:cubicBezTo>
-                  <a:pt x="45711" y="31389"/>
-                  <a:pt x="44742" y="29743"/>
-                  <a:pt x="43668" y="28155"/>
-                </a:cubicBezTo>
-                <a:cubicBezTo>
-                  <a:pt x="43330" y="27665"/>
-                  <a:pt x="43026" y="27163"/>
-                  <a:pt x="42746" y="26650"/>
-                </a:cubicBezTo>
-                <a:cubicBezTo>
-                  <a:pt x="42594" y="26369"/>
-                  <a:pt x="42548" y="26031"/>
-                  <a:pt x="42793" y="25774"/>
-                </a:cubicBezTo>
-                <a:cubicBezTo>
-                  <a:pt x="42924" y="25630"/>
-                  <a:pt x="43086" y="25560"/>
-                  <a:pt x="43263" y="25560"/>
-                </a:cubicBezTo>
-                <a:cubicBezTo>
-                  <a:pt x="43416" y="25560"/>
-                  <a:pt x="43582" y="25613"/>
-                  <a:pt x="43750" y="25716"/>
-                </a:cubicBezTo>
-                <a:cubicBezTo>
-                  <a:pt x="43983" y="25867"/>
-                  <a:pt x="44193" y="26054"/>
-                  <a:pt x="44415" y="26206"/>
-                </a:cubicBezTo>
-                <a:cubicBezTo>
-                  <a:pt x="44859" y="26521"/>
-                  <a:pt x="45267" y="26930"/>
-                  <a:pt x="45758" y="27105"/>
-                </a:cubicBezTo>
-                <a:cubicBezTo>
-                  <a:pt x="45986" y="27185"/>
-                  <a:pt x="46200" y="27224"/>
-                  <a:pt x="46393" y="27224"/>
-                </a:cubicBezTo>
-                <a:cubicBezTo>
-                  <a:pt x="47045" y="27224"/>
-                  <a:pt x="47445" y="26773"/>
-                  <a:pt x="47310" y="25926"/>
-                </a:cubicBezTo>
-                <a:cubicBezTo>
-                  <a:pt x="47263" y="25681"/>
-                  <a:pt x="47205" y="25436"/>
-                  <a:pt x="47112" y="25190"/>
-                </a:cubicBezTo>
-                <a:cubicBezTo>
-                  <a:pt x="46481" y="23556"/>
-                  <a:pt x="45256" y="22389"/>
-                  <a:pt x="43960" y="21280"/>
-                </a:cubicBezTo>
-                <a:cubicBezTo>
-                  <a:pt x="42921" y="20393"/>
-                  <a:pt x="41882" y="19506"/>
-                  <a:pt x="40855" y="18572"/>
-                </a:cubicBezTo>
-                <a:cubicBezTo>
-                  <a:pt x="40517" y="18233"/>
-                  <a:pt x="40213" y="17860"/>
-                  <a:pt x="39968" y="17440"/>
-                </a:cubicBezTo>
-                <a:cubicBezTo>
-                  <a:pt x="39734" y="17101"/>
-                  <a:pt x="39828" y="16763"/>
-                  <a:pt x="40225" y="16658"/>
-                </a:cubicBezTo>
-                <a:cubicBezTo>
-                  <a:pt x="40530" y="16589"/>
-                  <a:pt x="40870" y="16525"/>
-                  <a:pt x="41193" y="16525"/>
-                </a:cubicBezTo>
-                <a:cubicBezTo>
-                  <a:pt x="41364" y="16525"/>
-                  <a:pt x="41530" y="16543"/>
-                  <a:pt x="41684" y="16588"/>
-                </a:cubicBezTo>
-                <a:cubicBezTo>
-                  <a:pt x="42594" y="16868"/>
-                  <a:pt x="43481" y="17230"/>
-                  <a:pt x="44345" y="17673"/>
-                </a:cubicBezTo>
-                <a:cubicBezTo>
-                  <a:pt x="46061" y="18549"/>
-                  <a:pt x="47450" y="19879"/>
-                  <a:pt x="48804" y="21245"/>
-                </a:cubicBezTo>
-                <a:cubicBezTo>
-                  <a:pt x="50847" y="23311"/>
-                  <a:pt x="52983" y="25307"/>
-                  <a:pt x="54536" y="27817"/>
-                </a:cubicBezTo>
-                <a:cubicBezTo>
-                  <a:pt x="54802" y="28267"/>
-                  <a:pt x="55321" y="28514"/>
-                  <a:pt x="55780" y="28514"/>
-                </a:cubicBezTo>
-                <a:cubicBezTo>
-                  <a:pt x="55905" y="28514"/>
-                  <a:pt x="56025" y="28496"/>
-                  <a:pt x="56135" y="28459"/>
-                </a:cubicBezTo>
-                <a:cubicBezTo>
-                  <a:pt x="56765" y="28249"/>
-                  <a:pt x="57115" y="27700"/>
-                  <a:pt x="57139" y="26988"/>
-                </a:cubicBezTo>
-                <a:cubicBezTo>
-                  <a:pt x="57185" y="25867"/>
-                  <a:pt x="56672" y="24969"/>
-                  <a:pt x="56053" y="24128"/>
-                </a:cubicBezTo>
-                <a:cubicBezTo>
-                  <a:pt x="55283" y="23078"/>
-                  <a:pt x="54466" y="22062"/>
-                  <a:pt x="53590" y="21093"/>
-                </a:cubicBezTo>
-                <a:cubicBezTo>
-                  <a:pt x="52610" y="20031"/>
-                  <a:pt x="51582" y="19027"/>
-                  <a:pt x="50485" y="18082"/>
-                </a:cubicBezTo>
-                <a:cubicBezTo>
-                  <a:pt x="49353" y="17090"/>
-                  <a:pt x="48162" y="16156"/>
-                  <a:pt x="46925" y="15304"/>
-                </a:cubicBezTo>
-                <a:cubicBezTo>
-                  <a:pt x="45454" y="14265"/>
-                  <a:pt x="43925" y="13319"/>
-                  <a:pt x="42361" y="12444"/>
-                </a:cubicBezTo>
-                <a:cubicBezTo>
-                  <a:pt x="39770" y="11055"/>
-                  <a:pt x="37108" y="9782"/>
-                  <a:pt x="34493" y="8428"/>
-                </a:cubicBezTo>
-                <a:cubicBezTo>
-                  <a:pt x="34027" y="8172"/>
-                  <a:pt x="33583" y="7868"/>
-                  <a:pt x="33174" y="7530"/>
-                </a:cubicBezTo>
-                <a:cubicBezTo>
-                  <a:pt x="32964" y="7378"/>
-                  <a:pt x="32988" y="7214"/>
-                  <a:pt x="33256" y="7109"/>
-                </a:cubicBezTo>
-                <a:cubicBezTo>
-                  <a:pt x="33349" y="7086"/>
-                  <a:pt x="33431" y="7051"/>
-                  <a:pt x="33525" y="7016"/>
-                </a:cubicBezTo>
-                <a:cubicBezTo>
-                  <a:pt x="34015" y="6911"/>
-                  <a:pt x="34505" y="6771"/>
-                  <a:pt x="34984" y="6619"/>
-                </a:cubicBezTo>
-                <a:cubicBezTo>
-                  <a:pt x="35626" y="6374"/>
-                  <a:pt x="35707" y="5697"/>
-                  <a:pt x="35170" y="5277"/>
-                </a:cubicBezTo>
-                <a:cubicBezTo>
-                  <a:pt x="34995" y="5137"/>
-                  <a:pt x="34809" y="5020"/>
-                  <a:pt x="34610" y="4938"/>
-                </a:cubicBezTo>
-                <a:cubicBezTo>
-                  <a:pt x="33093" y="4296"/>
-                  <a:pt x="31587" y="3619"/>
-                  <a:pt x="30046" y="3036"/>
-                </a:cubicBezTo>
-                <a:cubicBezTo>
-                  <a:pt x="27770" y="2183"/>
-                  <a:pt x="25447" y="1436"/>
-                  <a:pt x="23031" y="1063"/>
-                </a:cubicBezTo>
-                <a:cubicBezTo>
-                  <a:pt x="20930" y="748"/>
-                  <a:pt x="18840" y="432"/>
-                  <a:pt x="16727" y="199"/>
-                </a:cubicBezTo>
-                <a:cubicBezTo>
-                  <a:pt x="15537" y="59"/>
-                  <a:pt x="14311" y="71"/>
-                  <a:pt x="12829" y="1"/>
-                </a:cubicBezTo>
-                <a:close/>
-              </a:path>
-            </a:pathLst>
-          </a:custGeom>
-          <a:solidFill>
-            <a:schemeClr val="lt2"/>
-          </a:solidFill>
-          <a:ln>
-            <a:noFill/>
-          </a:ln>
-        </p:spPr>
-        <p:txBody>
-          <a:bodyPr spcFirstLastPara="1" wrap="square" lIns="91425" tIns="91425" rIns="91425" bIns="91425" anchor="ctr" anchorCtr="0">
-            <a:noAutofit/>
-          </a:bodyPr>
-          <a:lstStyle/>
-          <a:p>
-            <a:pPr marL="0" lvl="0" indent="0" algn="l" rtl="0">
-              <a:spcBef>
-                <a:spcPts val="0"/>
-              </a:spcBef>
-              <a:spcAft>
-                <a:spcPts val="0"/>
-              </a:spcAft>
-              <a:buNone/>
-            </a:pPr>
-            <a:endParaRPr/>
-          </a:p>
-        </p:txBody>
-      </p:sp>
-      <p:grpSp>
-        <p:nvGrpSpPr>
-          <p:cNvPr id="357" name="Google Shape;357;p36">
-            <a:extLst>
-              <a:ext uri="{FF2B5EF4-FFF2-40B4-BE49-F238E27FC236}">
-                <a16:creationId xmlns:a16="http://schemas.microsoft.com/office/drawing/2014/main" id="{D8F6A307-1044-7DA4-ADBF-E7E89D8B9A86}"/>
-              </a:ext>
-            </a:extLst>
-          </p:cNvPr>
-          <p:cNvGrpSpPr/>
-          <p:nvPr/>
-        </p:nvGrpSpPr>
-        <p:grpSpPr>
-          <a:xfrm rot="2500248">
-            <a:off x="1208331" y="4328103"/>
-            <a:ext cx="135889" cy="176679"/>
-            <a:chOff x="1454525" y="4245300"/>
-            <a:chExt cx="217125" cy="282300"/>
-          </a:xfrm>
-        </p:grpSpPr>
-        <p:sp>
-          <p:nvSpPr>
-            <p:cNvPr id="358" name="Google Shape;358;p36">
-              <a:extLst>
-                <a:ext uri="{FF2B5EF4-FFF2-40B4-BE49-F238E27FC236}">
-                  <a16:creationId xmlns:a16="http://schemas.microsoft.com/office/drawing/2014/main" id="{109F9A28-87E9-A9EE-3D71-86B3C0133943}"/>
-                </a:ext>
-              </a:extLst>
-            </p:cNvPr>
-            <p:cNvSpPr/>
-            <p:nvPr/>
-          </p:nvSpPr>
-          <p:spPr>
-            <a:xfrm>
-              <a:off x="1454525" y="4258175"/>
-              <a:ext cx="152350" cy="269425"/>
-            </a:xfrm>
-            <a:custGeom>
-              <a:avLst/>
-              <a:gdLst/>
-              <a:ahLst/>
-              <a:cxnLst/>
-              <a:rect l="l" t="t" r="r" b="b"/>
-              <a:pathLst>
-                <a:path w="6094" h="10777" extrusionOk="0">
-                  <a:moveTo>
-                    <a:pt x="2335" y="1"/>
-                  </a:moveTo>
-                  <a:cubicBezTo>
-                    <a:pt x="2230" y="24"/>
-                    <a:pt x="2136" y="59"/>
-                    <a:pt x="2055" y="94"/>
-                  </a:cubicBezTo>
-                  <a:cubicBezTo>
-                    <a:pt x="1634" y="257"/>
-                    <a:pt x="1261" y="514"/>
-                    <a:pt x="957" y="841"/>
-                  </a:cubicBezTo>
-                  <a:cubicBezTo>
-                    <a:pt x="782" y="1028"/>
-                    <a:pt x="642" y="1226"/>
-                    <a:pt x="514" y="1448"/>
-                  </a:cubicBezTo>
-                  <a:cubicBezTo>
-                    <a:pt x="421" y="1623"/>
-                    <a:pt x="339" y="1822"/>
-                    <a:pt x="269" y="2008"/>
-                  </a:cubicBezTo>
-                  <a:cubicBezTo>
-                    <a:pt x="210" y="2183"/>
-                    <a:pt x="152" y="2359"/>
-                    <a:pt x="129" y="2545"/>
-                  </a:cubicBezTo>
-                  <a:cubicBezTo>
-                    <a:pt x="82" y="2860"/>
-                    <a:pt x="47" y="3176"/>
-                    <a:pt x="24" y="3491"/>
-                  </a:cubicBezTo>
-                  <a:cubicBezTo>
-                    <a:pt x="0" y="3771"/>
-                    <a:pt x="0" y="4051"/>
-                    <a:pt x="0" y="4320"/>
-                  </a:cubicBezTo>
-                  <a:cubicBezTo>
-                    <a:pt x="0" y="4541"/>
-                    <a:pt x="24" y="4751"/>
-                    <a:pt x="59" y="4973"/>
-                  </a:cubicBezTo>
-                  <a:cubicBezTo>
-                    <a:pt x="94" y="5242"/>
-                    <a:pt x="129" y="5522"/>
-                    <a:pt x="187" y="5790"/>
-                  </a:cubicBezTo>
-                  <a:cubicBezTo>
-                    <a:pt x="280" y="6164"/>
-                    <a:pt x="386" y="6537"/>
-                    <a:pt x="514" y="6899"/>
-                  </a:cubicBezTo>
-                  <a:cubicBezTo>
-                    <a:pt x="619" y="7203"/>
-                    <a:pt x="759" y="7495"/>
-                    <a:pt x="911" y="7763"/>
-                  </a:cubicBezTo>
-                  <a:cubicBezTo>
-                    <a:pt x="1063" y="8067"/>
-                    <a:pt x="1249" y="8347"/>
-                    <a:pt x="1436" y="8638"/>
-                  </a:cubicBezTo>
-                  <a:cubicBezTo>
-                    <a:pt x="1541" y="8802"/>
-                    <a:pt x="1646" y="8954"/>
-                    <a:pt x="1775" y="9105"/>
-                  </a:cubicBezTo>
-                  <a:cubicBezTo>
-                    <a:pt x="1973" y="9351"/>
-                    <a:pt x="2195" y="9572"/>
-                    <a:pt x="2393" y="9806"/>
-                  </a:cubicBezTo>
-                  <a:cubicBezTo>
-                    <a:pt x="2603" y="10039"/>
-                    <a:pt x="2860" y="10238"/>
-                    <a:pt x="3140" y="10389"/>
-                  </a:cubicBezTo>
-                  <a:cubicBezTo>
-                    <a:pt x="3269" y="10459"/>
-                    <a:pt x="3397" y="10506"/>
-                    <a:pt x="3525" y="10564"/>
-                  </a:cubicBezTo>
-                  <a:cubicBezTo>
-                    <a:pt x="3858" y="10715"/>
-                    <a:pt x="4210" y="10776"/>
-                    <a:pt x="4572" y="10776"/>
-                  </a:cubicBezTo>
-                  <a:cubicBezTo>
-                    <a:pt x="4605" y="10776"/>
-                    <a:pt x="4637" y="10776"/>
-                    <a:pt x="4669" y="10775"/>
-                  </a:cubicBezTo>
-                  <a:cubicBezTo>
-                    <a:pt x="4891" y="10751"/>
-                    <a:pt x="5113" y="10728"/>
-                    <a:pt x="5335" y="10681"/>
-                  </a:cubicBezTo>
-                  <a:cubicBezTo>
-                    <a:pt x="5673" y="10635"/>
-                    <a:pt x="5953" y="10366"/>
-                    <a:pt x="5988" y="10028"/>
-                  </a:cubicBezTo>
-                  <a:cubicBezTo>
-                    <a:pt x="6070" y="9666"/>
-                    <a:pt x="6093" y="9304"/>
-                    <a:pt x="6070" y="8930"/>
-                  </a:cubicBezTo>
-                  <a:cubicBezTo>
-                    <a:pt x="6058" y="8580"/>
-                    <a:pt x="6000" y="8230"/>
-                    <a:pt x="5883" y="7891"/>
-                  </a:cubicBezTo>
-                  <a:cubicBezTo>
-                    <a:pt x="5743" y="7460"/>
-                    <a:pt x="5522" y="7051"/>
-                    <a:pt x="5253" y="6689"/>
-                  </a:cubicBezTo>
-                  <a:cubicBezTo>
-                    <a:pt x="5031" y="6386"/>
-                    <a:pt x="4774" y="6094"/>
-                    <a:pt x="4483" y="5849"/>
-                  </a:cubicBezTo>
-                  <a:cubicBezTo>
-                    <a:pt x="4086" y="5545"/>
-                    <a:pt x="3724" y="5183"/>
-                    <a:pt x="3420" y="4786"/>
-                  </a:cubicBezTo>
-                  <a:cubicBezTo>
-                    <a:pt x="3199" y="4495"/>
-                    <a:pt x="3000" y="4191"/>
-                    <a:pt x="2825" y="3876"/>
-                  </a:cubicBezTo>
-                  <a:cubicBezTo>
-                    <a:pt x="2650" y="3537"/>
-                    <a:pt x="2533" y="3176"/>
-                    <a:pt x="2487" y="2802"/>
-                  </a:cubicBezTo>
-                  <a:cubicBezTo>
-                    <a:pt x="2440" y="2405"/>
-                    <a:pt x="2393" y="2008"/>
-                    <a:pt x="2370" y="1611"/>
-                  </a:cubicBezTo>
-                  <a:cubicBezTo>
-                    <a:pt x="2347" y="1320"/>
-                    <a:pt x="2382" y="1039"/>
-                    <a:pt x="2382" y="748"/>
-                  </a:cubicBezTo>
-                  <a:cubicBezTo>
-                    <a:pt x="2370" y="503"/>
-                    <a:pt x="2347" y="257"/>
-                    <a:pt x="2335" y="1"/>
-                  </a:cubicBezTo>
-                  <a:close/>
-                </a:path>
-              </a:pathLst>
-            </a:custGeom>
-            <a:solidFill>
-              <a:schemeClr val="dk1"/>
-            </a:solidFill>
-            <a:ln>
-              <a:noFill/>
-            </a:ln>
-          </p:spPr>
-          <p:txBody>
-            <a:bodyPr spcFirstLastPara="1" wrap="square" lIns="91425" tIns="91425" rIns="91425" bIns="91425" anchor="ctr" anchorCtr="0">
-              <a:noAutofit/>
-            </a:bodyPr>
-            <a:lstStyle/>
-            <a:p>
-              <a:pPr marL="0" lvl="0" indent="0" algn="l" rtl="0">
-                <a:spcBef>
-                  <a:spcPts val="0"/>
-                </a:spcBef>
-                <a:spcAft>
-                  <a:spcPts val="0"/>
-                </a:spcAft>
-                <a:buNone/>
-              </a:pPr>
-              <a:endParaRPr/>
-            </a:p>
-          </p:txBody>
-        </p:sp>
-        <p:sp>
-          <p:nvSpPr>
-            <p:cNvPr id="359" name="Google Shape;359;p36">
-              <a:extLst>
-                <a:ext uri="{FF2B5EF4-FFF2-40B4-BE49-F238E27FC236}">
-                  <a16:creationId xmlns:a16="http://schemas.microsoft.com/office/drawing/2014/main" id="{53E142AC-80B7-A59D-65CE-5A923A607F56}"/>
-                </a:ext>
-              </a:extLst>
-            </p:cNvPr>
-            <p:cNvSpPr/>
-            <p:nvPr/>
-          </p:nvSpPr>
-          <p:spPr>
-            <a:xfrm>
-              <a:off x="1530400" y="4245300"/>
-              <a:ext cx="141250" cy="263000"/>
-            </a:xfrm>
-            <a:custGeom>
-              <a:avLst/>
-              <a:gdLst/>
-              <a:ahLst/>
-              <a:cxnLst/>
-              <a:rect l="l" t="t" r="r" b="b"/>
-              <a:pathLst>
-                <a:path w="5650" h="10520" extrusionOk="0">
-                  <a:moveTo>
-                    <a:pt x="913" y="1"/>
-                  </a:moveTo>
-                  <a:cubicBezTo>
-                    <a:pt x="783" y="1"/>
-                    <a:pt x="654" y="9"/>
-                    <a:pt x="525" y="25"/>
-                  </a:cubicBezTo>
-                  <a:cubicBezTo>
-                    <a:pt x="339" y="49"/>
-                    <a:pt x="152" y="107"/>
-                    <a:pt x="105" y="317"/>
-                  </a:cubicBezTo>
-                  <a:cubicBezTo>
-                    <a:pt x="47" y="562"/>
-                    <a:pt x="24" y="807"/>
-                    <a:pt x="12" y="1053"/>
-                  </a:cubicBezTo>
-                  <a:cubicBezTo>
-                    <a:pt x="0" y="1286"/>
-                    <a:pt x="12" y="1531"/>
-                    <a:pt x="35" y="1765"/>
-                  </a:cubicBezTo>
-                  <a:cubicBezTo>
-                    <a:pt x="70" y="2103"/>
-                    <a:pt x="117" y="2430"/>
-                    <a:pt x="175" y="2768"/>
-                  </a:cubicBezTo>
-                  <a:cubicBezTo>
-                    <a:pt x="210" y="2955"/>
-                    <a:pt x="269" y="3130"/>
-                    <a:pt x="315" y="3317"/>
-                  </a:cubicBezTo>
-                  <a:cubicBezTo>
-                    <a:pt x="409" y="3691"/>
-                    <a:pt x="561" y="4052"/>
-                    <a:pt x="771" y="4379"/>
-                  </a:cubicBezTo>
-                  <a:cubicBezTo>
-                    <a:pt x="899" y="4601"/>
-                    <a:pt x="1062" y="4800"/>
-                    <a:pt x="1203" y="5010"/>
-                  </a:cubicBezTo>
-                  <a:cubicBezTo>
-                    <a:pt x="1448" y="5336"/>
-                    <a:pt x="1751" y="5640"/>
-                    <a:pt x="2078" y="5885"/>
-                  </a:cubicBezTo>
-                  <a:cubicBezTo>
-                    <a:pt x="2230" y="6014"/>
-                    <a:pt x="2416" y="6095"/>
-                    <a:pt x="2557" y="6224"/>
-                  </a:cubicBezTo>
-                  <a:cubicBezTo>
-                    <a:pt x="2825" y="6445"/>
-                    <a:pt x="3058" y="6702"/>
-                    <a:pt x="3257" y="6994"/>
-                  </a:cubicBezTo>
-                  <a:cubicBezTo>
-                    <a:pt x="3420" y="7251"/>
-                    <a:pt x="3549" y="7543"/>
-                    <a:pt x="3630" y="7834"/>
-                  </a:cubicBezTo>
-                  <a:cubicBezTo>
-                    <a:pt x="3747" y="8231"/>
-                    <a:pt x="3794" y="8628"/>
-                    <a:pt x="3782" y="9025"/>
-                  </a:cubicBezTo>
-                  <a:cubicBezTo>
-                    <a:pt x="3771" y="9329"/>
-                    <a:pt x="3771" y="9632"/>
-                    <a:pt x="3771" y="9936"/>
-                  </a:cubicBezTo>
-                  <a:lnTo>
-                    <a:pt x="3771" y="10484"/>
-                  </a:lnTo>
-                  <a:lnTo>
-                    <a:pt x="3817" y="10519"/>
-                  </a:lnTo>
-                  <a:cubicBezTo>
-                    <a:pt x="3969" y="10391"/>
-                    <a:pt x="4132" y="10286"/>
-                    <a:pt x="4284" y="10157"/>
-                  </a:cubicBezTo>
-                  <a:cubicBezTo>
-                    <a:pt x="4704" y="9819"/>
-                    <a:pt x="5020" y="9375"/>
-                    <a:pt x="5218" y="8885"/>
-                  </a:cubicBezTo>
-                  <a:cubicBezTo>
-                    <a:pt x="5358" y="8547"/>
-                    <a:pt x="5463" y="8196"/>
-                    <a:pt x="5510" y="7834"/>
-                  </a:cubicBezTo>
-                  <a:cubicBezTo>
-                    <a:pt x="5545" y="7601"/>
-                    <a:pt x="5568" y="7368"/>
-                    <a:pt x="5591" y="7134"/>
-                  </a:cubicBezTo>
-                  <a:cubicBezTo>
-                    <a:pt x="5615" y="6842"/>
-                    <a:pt x="5650" y="6550"/>
-                    <a:pt x="5650" y="6259"/>
-                  </a:cubicBezTo>
-                  <a:cubicBezTo>
-                    <a:pt x="5650" y="6037"/>
-                    <a:pt x="5638" y="5827"/>
-                    <a:pt x="5603" y="5605"/>
-                  </a:cubicBezTo>
-                  <a:cubicBezTo>
-                    <a:pt x="5591" y="5336"/>
-                    <a:pt x="5545" y="5068"/>
-                    <a:pt x="5498" y="4800"/>
-                  </a:cubicBezTo>
-                  <a:cubicBezTo>
-                    <a:pt x="5405" y="4426"/>
-                    <a:pt x="5276" y="4064"/>
-                    <a:pt x="5160" y="3714"/>
-                  </a:cubicBezTo>
-                  <a:cubicBezTo>
-                    <a:pt x="4949" y="3142"/>
-                    <a:pt x="4658" y="2617"/>
-                    <a:pt x="4284" y="2150"/>
-                  </a:cubicBezTo>
-                  <a:cubicBezTo>
-                    <a:pt x="3969" y="1753"/>
-                    <a:pt x="3630" y="1368"/>
-                    <a:pt x="3280" y="1018"/>
-                  </a:cubicBezTo>
-                  <a:cubicBezTo>
-                    <a:pt x="3105" y="842"/>
-                    <a:pt x="2907" y="691"/>
-                    <a:pt x="2697" y="551"/>
-                  </a:cubicBezTo>
-                  <a:cubicBezTo>
-                    <a:pt x="2451" y="364"/>
-                    <a:pt x="2183" y="235"/>
-                    <a:pt x="1891" y="154"/>
-                  </a:cubicBezTo>
-                  <a:cubicBezTo>
-                    <a:pt x="1573" y="53"/>
-                    <a:pt x="1242" y="1"/>
-                    <a:pt x="913" y="1"/>
-                  </a:cubicBezTo>
-                  <a:close/>
-                </a:path>
-              </a:pathLst>
-            </a:custGeom>
-            <a:solidFill>
-              <a:schemeClr val="dk1"/>
-            </a:solidFill>
-            <a:ln>
-              <a:noFill/>
-            </a:ln>
-          </p:spPr>
-          <p:txBody>
-            <a:bodyPr spcFirstLastPara="1" wrap="square" lIns="91425" tIns="91425" rIns="91425" bIns="91425" anchor="ctr" anchorCtr="0">
-              <a:noAutofit/>
-            </a:bodyPr>
-            <a:lstStyle/>
-            <a:p>
-              <a:pPr marL="0" lvl="0" indent="0" algn="l" rtl="0">
-                <a:spcBef>
-                  <a:spcPts val="0"/>
-                </a:spcBef>
-                <a:spcAft>
-                  <a:spcPts val="0"/>
-                </a:spcAft>
-                <a:buNone/>
-              </a:pPr>
-              <a:endParaRPr/>
-            </a:p>
-          </p:txBody>
-        </p:sp>
-      </p:grpSp>
-      <p:sp>
-        <p:nvSpPr>
-          <p:cNvPr id="360" name="Google Shape;360;p36">
-            <a:extLst>
-              <a:ext uri="{FF2B5EF4-FFF2-40B4-BE49-F238E27FC236}">
-                <a16:creationId xmlns:a16="http://schemas.microsoft.com/office/drawing/2014/main" id="{FE20AAD1-9936-BADB-1A5E-2CD7D25B2499}"/>
-              </a:ext>
-            </a:extLst>
-          </p:cNvPr>
-          <p:cNvSpPr/>
-          <p:nvPr/>
-        </p:nvSpPr>
-        <p:spPr>
-          <a:xfrm rot="5400000">
-            <a:off x="-534876" y="3859462"/>
-            <a:ext cx="2123739" cy="1053969"/>
-          </a:xfrm>
-          <a:custGeom>
-            <a:avLst/>
-            <a:gdLst/>
-            <a:ahLst/>
-            <a:cxnLst/>
-            <a:rect l="l" t="t" r="r" b="b"/>
-            <a:pathLst>
-              <a:path w="83064" h="41223" extrusionOk="0">
-                <a:moveTo>
-                  <a:pt x="1958" y="1"/>
-                </a:moveTo>
-                <a:cubicBezTo>
-                  <a:pt x="1411" y="1"/>
-                  <a:pt x="865" y="223"/>
-                  <a:pt x="467" y="671"/>
-                </a:cubicBezTo>
-                <a:cubicBezTo>
-                  <a:pt x="23" y="1185"/>
-                  <a:pt x="0" y="1780"/>
-                  <a:pt x="58" y="2387"/>
-                </a:cubicBezTo>
-                <a:cubicBezTo>
-                  <a:pt x="175" y="3391"/>
-                  <a:pt x="665" y="4255"/>
-                  <a:pt x="1191" y="5095"/>
-                </a:cubicBezTo>
-                <a:cubicBezTo>
-                  <a:pt x="2533" y="7197"/>
-                  <a:pt x="4121" y="9146"/>
-                  <a:pt x="5906" y="10897"/>
-                </a:cubicBezTo>
-                <a:cubicBezTo>
-                  <a:pt x="6840" y="11819"/>
-                  <a:pt x="7832" y="12683"/>
-                  <a:pt x="8825" y="13547"/>
-                </a:cubicBezTo>
-                <a:cubicBezTo>
-                  <a:pt x="10821" y="15227"/>
-                  <a:pt x="12933" y="16780"/>
-                  <a:pt x="15140" y="18181"/>
-                </a:cubicBezTo>
-                <a:cubicBezTo>
-                  <a:pt x="17719" y="19838"/>
-                  <a:pt x="20451" y="21216"/>
-                  <a:pt x="23171" y="22605"/>
-                </a:cubicBezTo>
-                <a:cubicBezTo>
-                  <a:pt x="24968" y="23538"/>
-                  <a:pt x="26766" y="24461"/>
-                  <a:pt x="28540" y="25429"/>
-                </a:cubicBezTo>
-                <a:cubicBezTo>
-                  <a:pt x="29112" y="25745"/>
-                  <a:pt x="29602" y="26176"/>
-                  <a:pt x="30081" y="26620"/>
-                </a:cubicBezTo>
-                <a:cubicBezTo>
-                  <a:pt x="30221" y="26783"/>
-                  <a:pt x="30268" y="27017"/>
-                  <a:pt x="30209" y="27227"/>
-                </a:cubicBezTo>
-                <a:cubicBezTo>
-                  <a:pt x="30127" y="27402"/>
-                  <a:pt x="29859" y="27542"/>
-                  <a:pt x="29649" y="27589"/>
-                </a:cubicBezTo>
-                <a:cubicBezTo>
-                  <a:pt x="29582" y="27596"/>
-                  <a:pt x="29514" y="27600"/>
-                  <a:pt x="29445" y="27600"/>
-                </a:cubicBezTo>
-                <a:cubicBezTo>
-                  <a:pt x="29287" y="27600"/>
-                  <a:pt x="29127" y="27579"/>
-                  <a:pt x="28972" y="27531"/>
-                </a:cubicBezTo>
-                <a:cubicBezTo>
-                  <a:pt x="28575" y="27437"/>
-                  <a:pt x="28190" y="27297"/>
-                  <a:pt x="27793" y="27204"/>
-                </a:cubicBezTo>
-                <a:cubicBezTo>
-                  <a:pt x="27428" y="27131"/>
-                  <a:pt x="27068" y="27029"/>
-                  <a:pt x="26695" y="27029"/>
-                </a:cubicBezTo>
-                <a:cubicBezTo>
-                  <a:pt x="26531" y="27029"/>
-                  <a:pt x="26364" y="27049"/>
-                  <a:pt x="26194" y="27099"/>
-                </a:cubicBezTo>
-                <a:cubicBezTo>
-                  <a:pt x="25598" y="27285"/>
-                  <a:pt x="25237" y="27752"/>
-                  <a:pt x="25435" y="28336"/>
-                </a:cubicBezTo>
-                <a:cubicBezTo>
-                  <a:pt x="25587" y="28756"/>
-                  <a:pt x="25820" y="29141"/>
-                  <a:pt x="26124" y="29468"/>
-                </a:cubicBezTo>
-                <a:cubicBezTo>
-                  <a:pt x="27279" y="30659"/>
-                  <a:pt x="28703" y="31453"/>
-                  <a:pt x="30268" y="31955"/>
-                </a:cubicBezTo>
-                <a:cubicBezTo>
-                  <a:pt x="32240" y="32597"/>
-                  <a:pt x="34260" y="33122"/>
-                  <a:pt x="36256" y="33717"/>
-                </a:cubicBezTo>
-                <a:cubicBezTo>
-                  <a:pt x="37108" y="33974"/>
-                  <a:pt x="37948" y="34277"/>
-                  <a:pt x="38684" y="34814"/>
-                </a:cubicBezTo>
-                <a:cubicBezTo>
-                  <a:pt x="39174" y="35188"/>
-                  <a:pt x="39197" y="35772"/>
-                  <a:pt x="38684" y="36110"/>
-                </a:cubicBezTo>
-                <a:cubicBezTo>
-                  <a:pt x="38322" y="36344"/>
-                  <a:pt x="37925" y="36519"/>
-                  <a:pt x="37505" y="36624"/>
-                </a:cubicBezTo>
-                <a:cubicBezTo>
-                  <a:pt x="36862" y="36788"/>
-                  <a:pt x="36214" y="36848"/>
-                  <a:pt x="35560" y="36848"/>
-                </a:cubicBezTo>
-                <a:cubicBezTo>
-                  <a:pt x="35241" y="36848"/>
-                  <a:pt x="34920" y="36833"/>
-                  <a:pt x="34598" y="36810"/>
-                </a:cubicBezTo>
-                <a:cubicBezTo>
-                  <a:pt x="33081" y="36717"/>
-                  <a:pt x="31587" y="36425"/>
-                  <a:pt x="30139" y="35947"/>
-                </a:cubicBezTo>
-                <a:cubicBezTo>
-                  <a:pt x="27921" y="35188"/>
-                  <a:pt x="25703" y="34406"/>
-                  <a:pt x="23521" y="33542"/>
-                </a:cubicBezTo>
-                <a:cubicBezTo>
-                  <a:pt x="21922" y="32912"/>
-                  <a:pt x="20381" y="32141"/>
-                  <a:pt x="18828" y="31406"/>
-                </a:cubicBezTo>
-                <a:cubicBezTo>
-                  <a:pt x="18268" y="31149"/>
-                  <a:pt x="17766" y="30787"/>
-                  <a:pt x="17194" y="30589"/>
-                </a:cubicBezTo>
-                <a:cubicBezTo>
-                  <a:pt x="16991" y="30519"/>
-                  <a:pt x="16792" y="30485"/>
-                  <a:pt x="16606" y="30485"/>
-                </a:cubicBezTo>
-                <a:cubicBezTo>
-                  <a:pt x="15895" y="30485"/>
-                  <a:pt x="15362" y="30982"/>
-                  <a:pt x="15408" y="31861"/>
-                </a:cubicBezTo>
-                <a:cubicBezTo>
-                  <a:pt x="15420" y="32176"/>
-                  <a:pt x="15502" y="32503"/>
-                  <a:pt x="15642" y="32795"/>
-                </a:cubicBezTo>
-                <a:cubicBezTo>
-                  <a:pt x="16062" y="33740"/>
-                  <a:pt x="16809" y="34429"/>
-                  <a:pt x="17673" y="34943"/>
-                </a:cubicBezTo>
-                <a:cubicBezTo>
-                  <a:pt x="18758" y="35608"/>
-                  <a:pt x="19890" y="36215"/>
-                  <a:pt x="21034" y="36775"/>
-                </a:cubicBezTo>
-                <a:cubicBezTo>
-                  <a:pt x="23439" y="37931"/>
-                  <a:pt x="25937" y="38853"/>
-                  <a:pt x="28517" y="39530"/>
-                </a:cubicBezTo>
-                <a:cubicBezTo>
-                  <a:pt x="30513" y="40067"/>
-                  <a:pt x="32544" y="40487"/>
-                  <a:pt x="34563" y="40919"/>
-                </a:cubicBezTo>
-                <a:cubicBezTo>
-                  <a:pt x="35287" y="41094"/>
-                  <a:pt x="36034" y="41199"/>
-                  <a:pt x="36781" y="41211"/>
-                </a:cubicBezTo>
-                <a:cubicBezTo>
-                  <a:pt x="52072" y="41223"/>
-                  <a:pt x="67375" y="41223"/>
-                  <a:pt x="82667" y="41223"/>
-                </a:cubicBezTo>
-                <a:lnTo>
-                  <a:pt x="83063" y="41223"/>
-                </a:lnTo>
-                <a:lnTo>
-                  <a:pt x="83063" y="13967"/>
-                </a:lnTo>
-                <a:cubicBezTo>
-                  <a:pt x="81908" y="14200"/>
-                  <a:pt x="80799" y="14375"/>
-                  <a:pt x="79690" y="14644"/>
-                </a:cubicBezTo>
-                <a:cubicBezTo>
-                  <a:pt x="77846" y="15076"/>
-                  <a:pt x="76013" y="15531"/>
-                  <a:pt x="74192" y="16033"/>
-                </a:cubicBezTo>
-                <a:cubicBezTo>
-                  <a:pt x="72219" y="16558"/>
-                  <a:pt x="70247" y="17130"/>
-                  <a:pt x="68286" y="17702"/>
-                </a:cubicBezTo>
-                <a:cubicBezTo>
-                  <a:pt x="66430" y="18251"/>
-                  <a:pt x="64585" y="18846"/>
-                  <a:pt x="62730" y="19383"/>
-                </a:cubicBezTo>
-                <a:cubicBezTo>
-                  <a:pt x="60920" y="19920"/>
-                  <a:pt x="59088" y="20410"/>
-                  <a:pt x="57278" y="20924"/>
-                </a:cubicBezTo>
-                <a:cubicBezTo>
-                  <a:pt x="55796" y="21344"/>
-                  <a:pt x="54278" y="21577"/>
-                  <a:pt x="52749" y="21589"/>
-                </a:cubicBezTo>
-                <a:cubicBezTo>
-                  <a:pt x="52598" y="21593"/>
-                  <a:pt x="52446" y="21594"/>
-                  <a:pt x="52295" y="21594"/>
-                </a:cubicBezTo>
-                <a:cubicBezTo>
-                  <a:pt x="50941" y="21594"/>
-                  <a:pt x="49588" y="21455"/>
-                  <a:pt x="48255" y="21192"/>
-                </a:cubicBezTo>
-                <a:cubicBezTo>
-                  <a:pt x="46703" y="20877"/>
-                  <a:pt x="45150" y="20527"/>
-                  <a:pt x="43598" y="20188"/>
-                </a:cubicBezTo>
-                <a:cubicBezTo>
-                  <a:pt x="42839" y="20025"/>
-                  <a:pt x="42080" y="19815"/>
-                  <a:pt x="41310" y="19721"/>
-                </a:cubicBezTo>
-                <a:cubicBezTo>
-                  <a:pt x="41236" y="19713"/>
-                  <a:pt x="41162" y="19709"/>
-                  <a:pt x="41090" y="19709"/>
-                </a:cubicBezTo>
-                <a:cubicBezTo>
-                  <a:pt x="40278" y="19709"/>
-                  <a:pt x="39629" y="20244"/>
-                  <a:pt x="39758" y="21134"/>
-                </a:cubicBezTo>
-                <a:cubicBezTo>
-                  <a:pt x="39851" y="21647"/>
-                  <a:pt x="40213" y="21928"/>
-                  <a:pt x="40633" y="22173"/>
-                </a:cubicBezTo>
-                <a:cubicBezTo>
-                  <a:pt x="41088" y="22395"/>
-                  <a:pt x="41520" y="22663"/>
-                  <a:pt x="41929" y="22955"/>
-                </a:cubicBezTo>
-                <a:cubicBezTo>
-                  <a:pt x="42255" y="23223"/>
-                  <a:pt x="42255" y="23620"/>
-                  <a:pt x="41929" y="23889"/>
-                </a:cubicBezTo>
-                <a:cubicBezTo>
-                  <a:pt x="41532" y="24215"/>
-                  <a:pt x="41088" y="24484"/>
-                  <a:pt x="40610" y="24671"/>
-                </a:cubicBezTo>
-                <a:cubicBezTo>
-                  <a:pt x="39805" y="24960"/>
-                  <a:pt x="38980" y="25081"/>
-                  <a:pt x="38137" y="25081"/>
-                </a:cubicBezTo>
-                <a:cubicBezTo>
-                  <a:pt x="37720" y="25081"/>
-                  <a:pt x="37299" y="25052"/>
-                  <a:pt x="36874" y="24998"/>
-                </a:cubicBezTo>
-                <a:cubicBezTo>
-                  <a:pt x="35812" y="24869"/>
-                  <a:pt x="34762" y="24706"/>
-                  <a:pt x="33793" y="24286"/>
-                </a:cubicBezTo>
-                <a:cubicBezTo>
-                  <a:pt x="31295" y="23223"/>
-                  <a:pt x="28820" y="22138"/>
-                  <a:pt x="26392" y="20947"/>
-                </a:cubicBezTo>
-                <a:cubicBezTo>
-                  <a:pt x="24606" y="20083"/>
-                  <a:pt x="22879" y="19091"/>
-                  <a:pt x="21174" y="18064"/>
-                </a:cubicBezTo>
-                <a:cubicBezTo>
-                  <a:pt x="18070" y="16208"/>
-                  <a:pt x="15210" y="13990"/>
-                  <a:pt x="12630" y="11457"/>
-                </a:cubicBezTo>
-                <a:cubicBezTo>
-                  <a:pt x="11533" y="10383"/>
-                  <a:pt x="10471" y="9274"/>
-                  <a:pt x="9455" y="8119"/>
-                </a:cubicBezTo>
-                <a:cubicBezTo>
-                  <a:pt x="8229" y="6753"/>
-                  <a:pt x="7062" y="5341"/>
-                  <a:pt x="5918" y="3916"/>
-                </a:cubicBezTo>
-                <a:cubicBezTo>
-                  <a:pt x="5089" y="2889"/>
-                  <a:pt x="4354" y="1792"/>
-                  <a:pt x="3549" y="776"/>
-                </a:cubicBezTo>
-                <a:cubicBezTo>
-                  <a:pt x="3142" y="261"/>
-                  <a:pt x="2550" y="1"/>
-                  <a:pt x="1958" y="1"/>
-                </a:cubicBezTo>
-                <a:close/>
-              </a:path>
-            </a:pathLst>
-          </a:custGeom>
-          <a:solidFill>
-            <a:schemeClr val="lt2"/>
-          </a:solidFill>
-          <a:ln>
-            <a:noFill/>
-          </a:ln>
-        </p:spPr>
-        <p:txBody>
-          <a:bodyPr spcFirstLastPara="1" wrap="square" lIns="91425" tIns="91425" rIns="91425" bIns="91425" anchor="ctr" anchorCtr="0">
-            <a:noAutofit/>
-          </a:bodyPr>
-          <a:lstStyle/>
-          <a:p>
-            <a:pPr marL="0" lvl="0" indent="0" algn="l" rtl="0">
-              <a:spcBef>
-                <a:spcPts val="0"/>
-              </a:spcBef>
-              <a:spcAft>
-                <a:spcPts val="0"/>
-              </a:spcAft>
-              <a:buNone/>
-            </a:pPr>
-            <a:endParaRPr/>
-          </a:p>
-        </p:txBody>
-      </p:sp>
-      <p:sp>
-        <p:nvSpPr>
-          <p:cNvPr id="8" name="TextBox 7">
-            <a:extLst>
-              <a:ext uri="{FF2B5EF4-FFF2-40B4-BE49-F238E27FC236}">
-                <a16:creationId xmlns:a16="http://schemas.microsoft.com/office/drawing/2014/main" id="{DF7D2CD3-4348-F620-3CB8-B705A722EC64}"/>
-              </a:ext>
-            </a:extLst>
-          </p:cNvPr>
-          <p:cNvSpPr txBox="1"/>
-          <p:nvPr/>
-        </p:nvSpPr>
-        <p:spPr>
-          <a:xfrm>
-            <a:off x="2307425" y="2697877"/>
-            <a:ext cx="4676436" cy="861774"/>
-          </a:xfrm>
-          <a:prstGeom prst="rect">
-            <a:avLst/>
-          </a:prstGeom>
-          <a:noFill/>
-        </p:spPr>
-        <p:txBody>
-          <a:bodyPr wrap="square" rtlCol="0">
-            <a:spAutoFit/>
-          </a:bodyPr>
-          <a:lstStyle/>
-          <a:p>
-            <a:r>
-              <a:rPr lang="en" dirty="0"/>
-              <a:t> </a:t>
-            </a:r>
-            <a:r>
-              <a:rPr lang="en" sz="5000" dirty="0">
-                <a:latin typeface="Yusei Magic" panose="020B0604020202020204" charset="-128"/>
-                <a:ea typeface="Yusei Magic" panose="020B0604020202020204" charset="-128"/>
-                <a:cs typeface="Yusei Magic" panose="020B0604020202020204" charset="-128"/>
-              </a:rPr>
-              <a:t>Demonstration</a:t>
-            </a:r>
-            <a:endParaRPr lang="en-CA" sz="5000" dirty="0">
-              <a:latin typeface="Yusei Magic" panose="020B0604020202020204" charset="-128"/>
-              <a:ea typeface="Yusei Magic" panose="020B0604020202020204" charset="-128"/>
-              <a:cs typeface="Yusei Magic" panose="020B0604020202020204" charset="-128"/>
-            </a:endParaRPr>
-          </a:p>
-        </p:txBody>
-      </p:sp>
-    </p:spTree>
-    <p:extLst>
-      <p:ext uri="{BB962C8B-B14F-4D97-AF65-F5344CB8AC3E}">
-        <p14:creationId xmlns:p14="http://schemas.microsoft.com/office/powerpoint/2010/main" val="3546235126"/>
-      </p:ext>
-    </p:extLst>
-  </p:cSld>
-  <p:clrMapOvr>
-    <a:masterClrMapping/>
-  </p:clrMapOvr>
-  <p:transition spd="slow">
-    <p:cover/>
-  </p:transition>
-</p:sld>
-</file>
-
-<file path=ppt/slides/slide18.xml><?xml version="1.0" encoding="utf-8"?>
-<p:sld xmlns:a="http://schemas.openxmlformats.org/drawingml/2006/main" xmlns:r="http://schemas.openxmlformats.org/officeDocument/2006/relationships" xmlns:p="http://schemas.openxmlformats.org/presentationml/2006/main">
-  <p:cSld>
-    <p:spTree>
-      <p:nvGrpSpPr>
         <p:cNvPr id="1" name="Shape 239">
           <a:extLst>
             <a:ext uri="{FF2B5EF4-FFF2-40B4-BE49-F238E27FC236}">
@@ -40963,13 +38269,15 @@
         </p:nvPicPr>
         <p:blipFill>
           <a:blip r:embed="rId3"/>
-          <a:srcRect t="3817" b="3817"/>
-          <a:stretch/>
+          <a:srcRect t="-2808" b="746"/>
+          <a:stretch>
+            <a:fillRect/>
+          </a:stretch>
         </p:blipFill>
         <p:spPr>
           <a:xfrm>
-            <a:off x="5996102" y="1671782"/>
-            <a:ext cx="2456873" cy="1940630"/>
+            <a:off x="5996102" y="1532587"/>
+            <a:ext cx="2456873" cy="2144332"/>
           </a:xfrm>
           <a:prstGeom prst="rect">
             <a:avLst/>
